--- a/revision/plotting/Figures_3_4_original_design_revised.pptx
+++ b/revision/plotting/Figures_3_4_original_design_revised.pptx
@@ -163,7 +163,7 @@
       </p:grpSpPr>
       <p:sp>
         <p:nvSpPr>
-          <p:cNvPr id="2" name="页眉占位符 1"/>
+          <p:cNvPr id="2" name="Header Placeholder 1"/>
           <p:cNvSpPr>
             <a:spLocks noGrp="1"/>
           </p:cNvSpPr>
@@ -194,7 +194,7 @@
       </p:sp>
       <p:sp>
         <p:nvSpPr>
-          <p:cNvPr id="3" name="日期占位符 2"/>
+          <p:cNvPr id="3" name="Date Placeholder 2"/>
           <p:cNvSpPr>
             <a:spLocks noGrp="1"/>
           </p:cNvSpPr>
@@ -229,7 +229,7 @@
       </p:sp>
       <p:sp>
         <p:nvSpPr>
-          <p:cNvPr id="4" name="页脚占位符 3"/>
+          <p:cNvPr id="4" name="Footer Placeholder 3"/>
           <p:cNvSpPr>
             <a:spLocks noGrp="1"/>
           </p:cNvSpPr>
@@ -260,7 +260,7 @@
       </p:sp>
       <p:sp>
         <p:nvSpPr>
-          <p:cNvPr id="5" name="灯片编号占位符 4"/>
+          <p:cNvPr id="5" name="Slide Number Placeholder 4"/>
           <p:cNvSpPr>
             <a:spLocks noGrp="1"/>
           </p:cNvSpPr>
@@ -328,7 +328,7 @@
       </p:grpSpPr>
       <p:sp>
         <p:nvSpPr>
-          <p:cNvPr id="2" name="页眉占位符 1"/>
+          <p:cNvPr id="2" name="Header Placeholder 1"/>
           <p:cNvSpPr>
             <a:spLocks noGrp="1"/>
           </p:cNvSpPr>
@@ -359,7 +359,7 @@
       </p:sp>
       <p:sp>
         <p:nvSpPr>
-          <p:cNvPr id="3" name="日期占位符 2"/>
+          <p:cNvPr id="3" name="Date Placeholder 2"/>
           <p:cNvSpPr>
             <a:spLocks noGrp="1"/>
           </p:cNvSpPr>
@@ -394,7 +394,7 @@
       </p:sp>
       <p:sp>
         <p:nvSpPr>
-          <p:cNvPr id="4" name="幻灯片图像占位符 3"/>
+          <p:cNvPr id="4" name="Slide Image Placeholder 3"/>
           <p:cNvSpPr>
             <a:spLocks noGrp="1" noRot="1" noChangeAspect="1"/>
           </p:cNvSpPr>
@@ -427,7 +427,7 @@
       </p:sp>
       <p:sp>
         <p:nvSpPr>
-          <p:cNvPr id="5" name="备注占位符 4"/>
+          <p:cNvPr id="5" name="Notes Placeholder 4"/>
           <p:cNvSpPr>
             <a:spLocks noGrp="1"/>
           </p:cNvSpPr>
@@ -451,42 +451,42 @@
             <a:pPr lvl="0"/>
             <a:r>
               <a:rPr lang="zh-CN" altLang="en-US"/>
-              <a:t>单击此处编辑母版文本样式</a:t>
+              <a:t>Click to edit master text styles</a:t>
             </a:r>
           </a:p>
           <a:p>
             <a:pPr lvl="1"/>
             <a:r>
               <a:rPr lang="zh-CN" altLang="en-US"/>
-              <a:t>第二级</a:t>
+              <a:t>Second level</a:t>
             </a:r>
           </a:p>
           <a:p>
             <a:pPr lvl="2"/>
             <a:r>
               <a:rPr lang="zh-CN" altLang="en-US"/>
-              <a:t>第三级</a:t>
+              <a:t>Third level</a:t>
             </a:r>
           </a:p>
           <a:p>
             <a:pPr lvl="3"/>
             <a:r>
               <a:rPr lang="zh-CN" altLang="en-US"/>
-              <a:t>第四级</a:t>
+              <a:t>Fourth level</a:t>
             </a:r>
           </a:p>
           <a:p>
             <a:pPr lvl="4"/>
             <a:r>
               <a:rPr lang="zh-CN" altLang="en-US"/>
-              <a:t>第五级</a:t>
+              <a:t>Fifth level</a:t>
             </a:r>
           </a:p>
         </p:txBody>
       </p:sp>
       <p:sp>
         <p:nvSpPr>
-          <p:cNvPr id="6" name="页脚占位符 5"/>
+          <p:cNvPr id="6" name="Footer Placeholder 5"/>
           <p:cNvSpPr>
             <a:spLocks noGrp="1"/>
           </p:cNvSpPr>
@@ -517,7 +517,7 @@
       </p:sp>
       <p:sp>
         <p:nvSpPr>
-          <p:cNvPr id="7" name="灯片编号占位符 6"/>
+          <p:cNvPr id="7" name="Slide Number Placeholder 6"/>
           <p:cNvSpPr>
             <a:spLocks noGrp="1"/>
           </p:cNvSpPr>
@@ -667,7 +667,7 @@
       </p:grpSpPr>
       <p:sp>
         <p:nvSpPr>
-          <p:cNvPr id="2" name="幻灯片图像占位符 1"/>
+          <p:cNvPr id="2" name="Slide Image Placeholder 1"/>
           <p:cNvSpPr>
             <a:spLocks noGrp="1" noRot="1" noChangeAspect="1"/>
           </p:cNvSpPr>
@@ -684,7 +684,7 @@
       </p:sp>
       <p:sp>
         <p:nvSpPr>
-          <p:cNvPr id="3" name="文本占位符 2"/>
+          <p:cNvPr id="3" name="Text Placeholder 2"/>
           <p:cNvSpPr>
             <a:spLocks noGrp="1"/>
           </p:cNvSpPr>
@@ -728,7 +728,7 @@
       </p:grpSpPr>
       <p:sp>
         <p:nvSpPr>
-          <p:cNvPr id="2" name="幻灯片图像占位符 1"/>
+          <p:cNvPr id="2" name="Slide Image Placeholder 1"/>
           <p:cNvSpPr>
             <a:spLocks noGrp="1" noRot="1" noChangeAspect="1"/>
           </p:cNvSpPr>
@@ -745,7 +745,7 @@
       </p:sp>
       <p:sp>
         <p:nvSpPr>
-          <p:cNvPr id="3" name="文本占位符 2"/>
+          <p:cNvPr id="3" name="Text Placeholder 2"/>
           <p:cNvSpPr>
             <a:spLocks noGrp="1"/>
           </p:cNvSpPr>
@@ -789,7 +789,7 @@
       </p:grpSpPr>
       <p:sp>
         <p:nvSpPr>
-          <p:cNvPr id="2" name="幻灯片图像占位符 1"/>
+          <p:cNvPr id="2" name="Slide Image Placeholder 1"/>
           <p:cNvSpPr>
             <a:spLocks noGrp="1" noRot="1" noChangeAspect="1"/>
           </p:cNvSpPr>
@@ -806,7 +806,7 @@
       </p:sp>
       <p:sp>
         <p:nvSpPr>
-          <p:cNvPr id="3" name="文本占位符 2"/>
+          <p:cNvPr id="3" name="Text Placeholder 2"/>
           <p:cNvSpPr>
             <a:spLocks noGrp="1"/>
           </p:cNvSpPr>
@@ -850,7 +850,7 @@
       </p:grpSpPr>
       <p:sp>
         <p:nvSpPr>
-          <p:cNvPr id="2" name="幻灯片图像占位符 1"/>
+          <p:cNvPr id="2" name="Slide Image Placeholder 1"/>
           <p:cNvSpPr>
             <a:spLocks noGrp="1" noRot="1" noChangeAspect="1"/>
           </p:cNvSpPr>
@@ -867,7 +867,7 @@
       </p:sp>
       <p:sp>
         <p:nvSpPr>
-          <p:cNvPr id="3" name="文本占位符 2"/>
+          <p:cNvPr id="3" name="Text Placeholder 2"/>
           <p:cNvSpPr>
             <a:spLocks noGrp="1"/>
           </p:cNvSpPr>
@@ -911,7 +911,7 @@
       </p:grpSpPr>
       <p:sp>
         <p:nvSpPr>
-          <p:cNvPr id="2" name="幻灯片图像占位符 1"/>
+          <p:cNvPr id="2" name="Slide Image Placeholder 1"/>
           <p:cNvSpPr>
             <a:spLocks noGrp="1" noRot="1" noChangeAspect="1"/>
           </p:cNvSpPr>
@@ -928,7 +928,7 @@
       </p:sp>
       <p:sp>
         <p:nvSpPr>
-          <p:cNvPr id="3" name="文本占位符 2"/>
+          <p:cNvPr id="3" name="Text Placeholder 2"/>
           <p:cNvSpPr>
             <a:spLocks noGrp="1"/>
           </p:cNvSpPr>
@@ -955,7 +955,7 @@
 
 <file path=ppt/slideLayouts/slideLayout1.xml><?xml version="1.0" encoding="utf-8"?>
 <p:sldLayout xmlns:a="http://schemas.openxmlformats.org/drawingml/2006/main" xmlns:r="http://schemas.openxmlformats.org/officeDocument/2006/relationships" xmlns:p="http://schemas.openxmlformats.org/presentationml/2006/main" type="title" preserve="1">
-  <p:cSld name="标题幻灯片">
+  <p:cSld name="Title Slide">
     <p:spTree>
       <p:nvGrpSpPr>
         <p:cNvPr id="1" name=""/>
@@ -972,7 +972,7 @@
       </p:grpSpPr>
       <p:sp>
         <p:nvSpPr>
-          <p:cNvPr id="2" name="标题 1"/>
+          <p:cNvPr id="2" name="Title 1"/>
           <p:cNvSpPr>
             <a:spLocks noGrp="1"/>
           </p:cNvSpPr>
@@ -1001,14 +1001,14 @@
           <a:p>
             <a:r>
               <a:rPr lang="zh-CN" altLang="en-US" dirty="0"/>
-              <a:t>单击此处编辑母版标题样式</a:t>
+              <a:t>Click to edit master title style</a:t>
             </a:r>
           </a:p>
         </p:txBody>
       </p:sp>
       <p:sp>
         <p:nvSpPr>
-          <p:cNvPr id="3" name="副标题 2"/>
+          <p:cNvPr id="3" name="Subtitle 2"/>
           <p:cNvSpPr>
             <a:spLocks noGrp="1"/>
           </p:cNvSpPr>
@@ -1073,14 +1073,14 @@
           <a:p>
             <a:r>
               <a:rPr lang="zh-CN" altLang="en-US" dirty="0"/>
-              <a:t>单击此处编辑母版副标题样式</a:t>
+              <a:t>Click to edit master subtitle style</a:t>
             </a:r>
           </a:p>
         </p:txBody>
       </p:sp>
       <p:sp>
         <p:nvSpPr>
-          <p:cNvPr id="16" name="日期占位符 15"/>
+          <p:cNvPr id="16" name="Date Placeholder 15"/>
           <p:cNvSpPr>
             <a:spLocks noGrp="1"/>
           </p:cNvSpPr>
@@ -1106,7 +1106,7 @@
       </p:sp>
       <p:sp>
         <p:nvSpPr>
-          <p:cNvPr id="17" name="页脚占位符 16"/>
+          <p:cNvPr id="17" name="Footer Placeholder 16"/>
           <p:cNvSpPr>
             <a:spLocks noGrp="1"/>
           </p:cNvSpPr>
@@ -1128,7 +1128,7 @@
       </p:sp>
       <p:sp>
         <p:nvSpPr>
-          <p:cNvPr id="18" name="灯片编号占位符 17"/>
+          <p:cNvPr id="18" name="Slide Number Placeholder 17"/>
           <p:cNvSpPr>
             <a:spLocks noGrp="1"/>
           </p:cNvSpPr>
@@ -1162,7 +1162,7 @@
 
 <file path=ppt/slideLayouts/slideLayout10.xml><?xml version="1.0" encoding="utf-8"?>
 <p:sldLayout xmlns:a="http://schemas.openxmlformats.org/drawingml/2006/main" xmlns:r="http://schemas.openxmlformats.org/officeDocument/2006/relationships" xmlns:p="http://schemas.openxmlformats.org/presentationml/2006/main" preserve="1" userDrawn="1">
-  <p:cSld name="内容">
+  <p:cSld name="Content">
     <p:spTree>
       <p:nvGrpSpPr>
         <p:cNvPr id="1" name=""/>
@@ -1179,7 +1179,7 @@
       </p:grpSpPr>
       <p:sp>
         <p:nvSpPr>
-          <p:cNvPr id="3" name="日期占位符 2"/>
+          <p:cNvPr id="3" name="Date Placeholder 2"/>
           <p:cNvSpPr>
             <a:spLocks noGrp="1"/>
           </p:cNvSpPr>
@@ -1205,7 +1205,7 @@
       </p:sp>
       <p:sp>
         <p:nvSpPr>
-          <p:cNvPr id="4" name="页脚占位符 3"/>
+          <p:cNvPr id="4" name="Footer Placeholder 3"/>
           <p:cNvSpPr>
             <a:spLocks noGrp="1"/>
           </p:cNvSpPr>
@@ -1227,7 +1227,7 @@
       </p:sp>
       <p:sp>
         <p:nvSpPr>
-          <p:cNvPr id="5" name="灯片编号占位符 4"/>
+          <p:cNvPr id="5" name="Slide Number Placeholder 4"/>
           <p:cNvSpPr>
             <a:spLocks noGrp="1"/>
           </p:cNvSpPr>
@@ -1253,7 +1253,7 @@
       </p:sp>
       <p:sp>
         <p:nvSpPr>
-          <p:cNvPr id="7" name="内容占位符 6"/>
+          <p:cNvPr id="7" name="Content Placeholder 6"/>
           <p:cNvSpPr>
             <a:spLocks noGrp="1"/>
           </p:cNvSpPr>
@@ -1277,35 +1277,35 @@
             <a:pPr lvl="0"/>
             <a:r>
               <a:rPr lang="zh-CN" altLang="en-US" dirty="0"/>
-              <a:t>单击此处编辑母版文本样式</a:t>
+              <a:t>Click to edit master text styles</a:t>
             </a:r>
           </a:p>
           <a:p>
             <a:pPr lvl="1"/>
             <a:r>
               <a:rPr lang="zh-CN" altLang="en-US" dirty="0"/>
-              <a:t>第二级</a:t>
+              <a:t>Second level</a:t>
             </a:r>
           </a:p>
           <a:p>
             <a:pPr lvl="2"/>
             <a:r>
               <a:rPr lang="zh-CN" altLang="en-US" dirty="0"/>
-              <a:t>第三级</a:t>
+              <a:t>Third level</a:t>
             </a:r>
           </a:p>
           <a:p>
             <a:pPr lvl="3"/>
             <a:r>
               <a:rPr lang="zh-CN" altLang="en-US" dirty="0"/>
-              <a:t>第四级</a:t>
+              <a:t>Fourth level</a:t>
             </a:r>
           </a:p>
           <a:p>
             <a:pPr lvl="4"/>
             <a:r>
               <a:rPr lang="zh-CN" altLang="en-US" dirty="0"/>
-              <a:t>第五级</a:t>
+              <a:t>Fifth level</a:t>
             </a:r>
           </a:p>
         </p:txBody>
@@ -1320,7 +1320,7 @@
 
 <file path=ppt/slideLayouts/slideLayout11.xml><?xml version="1.0" encoding="utf-8"?>
 <p:sldLayout xmlns:a="http://schemas.openxmlformats.org/drawingml/2006/main" xmlns:r="http://schemas.openxmlformats.org/officeDocument/2006/relationships" xmlns:p="http://schemas.openxmlformats.org/presentationml/2006/main" preserve="1" userDrawn="1">
-  <p:cSld name="末尾幻灯片">
+  <p:cSld name="Final Slide">
     <p:spTree>
       <p:nvGrpSpPr>
         <p:cNvPr id="1" name=""/>
@@ -1337,7 +1337,7 @@
       </p:grpSpPr>
       <p:sp>
         <p:nvSpPr>
-          <p:cNvPr id="3" name="日期占位符 2"/>
+          <p:cNvPr id="3" name="Date Placeholder 2"/>
           <p:cNvSpPr>
             <a:spLocks noGrp="1"/>
           </p:cNvSpPr>
@@ -1363,7 +1363,7 @@
       </p:sp>
       <p:sp>
         <p:nvSpPr>
-          <p:cNvPr id="4" name="页脚占位符 3"/>
+          <p:cNvPr id="4" name="Footer Placeholder 3"/>
           <p:cNvSpPr>
             <a:spLocks noGrp="1"/>
           </p:cNvSpPr>
@@ -1385,7 +1385,7 @@
       </p:sp>
       <p:sp>
         <p:nvSpPr>
-          <p:cNvPr id="5" name="灯片编号占位符 4"/>
+          <p:cNvPr id="5" name="Slide Number Placeholder 4"/>
           <p:cNvSpPr>
             <a:spLocks noGrp="1"/>
           </p:cNvSpPr>
@@ -1411,7 +1411,7 @@
       </p:sp>
       <p:sp>
         <p:nvSpPr>
-          <p:cNvPr id="2" name="标题 1"/>
+          <p:cNvPr id="2" name="Title 1"/>
           <p:cNvSpPr>
             <a:spLocks noGrp="1"/>
           </p:cNvSpPr>
@@ -1441,14 +1441,14 @@
             <a:pPr lvl="0"/>
             <a:r>
               <a:rPr lang="zh-CN" altLang="en-US"/>
-              <a:t>单击此处编辑标题</a:t>
+              <a:t>Click to edit title</a:t>
             </a:r>
           </a:p>
         </p:txBody>
       </p:sp>
       <p:sp>
         <p:nvSpPr>
-          <p:cNvPr id="7" name="文本占位符 6"/>
+          <p:cNvPr id="7" name="Text Placeholder 6"/>
           <p:cNvSpPr>
             <a:spLocks noGrp="1"/>
           </p:cNvSpPr>
@@ -1482,7 +1482,7 @@
             <a:pPr lvl="0"/>
             <a:r>
               <a:rPr lang="zh-CN" altLang="en-US" dirty="0"/>
-              <a:t>单击此处编辑母版文本样式</a:t>
+              <a:t>Click to edit master text styles</a:t>
             </a:r>
           </a:p>
         </p:txBody>
@@ -1497,7 +1497,7 @@
 
 <file path=ppt/slideLayouts/slideLayout2.xml><?xml version="1.0" encoding="utf-8"?>
 <p:sldLayout xmlns:a="http://schemas.openxmlformats.org/drawingml/2006/main" xmlns:r="http://schemas.openxmlformats.org/officeDocument/2006/relationships" xmlns:p="http://schemas.openxmlformats.org/presentationml/2006/main" type="obj" preserve="1">
-  <p:cSld name="标题和内容">
+  <p:cSld name="Title and Content">
     <p:spTree>
       <p:nvGrpSpPr>
         <p:cNvPr id="1" name=""/>
@@ -1514,7 +1514,7 @@
       </p:grpSpPr>
       <p:sp>
         <p:nvSpPr>
-          <p:cNvPr id="2" name="标题 1"/>
+          <p:cNvPr id="2" name="Title 1"/>
           <p:cNvSpPr>
             <a:spLocks noGrp="1"/>
           </p:cNvSpPr>
@@ -1540,14 +1540,14 @@
             <a:pPr lvl="0"/>
             <a:r>
               <a:rPr lang="zh-CN" altLang="en-US"/>
-              <a:t>单击此处编辑母版标题样式</a:t>
+              <a:t>Click to edit master title style</a:t>
             </a:r>
           </a:p>
         </p:txBody>
       </p:sp>
       <p:sp>
         <p:nvSpPr>
-          <p:cNvPr id="3" name="内容占位符 2"/>
+          <p:cNvPr id="3" name="Content Placeholder 2"/>
           <p:cNvSpPr>
             <a:spLocks noGrp="1"/>
           </p:cNvSpPr>
@@ -1573,42 +1573,42 @@
             <a:pPr lvl="0"/>
             <a:r>
               <a:rPr lang="zh-CN" altLang="en-US"/>
-              <a:t>单击此处编辑母版文本样式</a:t>
+              <a:t>Click to edit master text styles</a:t>
             </a:r>
           </a:p>
           <a:p>
             <a:pPr lvl="1"/>
             <a:r>
               <a:rPr lang="zh-CN" altLang="en-US"/>
-              <a:t>第二级</a:t>
+              <a:t>Second level</a:t>
             </a:r>
           </a:p>
           <a:p>
             <a:pPr lvl="2"/>
             <a:r>
               <a:rPr lang="zh-CN" altLang="en-US"/>
-              <a:t>第三级</a:t>
+              <a:t>Third level</a:t>
             </a:r>
           </a:p>
           <a:p>
             <a:pPr lvl="3"/>
             <a:r>
               <a:rPr lang="zh-CN" altLang="en-US"/>
-              <a:t>第四级</a:t>
+              <a:t>Fourth level</a:t>
             </a:r>
           </a:p>
           <a:p>
             <a:pPr lvl="4"/>
             <a:r>
               <a:rPr lang="zh-CN" altLang="en-US"/>
-              <a:t>第五级</a:t>
+              <a:t>Fifth level</a:t>
             </a:r>
           </a:p>
         </p:txBody>
       </p:sp>
       <p:sp>
         <p:nvSpPr>
-          <p:cNvPr id="4" name="日期占位符 3"/>
+          <p:cNvPr id="4" name="Date Placeholder 3"/>
           <p:cNvSpPr>
             <a:spLocks noGrp="1"/>
           </p:cNvSpPr>
@@ -1634,7 +1634,7 @@
       </p:sp>
       <p:sp>
         <p:nvSpPr>
-          <p:cNvPr id="5" name="页脚占位符 4"/>
+          <p:cNvPr id="5" name="Footer Placeholder 4"/>
           <p:cNvSpPr>
             <a:spLocks noGrp="1"/>
           </p:cNvSpPr>
@@ -1656,7 +1656,7 @@
       </p:sp>
       <p:sp>
         <p:nvSpPr>
-          <p:cNvPr id="6" name="灯片编号占位符 5"/>
+          <p:cNvPr id="6" name="Slide Number Placeholder 5"/>
           <p:cNvSpPr>
             <a:spLocks noGrp="1"/>
           </p:cNvSpPr>
@@ -1690,7 +1690,7 @@
 
 <file path=ppt/slideLayouts/slideLayout3.xml><?xml version="1.0" encoding="utf-8"?>
 <p:sldLayout xmlns:a="http://schemas.openxmlformats.org/drawingml/2006/main" xmlns:r="http://schemas.openxmlformats.org/officeDocument/2006/relationships" xmlns:p="http://schemas.openxmlformats.org/presentationml/2006/main" type="secHead" preserve="1">
-  <p:cSld name="节标题">
+  <p:cSld name="Section Header">
     <p:spTree>
       <p:nvGrpSpPr>
         <p:cNvPr id="1" name=""/>
@@ -1707,7 +1707,7 @@
       </p:grpSpPr>
       <p:sp>
         <p:nvSpPr>
-          <p:cNvPr id="2" name="标题 1"/>
+          <p:cNvPr id="2" name="Title 1"/>
           <p:cNvSpPr>
             <a:spLocks noGrp="1"/>
           </p:cNvSpPr>
@@ -1736,14 +1736,14 @@
           <a:p>
             <a:r>
               <a:rPr lang="zh-CN" altLang="en-US" dirty="0"/>
-              <a:t>单击此处编辑标题</a:t>
+              <a:t>Click to edit title</a:t>
             </a:r>
           </a:p>
         </p:txBody>
       </p:sp>
       <p:sp>
         <p:nvSpPr>
-          <p:cNvPr id="3" name="文本占位符 2"/>
+          <p:cNvPr id="3" name="Text Placeholder 2"/>
           <p:cNvSpPr>
             <a:spLocks noGrp="1"/>
           </p:cNvSpPr>
@@ -1861,14 +1861,14 @@
             <a:pPr lvl="0"/>
             <a:r>
               <a:rPr lang="zh-CN" altLang="en-US" dirty="0"/>
-              <a:t>单击此处编辑文本</a:t>
+              <a:t>Click to edit text</a:t>
             </a:r>
           </a:p>
         </p:txBody>
       </p:sp>
       <p:sp>
         <p:nvSpPr>
-          <p:cNvPr id="4" name="日期占位符 3"/>
+          <p:cNvPr id="4" name="Date Placeholder 3"/>
           <p:cNvSpPr>
             <a:spLocks noGrp="1"/>
           </p:cNvSpPr>
@@ -1894,7 +1894,7 @@
       </p:sp>
       <p:sp>
         <p:nvSpPr>
-          <p:cNvPr id="5" name="页脚占位符 4"/>
+          <p:cNvPr id="5" name="Footer Placeholder 4"/>
           <p:cNvSpPr>
             <a:spLocks noGrp="1"/>
           </p:cNvSpPr>
@@ -1916,7 +1916,7 @@
       </p:sp>
       <p:sp>
         <p:nvSpPr>
-          <p:cNvPr id="6" name="灯片编号占位符 5"/>
+          <p:cNvPr id="6" name="Slide Number Placeholder 5"/>
           <p:cNvSpPr>
             <a:spLocks noGrp="1"/>
           </p:cNvSpPr>
@@ -1950,7 +1950,7 @@
 
 <file path=ppt/slideLayouts/slideLayout4.xml><?xml version="1.0" encoding="utf-8"?>
 <p:sldLayout xmlns:a="http://schemas.openxmlformats.org/drawingml/2006/main" xmlns:r="http://schemas.openxmlformats.org/officeDocument/2006/relationships" xmlns:p="http://schemas.openxmlformats.org/presentationml/2006/main" type="twoObj" preserve="1">
-  <p:cSld name="两栏内容">
+  <p:cSld name="Two Content">
     <p:spTree>
       <p:nvGrpSpPr>
         <p:cNvPr id="1" name=""/>
@@ -1967,7 +1967,7 @@
       </p:grpSpPr>
       <p:sp>
         <p:nvSpPr>
-          <p:cNvPr id="2" name="标题 1"/>
+          <p:cNvPr id="2" name="Title 1"/>
           <p:cNvSpPr>
             <a:spLocks noGrp="1"/>
           </p:cNvSpPr>
@@ -1993,14 +1993,14 @@
             <a:pPr lvl="0"/>
             <a:r>
               <a:rPr lang="zh-CN" altLang="en-US"/>
-              <a:t>单击此处编辑母版标题样式</a:t>
+              <a:t>Click to edit master title style</a:t>
             </a:r>
           </a:p>
         </p:txBody>
       </p:sp>
       <p:sp>
         <p:nvSpPr>
-          <p:cNvPr id="3" name="内容占位符 2"/>
+          <p:cNvPr id="3" name="Content Placeholder 2"/>
           <p:cNvSpPr>
             <a:spLocks noGrp="1"/>
           </p:cNvSpPr>
@@ -2026,42 +2026,42 @@
             <a:pPr lvl="0"/>
             <a:r>
               <a:rPr lang="zh-CN" altLang="en-US"/>
-              <a:t>单击此处编辑母版文本样式</a:t>
+              <a:t>Click to edit master text styles</a:t>
             </a:r>
           </a:p>
           <a:p>
             <a:pPr lvl="1"/>
             <a:r>
               <a:rPr lang="zh-CN" altLang="en-US"/>
-              <a:t>第二级</a:t>
+              <a:t>Second level</a:t>
             </a:r>
           </a:p>
           <a:p>
             <a:pPr lvl="2"/>
             <a:r>
               <a:rPr lang="zh-CN" altLang="en-US"/>
-              <a:t>第三级</a:t>
+              <a:t>Third level</a:t>
             </a:r>
           </a:p>
           <a:p>
             <a:pPr lvl="3"/>
             <a:r>
               <a:rPr lang="zh-CN" altLang="en-US"/>
-              <a:t>第四级</a:t>
+              <a:t>Fourth level</a:t>
             </a:r>
           </a:p>
           <a:p>
             <a:pPr lvl="4"/>
             <a:r>
               <a:rPr lang="zh-CN" altLang="en-US"/>
-              <a:t>第五级</a:t>
+              <a:t>Fifth level</a:t>
             </a:r>
           </a:p>
         </p:txBody>
       </p:sp>
       <p:sp>
         <p:nvSpPr>
-          <p:cNvPr id="4" name="内容占位符 3"/>
+          <p:cNvPr id="4" name="Content Placeholder 3"/>
           <p:cNvSpPr>
             <a:spLocks noGrp="1"/>
           </p:cNvSpPr>
@@ -2087,42 +2087,42 @@
             <a:pPr lvl="0"/>
             <a:r>
               <a:rPr lang="zh-CN" altLang="en-US" dirty="0"/>
-              <a:t>单击此处编辑母版文本样式</a:t>
+              <a:t>Click to edit master text styles</a:t>
             </a:r>
           </a:p>
           <a:p>
             <a:pPr lvl="1"/>
             <a:r>
               <a:rPr lang="zh-CN" altLang="en-US" dirty="0"/>
-              <a:t>第二级</a:t>
+              <a:t>Second level</a:t>
             </a:r>
           </a:p>
           <a:p>
             <a:pPr lvl="2"/>
             <a:r>
               <a:rPr lang="zh-CN" altLang="en-US" dirty="0"/>
-              <a:t>第三级</a:t>
+              <a:t>Third level</a:t>
             </a:r>
           </a:p>
           <a:p>
             <a:pPr lvl="3"/>
             <a:r>
               <a:rPr lang="zh-CN" altLang="en-US" dirty="0"/>
-              <a:t>第四级</a:t>
+              <a:t>Fourth level</a:t>
             </a:r>
           </a:p>
           <a:p>
             <a:pPr lvl="4"/>
             <a:r>
               <a:rPr lang="zh-CN" altLang="en-US" dirty="0"/>
-              <a:t>第五级</a:t>
+              <a:t>Fifth level</a:t>
             </a:r>
           </a:p>
         </p:txBody>
       </p:sp>
       <p:sp>
         <p:nvSpPr>
-          <p:cNvPr id="5" name="日期占位符 4"/>
+          <p:cNvPr id="5" name="Date Placeholder 4"/>
           <p:cNvSpPr>
             <a:spLocks noGrp="1"/>
           </p:cNvSpPr>
@@ -2148,7 +2148,7 @@
       </p:sp>
       <p:sp>
         <p:nvSpPr>
-          <p:cNvPr id="6" name="页脚占位符 5"/>
+          <p:cNvPr id="6" name="Footer Placeholder 5"/>
           <p:cNvSpPr>
             <a:spLocks noGrp="1"/>
           </p:cNvSpPr>
@@ -2170,7 +2170,7 @@
       </p:sp>
       <p:sp>
         <p:nvSpPr>
-          <p:cNvPr id="7" name="灯片编号占位符 6"/>
+          <p:cNvPr id="7" name="Slide Number Placeholder 6"/>
           <p:cNvSpPr>
             <a:spLocks noGrp="1"/>
           </p:cNvSpPr>
@@ -2204,7 +2204,7 @@
 
 <file path=ppt/slideLayouts/slideLayout5.xml><?xml version="1.0" encoding="utf-8"?>
 <p:sldLayout xmlns:a="http://schemas.openxmlformats.org/drawingml/2006/main" xmlns:r="http://schemas.openxmlformats.org/officeDocument/2006/relationships" xmlns:p="http://schemas.openxmlformats.org/presentationml/2006/main" type="twoTxTwoObj" preserve="1">
-  <p:cSld name="比较">
+  <p:cSld name="Comparison">
     <p:spTree>
       <p:nvGrpSpPr>
         <p:cNvPr id="1" name=""/>
@@ -2221,7 +2221,7 @@
       </p:grpSpPr>
       <p:sp>
         <p:nvSpPr>
-          <p:cNvPr id="2" name="标题 1"/>
+          <p:cNvPr id="2" name="Title 1"/>
           <p:cNvSpPr>
             <a:spLocks noGrp="1"/>
           </p:cNvSpPr>
@@ -2247,14 +2247,14 @@
             <a:pPr lvl="0"/>
             <a:r>
               <a:rPr lang="zh-CN" altLang="en-US"/>
-              <a:t>单击此处编辑母版标题样式</a:t>
+              <a:t>Click to edit master title style</a:t>
             </a:r>
           </a:p>
         </p:txBody>
       </p:sp>
       <p:sp>
         <p:nvSpPr>
-          <p:cNvPr id="3" name="文本占位符 2"/>
+          <p:cNvPr id="3" name="Text Placeholder 2"/>
           <p:cNvSpPr>
             <a:spLocks noGrp="1"/>
           </p:cNvSpPr>
@@ -2327,14 +2327,14 @@
             <a:pPr lvl="0"/>
             <a:r>
               <a:rPr lang="zh-CN" altLang="en-US" dirty="0"/>
-              <a:t>单击此处编辑文本</a:t>
+              <a:t>Click to edit text</a:t>
             </a:r>
           </a:p>
         </p:txBody>
       </p:sp>
       <p:sp>
         <p:nvSpPr>
-          <p:cNvPr id="4" name="内容占位符 3"/>
+          <p:cNvPr id="4" name="Content Placeholder 3"/>
           <p:cNvSpPr>
             <a:spLocks noGrp="1"/>
           </p:cNvSpPr>
@@ -2360,42 +2360,42 @@
             <a:pPr lvl="0"/>
             <a:r>
               <a:rPr lang="zh-CN" altLang="en-US"/>
-              <a:t>单击此处编辑母版文本样式</a:t>
+              <a:t>Click to edit master text styles</a:t>
             </a:r>
           </a:p>
           <a:p>
             <a:pPr lvl="1"/>
             <a:r>
               <a:rPr lang="zh-CN" altLang="en-US"/>
-              <a:t>第二级</a:t>
+              <a:t>Second level</a:t>
             </a:r>
           </a:p>
           <a:p>
             <a:pPr lvl="2"/>
             <a:r>
               <a:rPr lang="zh-CN" altLang="en-US"/>
-              <a:t>第三级</a:t>
+              <a:t>Third level</a:t>
             </a:r>
           </a:p>
           <a:p>
             <a:pPr lvl="3"/>
             <a:r>
               <a:rPr lang="zh-CN" altLang="en-US"/>
-              <a:t>第四级</a:t>
+              <a:t>Fourth level</a:t>
             </a:r>
           </a:p>
           <a:p>
             <a:pPr lvl="4"/>
             <a:r>
               <a:rPr lang="zh-CN" altLang="en-US"/>
-              <a:t>第五级</a:t>
+              <a:t>Fifth level</a:t>
             </a:r>
           </a:p>
         </p:txBody>
       </p:sp>
       <p:sp>
         <p:nvSpPr>
-          <p:cNvPr id="5" name="文本占位符 4"/>
+          <p:cNvPr id="5" name="Text Placeholder 4"/>
           <p:cNvSpPr>
             <a:spLocks noGrp="1"/>
           </p:cNvSpPr>
@@ -2468,14 +2468,14 @@
             <a:pPr lvl="0"/>
             <a:r>
               <a:rPr lang="zh-CN" altLang="en-US"/>
-              <a:t>单击此处编辑文本</a:t>
+              <a:t>Click to edit text</a:t>
             </a:r>
           </a:p>
         </p:txBody>
       </p:sp>
       <p:sp>
         <p:nvSpPr>
-          <p:cNvPr id="6" name="内容占位符 5"/>
+          <p:cNvPr id="6" name="Content Placeholder 5"/>
           <p:cNvSpPr>
             <a:spLocks noGrp="1"/>
           </p:cNvSpPr>
@@ -2501,42 +2501,42 @@
             <a:pPr lvl="0"/>
             <a:r>
               <a:rPr lang="zh-CN" altLang="en-US"/>
-              <a:t>单击此处编辑母版文本样式</a:t>
+              <a:t>Click to edit master text styles</a:t>
             </a:r>
           </a:p>
           <a:p>
             <a:pPr lvl="1"/>
             <a:r>
               <a:rPr lang="zh-CN" altLang="en-US"/>
-              <a:t>第二级</a:t>
+              <a:t>Second level</a:t>
             </a:r>
           </a:p>
           <a:p>
             <a:pPr lvl="2"/>
             <a:r>
               <a:rPr lang="zh-CN" altLang="en-US"/>
-              <a:t>第三级</a:t>
+              <a:t>Third level</a:t>
             </a:r>
           </a:p>
           <a:p>
             <a:pPr lvl="3"/>
             <a:r>
               <a:rPr lang="zh-CN" altLang="en-US"/>
-              <a:t>第四级</a:t>
+              <a:t>Fourth level</a:t>
             </a:r>
           </a:p>
           <a:p>
             <a:pPr lvl="4"/>
             <a:r>
               <a:rPr lang="zh-CN" altLang="en-US"/>
-              <a:t>第五级</a:t>
+              <a:t>Fifth level</a:t>
             </a:r>
           </a:p>
         </p:txBody>
       </p:sp>
       <p:sp>
         <p:nvSpPr>
-          <p:cNvPr id="7" name="日期占位符 6"/>
+          <p:cNvPr id="7" name="Date Placeholder 6"/>
           <p:cNvSpPr>
             <a:spLocks noGrp="1"/>
           </p:cNvSpPr>
@@ -2562,7 +2562,7 @@
       </p:sp>
       <p:sp>
         <p:nvSpPr>
-          <p:cNvPr id="8" name="页脚占位符 7"/>
+          <p:cNvPr id="8" name="Footer Placeholder 7"/>
           <p:cNvSpPr>
             <a:spLocks noGrp="1"/>
           </p:cNvSpPr>
@@ -2584,7 +2584,7 @@
       </p:sp>
       <p:sp>
         <p:nvSpPr>
-          <p:cNvPr id="9" name="灯片编号占位符 8"/>
+          <p:cNvPr id="9" name="Slide Number Placeholder 8"/>
           <p:cNvSpPr>
             <a:spLocks noGrp="1"/>
           </p:cNvSpPr>
@@ -2618,7 +2618,7 @@
 
 <file path=ppt/slideLayouts/slideLayout6.xml><?xml version="1.0" encoding="utf-8"?>
 <p:sldLayout xmlns:a="http://schemas.openxmlformats.org/drawingml/2006/main" xmlns:r="http://schemas.openxmlformats.org/officeDocument/2006/relationships" xmlns:p="http://schemas.openxmlformats.org/presentationml/2006/main" type="titleOnly" preserve="1">
-  <p:cSld name="仅标题">
+  <p:cSld name="Title Only">
     <p:spTree>
       <p:nvGrpSpPr>
         <p:cNvPr id="1" name=""/>
@@ -2635,7 +2635,7 @@
       </p:grpSpPr>
       <p:sp>
         <p:nvSpPr>
-          <p:cNvPr id="2" name="标题 1"/>
+          <p:cNvPr id="2" name="Title 1"/>
           <p:cNvSpPr>
             <a:spLocks noGrp="1"/>
           </p:cNvSpPr>
@@ -2661,14 +2661,14 @@
             <a:pPr lvl="0"/>
             <a:r>
               <a:rPr lang="zh-CN" altLang="en-US"/>
-              <a:t>单击此处编辑母版标题样式</a:t>
+              <a:t>Click to edit master title style</a:t>
             </a:r>
           </a:p>
         </p:txBody>
       </p:sp>
       <p:sp>
         <p:nvSpPr>
-          <p:cNvPr id="3" name="日期占位符 2"/>
+          <p:cNvPr id="3" name="Date Placeholder 2"/>
           <p:cNvSpPr>
             <a:spLocks noGrp="1"/>
           </p:cNvSpPr>
@@ -2694,7 +2694,7 @@
       </p:sp>
       <p:sp>
         <p:nvSpPr>
-          <p:cNvPr id="4" name="页脚占位符 3"/>
+          <p:cNvPr id="4" name="Footer Placeholder 3"/>
           <p:cNvSpPr>
             <a:spLocks noGrp="1"/>
           </p:cNvSpPr>
@@ -2716,7 +2716,7 @@
       </p:sp>
       <p:sp>
         <p:nvSpPr>
-          <p:cNvPr id="5" name="灯片编号占位符 4"/>
+          <p:cNvPr id="5" name="Slide Number Placeholder 4"/>
           <p:cNvSpPr>
             <a:spLocks noGrp="1"/>
           </p:cNvSpPr>
@@ -2750,7 +2750,7 @@
 
 <file path=ppt/slideLayouts/slideLayout7.xml><?xml version="1.0" encoding="utf-8"?>
 <p:sldLayout xmlns:a="http://schemas.openxmlformats.org/drawingml/2006/main" xmlns:r="http://schemas.openxmlformats.org/officeDocument/2006/relationships" xmlns:p="http://schemas.openxmlformats.org/presentationml/2006/main" type="blank" preserve="1">
-  <p:cSld name="空白">
+  <p:cSld name="Blank">
     <p:spTree>
       <p:nvGrpSpPr>
         <p:cNvPr id="1" name=""/>
@@ -2767,7 +2767,7 @@
       </p:grpSpPr>
       <p:sp>
         <p:nvSpPr>
-          <p:cNvPr id="2" name="日期占位符 1"/>
+          <p:cNvPr id="2" name="Date Placeholder 1"/>
           <p:cNvSpPr>
             <a:spLocks noGrp="1"/>
           </p:cNvSpPr>
@@ -2793,7 +2793,7 @@
       </p:sp>
       <p:sp>
         <p:nvSpPr>
-          <p:cNvPr id="3" name="页脚占位符 2"/>
+          <p:cNvPr id="3" name="Footer Placeholder 2"/>
           <p:cNvSpPr>
             <a:spLocks noGrp="1"/>
           </p:cNvSpPr>
@@ -2815,7 +2815,7 @@
       </p:sp>
       <p:sp>
         <p:nvSpPr>
-          <p:cNvPr id="4" name="灯片编号占位符 3"/>
+          <p:cNvPr id="4" name="Slide Number Placeholder 3"/>
           <p:cNvSpPr>
             <a:spLocks noGrp="1"/>
           </p:cNvSpPr>
@@ -2849,7 +2849,7 @@
 
 <file path=ppt/slideLayouts/slideLayout8.xml><?xml version="1.0" encoding="utf-8"?>
 <p:sldLayout xmlns:a="http://schemas.openxmlformats.org/drawingml/2006/main" xmlns:r="http://schemas.openxmlformats.org/officeDocument/2006/relationships" xmlns:p="http://schemas.openxmlformats.org/presentationml/2006/main" preserve="1" userDrawn="1">
-  <p:cSld name="图片与标题">
+  <p:cSld name="Picture with Caption">
     <p:spTree>
       <p:nvGrpSpPr>
         <p:cNvPr id="1" name=""/>
@@ -2866,7 +2866,7 @@
       </p:grpSpPr>
       <p:sp>
         <p:nvSpPr>
-          <p:cNvPr id="3" name="图片占位符 2"/>
+          <p:cNvPr id="3" name="Picture Placeholder 2"/>
           <p:cNvSpPr>
             <a:spLocks noGrp="1"/>
           </p:cNvSpPr>
@@ -2901,7 +2901,7 @@
       </p:sp>
       <p:sp>
         <p:nvSpPr>
-          <p:cNvPr id="4" name="文本占位符 3"/>
+          <p:cNvPr id="4" name="Text Placeholder 3"/>
           <p:cNvSpPr>
             <a:spLocks noGrp="1"/>
           </p:cNvSpPr>
@@ -2932,14 +2932,14 @@
             <a:pPr lvl="0"/>
             <a:r>
               <a:rPr lang="zh-CN" altLang="en-US"/>
-              <a:t>单击此处编辑母版文本样式</a:t>
+              <a:t>Click to edit master text styles</a:t>
             </a:r>
           </a:p>
         </p:txBody>
       </p:sp>
       <p:sp>
         <p:nvSpPr>
-          <p:cNvPr id="5" name="日期占位符 4"/>
+          <p:cNvPr id="5" name="Date Placeholder 4"/>
           <p:cNvSpPr>
             <a:spLocks noGrp="1"/>
           </p:cNvSpPr>
@@ -2965,7 +2965,7 @@
       </p:sp>
       <p:sp>
         <p:nvSpPr>
-          <p:cNvPr id="6" name="页脚占位符 5"/>
+          <p:cNvPr id="6" name="Footer Placeholder 5"/>
           <p:cNvSpPr>
             <a:spLocks noGrp="1"/>
           </p:cNvSpPr>
@@ -2987,7 +2987,7 @@
       </p:sp>
       <p:sp>
         <p:nvSpPr>
-          <p:cNvPr id="7" name="灯片编号占位符 6"/>
+          <p:cNvPr id="7" name="Slide Number Placeholder 6"/>
           <p:cNvSpPr>
             <a:spLocks noGrp="1"/>
           </p:cNvSpPr>
@@ -3013,7 +3013,7 @@
       </p:sp>
       <p:sp>
         <p:nvSpPr>
-          <p:cNvPr id="9" name="标题 8"/>
+          <p:cNvPr id="9" name="Title 8"/>
           <p:cNvSpPr>
             <a:spLocks noGrp="1"/>
           </p:cNvSpPr>
@@ -3031,7 +3031,7 @@
           <a:p>
             <a:r>
               <a:rPr lang="zh-CN" altLang="en-US"/>
-              <a:t>单击此处编辑母版标题样式</a:t>
+              <a:t>Click to edit master title style</a:t>
             </a:r>
           </a:p>
         </p:txBody>
@@ -3046,7 +3046,7 @@
 
 <file path=ppt/slideLayouts/slideLayout9.xml><?xml version="1.0" encoding="utf-8"?>
 <p:sldLayout xmlns:a="http://schemas.openxmlformats.org/drawingml/2006/main" xmlns:r="http://schemas.openxmlformats.org/officeDocument/2006/relationships" xmlns:p="http://schemas.openxmlformats.org/presentationml/2006/main" type="vertTitleAndTx" preserve="1">
-  <p:cSld name="竖排标题与文本">
+  <p:cSld name="Vertical Title and Text">
     <p:spTree>
       <p:nvGrpSpPr>
         <p:cNvPr id="1" name=""/>
@@ -3063,7 +3063,7 @@
       </p:grpSpPr>
       <p:sp>
         <p:nvSpPr>
-          <p:cNvPr id="2" name="竖排标题 1"/>
+          <p:cNvPr id="2" name="Vertical Title 1"/>
           <p:cNvSpPr>
             <a:spLocks noGrp="1"/>
           </p:cNvSpPr>
@@ -3094,14 +3094,14 @@
             <a:pPr lvl="0"/>
             <a:r>
               <a:rPr lang="zh-CN" altLang="en-US"/>
-              <a:t>单击此处编辑标题</a:t>
+              <a:t>Click to edit title</a:t>
             </a:r>
           </a:p>
         </p:txBody>
       </p:sp>
       <p:sp>
         <p:nvSpPr>
-          <p:cNvPr id="3" name="竖排文字占位符 2"/>
+          <p:cNvPr id="3" name="Vertical Text Placeholder 2"/>
           <p:cNvSpPr>
             <a:spLocks noGrp="1"/>
           </p:cNvSpPr>
@@ -3144,42 +3144,42 @@
             <a:pPr lvl="0"/>
             <a:r>
               <a:rPr lang="zh-CN" altLang="en-US" dirty="0"/>
-              <a:t>单击此处编辑母版文本样式</a:t>
+              <a:t>Click to edit master text styles</a:t>
             </a:r>
           </a:p>
           <a:p>
             <a:pPr lvl="1"/>
             <a:r>
               <a:rPr lang="zh-CN" altLang="en-US" dirty="0"/>
-              <a:t>第二级</a:t>
+              <a:t>Second level</a:t>
             </a:r>
           </a:p>
           <a:p>
             <a:pPr lvl="2"/>
             <a:r>
               <a:rPr lang="zh-CN" altLang="en-US" dirty="0"/>
-              <a:t>第三级</a:t>
+              <a:t>Third level</a:t>
             </a:r>
           </a:p>
           <a:p>
             <a:pPr lvl="3"/>
             <a:r>
               <a:rPr lang="zh-CN" altLang="en-US" dirty="0"/>
-              <a:t>第四级</a:t>
+              <a:t>Fourth level</a:t>
             </a:r>
           </a:p>
           <a:p>
             <a:pPr lvl="4"/>
             <a:r>
               <a:rPr lang="zh-CN" altLang="en-US" dirty="0"/>
-              <a:t>第五级</a:t>
+              <a:t>Fifth level</a:t>
             </a:r>
           </a:p>
         </p:txBody>
       </p:sp>
       <p:sp>
         <p:nvSpPr>
-          <p:cNvPr id="4" name="日期占位符 3"/>
+          <p:cNvPr id="4" name="Date Placeholder 3"/>
           <p:cNvSpPr>
             <a:spLocks noGrp="1"/>
           </p:cNvSpPr>
@@ -3205,7 +3205,7 @@
       </p:sp>
       <p:sp>
         <p:nvSpPr>
-          <p:cNvPr id="5" name="页脚占位符 4"/>
+          <p:cNvPr id="5" name="Footer Placeholder 4"/>
           <p:cNvSpPr>
             <a:spLocks noGrp="1"/>
           </p:cNvSpPr>
@@ -3227,7 +3227,7 @@
       </p:sp>
       <p:sp>
         <p:nvSpPr>
-          <p:cNvPr id="6" name="灯片编号占位符 5"/>
+          <p:cNvPr id="6" name="Slide Number Placeholder 5"/>
           <p:cNvSpPr>
             <a:spLocks noGrp="1"/>
           </p:cNvSpPr>
@@ -3283,7 +3283,7 @@
       </p:grpSpPr>
       <p:sp>
         <p:nvSpPr>
-          <p:cNvPr id="2" name="标题占位符 1"/>
+          <p:cNvPr id="2" name="Title Placeholder 1"/>
           <p:cNvSpPr>
             <a:spLocks noGrp="1"/>
           </p:cNvSpPr>
@@ -3311,14 +3311,14 @@
           <a:p>
             <a:r>
               <a:rPr lang="zh-CN" altLang="en-US" dirty="0"/>
-              <a:t>单击此处编辑母版标题样式</a:t>
+              <a:t>Click to edit master title style</a:t>
             </a:r>
           </a:p>
         </p:txBody>
       </p:sp>
       <p:sp>
         <p:nvSpPr>
-          <p:cNvPr id="3" name="文本占位符 2"/>
+          <p:cNvPr id="3" name="Text Placeholder 2"/>
           <p:cNvSpPr>
             <a:spLocks noGrp="1"/>
           </p:cNvSpPr>
@@ -3347,42 +3347,42 @@
             <a:pPr lvl="0"/>
             <a:r>
               <a:rPr lang="zh-CN" altLang="en-US" dirty="0"/>
-              <a:t>单击此处编辑母版文本样式</a:t>
+              <a:t>Click to edit master text styles</a:t>
             </a:r>
           </a:p>
           <a:p>
             <a:pPr lvl="1"/>
             <a:r>
               <a:rPr lang="zh-CN" altLang="en-US" dirty="0"/>
-              <a:t>第二级</a:t>
+              <a:t>Second level</a:t>
             </a:r>
           </a:p>
           <a:p>
             <a:pPr lvl="2"/>
             <a:r>
               <a:rPr lang="zh-CN" altLang="en-US" dirty="0"/>
-              <a:t>第三级</a:t>
+              <a:t>Third level</a:t>
             </a:r>
           </a:p>
           <a:p>
             <a:pPr lvl="3"/>
             <a:r>
               <a:rPr lang="zh-CN" altLang="en-US" dirty="0"/>
-              <a:t>第四级</a:t>
+              <a:t>Fourth level</a:t>
             </a:r>
           </a:p>
           <a:p>
             <a:pPr lvl="4"/>
             <a:r>
               <a:rPr lang="zh-CN" altLang="en-US" dirty="0"/>
-              <a:t>第五级</a:t>
+              <a:t>Fifth level</a:t>
             </a:r>
           </a:p>
         </p:txBody>
       </p:sp>
       <p:sp>
         <p:nvSpPr>
-          <p:cNvPr id="4" name="日期占位符 3"/>
+          <p:cNvPr id="4" name="Date Placeholder 3"/>
           <p:cNvSpPr>
             <a:spLocks noGrp="1"/>
           </p:cNvSpPr>
@@ -3428,7 +3428,7 @@
       </p:sp>
       <p:sp>
         <p:nvSpPr>
-          <p:cNvPr id="5" name="页脚占位符 4"/>
+          <p:cNvPr id="5" name="Footer Placeholder 4"/>
           <p:cNvSpPr>
             <a:spLocks noGrp="1"/>
           </p:cNvSpPr>
@@ -3470,7 +3470,7 @@
       </p:sp>
       <p:sp>
         <p:nvSpPr>
-          <p:cNvPr id="6" name="灯片编号占位符 5"/>
+          <p:cNvPr id="6" name="Slide Number Placeholder 5"/>
           <p:cNvSpPr>
             <a:spLocks noGrp="1"/>
           </p:cNvSpPr>
@@ -3880,7 +3880,7 @@
       </p:grpSpPr>
       <p:grpSp>
         <p:nvGrpSpPr>
-          <p:cNvPr id="242" name="组合 241"/>
+          <p:cNvPr id="242" name="Group 241"/>
           <p:cNvGrpSpPr/>
           <p:nvPr/>
         </p:nvGrpSpPr>
@@ -3894,7 +3894,7 @@
         </p:grpSpPr>
         <p:sp>
           <p:nvSpPr>
-            <p:cNvPr id="118" name="矩形 117"/>
+            <p:cNvPr id="118" name="Rectangle 117"/>
             <p:cNvSpPr/>
             <p:nvPr/>
           </p:nvSpPr>
@@ -3951,7 +3951,7 @@
         </p:sp>
         <p:sp>
           <p:nvSpPr>
-            <p:cNvPr id="164" name="矩形 163"/>
+            <p:cNvPr id="164" name="Rectangle 163"/>
             <p:cNvSpPr/>
             <p:nvPr/>
           </p:nvSpPr>
@@ -3997,7 +3997,7 @@
         </p:sp>
         <p:grpSp>
           <p:nvGrpSpPr>
-            <p:cNvPr id="163" name="组合 162"/>
+            <p:cNvPr id="163" name="Group 162"/>
             <p:cNvGrpSpPr/>
             <p:nvPr/>
           </p:nvGrpSpPr>
@@ -4011,7 +4011,7 @@
           </p:grpSpPr>
           <p:grpSp>
             <p:nvGrpSpPr>
-              <p:cNvPr id="28" name="组合 27"/>
+              <p:cNvPr id="28" name="Group 27"/>
               <p:cNvGrpSpPr/>
               <p:nvPr/>
             </p:nvGrpSpPr>
@@ -4025,7 +4025,7 @@
             </p:grpSpPr>
             <p:sp>
               <p:nvSpPr>
-                <p:cNvPr id="26" name="圆角矩形 25"/>
+                <p:cNvPr id="26" name="Rounded Rectangle 25"/>
                 <p:cNvSpPr/>
                 <p:nvPr/>
               </p:nvSpPr>
@@ -4075,7 +4075,7 @@
             </p:sp>
             <p:sp>
               <p:nvSpPr>
-                <p:cNvPr id="3" name="矩形 2"/>
+                <p:cNvPr id="3" name="Rectangle 2"/>
                 <p:cNvSpPr/>
                 <p:nvPr/>
               </p:nvSpPr>
@@ -4123,7 +4123,7 @@
             </p:sp>
             <p:sp>
               <p:nvSpPr>
-                <p:cNvPr id="4" name="矩形 3"/>
+                <p:cNvPr id="4" name="Rectangle 3"/>
                 <p:cNvSpPr/>
                 <p:nvPr/>
               </p:nvSpPr>
@@ -4171,7 +4171,7 @@
             </p:sp>
             <p:sp>
               <p:nvSpPr>
-                <p:cNvPr id="6" name="矩形 5"/>
+                <p:cNvPr id="6" name="Rectangle 5"/>
                 <p:cNvSpPr/>
                 <p:nvPr/>
               </p:nvSpPr>
@@ -4219,7 +4219,7 @@
             </p:sp>
             <p:sp>
               <p:nvSpPr>
-                <p:cNvPr id="7" name="矩形 6"/>
+                <p:cNvPr id="7" name="Rectangle 6"/>
                 <p:cNvSpPr/>
                 <p:nvPr/>
               </p:nvSpPr>
@@ -4267,7 +4267,7 @@
             </p:sp>
             <p:sp>
               <p:nvSpPr>
-                <p:cNvPr id="8" name="矩形 7"/>
+                <p:cNvPr id="8" name="Rectangle 7"/>
                 <p:cNvSpPr/>
                 <p:nvPr/>
               </p:nvSpPr>
@@ -4315,7 +4315,7 @@
             </p:sp>
             <p:sp>
               <p:nvSpPr>
-                <p:cNvPr id="9" name="矩形 8"/>
+                <p:cNvPr id="9" name="Rectangle 8"/>
                 <p:cNvSpPr/>
                 <p:nvPr/>
               </p:nvSpPr>
@@ -4363,7 +4363,7 @@
             </p:sp>
             <p:sp>
               <p:nvSpPr>
-                <p:cNvPr id="10" name="矩形 9"/>
+                <p:cNvPr id="10" name="Rectangle 9"/>
                 <p:cNvSpPr/>
                 <p:nvPr/>
               </p:nvSpPr>
@@ -4411,7 +4411,7 @@
             </p:sp>
             <p:sp>
               <p:nvSpPr>
-                <p:cNvPr id="11" name="矩形 10"/>
+                <p:cNvPr id="11" name="Rectangle 10"/>
                 <p:cNvSpPr/>
                 <p:nvPr/>
               </p:nvSpPr>
@@ -4459,7 +4459,7 @@
             </p:sp>
             <p:sp>
               <p:nvSpPr>
-                <p:cNvPr id="12" name="矩形 11"/>
+                <p:cNvPr id="12" name="Rectangle 11"/>
                 <p:cNvSpPr/>
                 <p:nvPr/>
               </p:nvSpPr>
@@ -4507,7 +4507,7 @@
             </p:sp>
             <p:sp>
               <p:nvSpPr>
-                <p:cNvPr id="13" name="矩形 12"/>
+                <p:cNvPr id="13" name="Rectangle 12"/>
                 <p:cNvSpPr/>
                 <p:nvPr/>
               </p:nvSpPr>
@@ -4555,7 +4555,7 @@
             </p:sp>
             <p:sp>
               <p:nvSpPr>
-                <p:cNvPr id="14" name="矩形 13"/>
+                <p:cNvPr id="14" name="Rectangle 13"/>
                 <p:cNvSpPr/>
                 <p:nvPr/>
               </p:nvSpPr>
@@ -4603,7 +4603,7 @@
             </p:sp>
             <p:sp>
               <p:nvSpPr>
-                <p:cNvPr id="15" name="矩形 14"/>
+                <p:cNvPr id="15" name="Rectangle 14"/>
                 <p:cNvSpPr/>
                 <p:nvPr/>
               </p:nvSpPr>
@@ -4651,7 +4651,7 @@
             </p:sp>
             <p:sp>
               <p:nvSpPr>
-                <p:cNvPr id="16" name="矩形 15"/>
+                <p:cNvPr id="16" name="Rectangle 15"/>
                 <p:cNvSpPr/>
                 <p:nvPr/>
               </p:nvSpPr>
@@ -4699,7 +4699,7 @@
             </p:sp>
             <p:sp>
               <p:nvSpPr>
-                <p:cNvPr id="17" name="矩形 16"/>
+                <p:cNvPr id="17" name="Rectangle 16"/>
                 <p:cNvSpPr/>
                 <p:nvPr/>
               </p:nvSpPr>
@@ -4747,7 +4747,7 @@
             </p:sp>
             <p:sp>
               <p:nvSpPr>
-                <p:cNvPr id="18" name="矩形 17"/>
+                <p:cNvPr id="18" name="Rectangle 17"/>
                 <p:cNvSpPr/>
                 <p:nvPr/>
               </p:nvSpPr>
@@ -4795,7 +4795,7 @@
             </p:sp>
             <p:sp>
               <p:nvSpPr>
-                <p:cNvPr id="19" name="矩形 18"/>
+                <p:cNvPr id="19" name="Rectangle 18"/>
                 <p:cNvSpPr/>
                 <p:nvPr/>
               </p:nvSpPr>
@@ -4843,7 +4843,7 @@
             </p:sp>
             <p:sp>
               <p:nvSpPr>
-                <p:cNvPr id="20" name="矩形 19"/>
+                <p:cNvPr id="20" name="Rectangle 19"/>
                 <p:cNvSpPr/>
                 <p:nvPr/>
               </p:nvSpPr>
@@ -4891,7 +4891,7 @@
             </p:sp>
             <p:sp>
               <p:nvSpPr>
-                <p:cNvPr id="21" name="矩形 20"/>
+                <p:cNvPr id="21" name="Rectangle 20"/>
                 <p:cNvSpPr/>
                 <p:nvPr/>
               </p:nvSpPr>
@@ -4939,7 +4939,7 @@
             </p:sp>
             <p:sp>
               <p:nvSpPr>
-                <p:cNvPr id="22" name="矩形 21"/>
+                <p:cNvPr id="22" name="Rectangle 21"/>
                 <p:cNvSpPr/>
                 <p:nvPr/>
               </p:nvSpPr>
@@ -4987,7 +4987,7 @@
             </p:sp>
             <p:sp>
               <p:nvSpPr>
-                <p:cNvPr id="23" name="矩形 22"/>
+                <p:cNvPr id="23" name="Rectangle 22"/>
                 <p:cNvSpPr/>
                 <p:nvPr/>
               </p:nvSpPr>
@@ -5035,7 +5035,7 @@
             </p:sp>
             <p:sp>
               <p:nvSpPr>
-                <p:cNvPr id="24" name="文本框 23"/>
+                <p:cNvPr id="24" name="Text Box 23"/>
                 <p:cNvSpPr txBox="1"/>
                 <p:nvPr/>
               </p:nvSpPr>
@@ -5068,7 +5068,7 @@
             </p:sp>
             <p:sp>
               <p:nvSpPr>
-                <p:cNvPr id="25" name="文本框 24"/>
+                <p:cNvPr id="25" name="Text Box 24"/>
                 <p:cNvSpPr txBox="1"/>
                 <p:nvPr/>
               </p:nvSpPr>
@@ -5098,7 +5098,7 @@
           </p:grpSp>
           <p:grpSp>
             <p:nvGrpSpPr>
-              <p:cNvPr id="29" name="组合 28"/>
+              <p:cNvPr id="29" name="Group 28"/>
               <p:cNvGrpSpPr/>
               <p:nvPr/>
             </p:nvGrpSpPr>
@@ -5112,7 +5112,7 @@
             </p:grpSpPr>
             <p:sp>
               <p:nvSpPr>
-                <p:cNvPr id="30" name="圆角矩形 29"/>
+                <p:cNvPr id="30" name="Rounded Rectangle 29"/>
                 <p:cNvSpPr/>
                 <p:nvPr/>
               </p:nvSpPr>
@@ -5162,7 +5162,7 @@
             </p:sp>
             <p:sp>
               <p:nvSpPr>
-                <p:cNvPr id="31" name="矩形 30"/>
+                <p:cNvPr id="31" name="Rectangle 30"/>
                 <p:cNvSpPr/>
                 <p:nvPr/>
               </p:nvSpPr>
@@ -5210,7 +5210,7 @@
             </p:sp>
             <p:sp>
               <p:nvSpPr>
-                <p:cNvPr id="32" name="矩形 31"/>
+                <p:cNvPr id="32" name="Rectangle 31"/>
                 <p:cNvSpPr/>
                 <p:nvPr/>
               </p:nvSpPr>
@@ -5258,7 +5258,7 @@
             </p:sp>
             <p:sp>
               <p:nvSpPr>
-                <p:cNvPr id="33" name="矩形 32"/>
+                <p:cNvPr id="33" name="Rectangle 32"/>
                 <p:cNvSpPr/>
                 <p:nvPr/>
               </p:nvSpPr>
@@ -5306,7 +5306,7 @@
             </p:sp>
             <p:sp>
               <p:nvSpPr>
-                <p:cNvPr id="34" name="矩形 33"/>
+                <p:cNvPr id="34" name="Rectangle 33"/>
                 <p:cNvSpPr/>
                 <p:nvPr/>
               </p:nvSpPr>
@@ -5354,7 +5354,7 @@
             </p:sp>
             <p:sp>
               <p:nvSpPr>
-                <p:cNvPr id="35" name="矩形 34"/>
+                <p:cNvPr id="35" name="Rectangle 34"/>
                 <p:cNvSpPr/>
                 <p:nvPr/>
               </p:nvSpPr>
@@ -5402,7 +5402,7 @@
             </p:sp>
             <p:sp>
               <p:nvSpPr>
-                <p:cNvPr id="36" name="矩形 35"/>
+                <p:cNvPr id="36" name="Rectangle 35"/>
                 <p:cNvSpPr/>
                 <p:nvPr/>
               </p:nvSpPr>
@@ -5450,7 +5450,7 @@
             </p:sp>
             <p:sp>
               <p:nvSpPr>
-                <p:cNvPr id="37" name="矩形 36"/>
+                <p:cNvPr id="37" name="Rectangle 36"/>
                 <p:cNvSpPr/>
                 <p:nvPr/>
               </p:nvSpPr>
@@ -5498,7 +5498,7 @@
             </p:sp>
             <p:sp>
               <p:nvSpPr>
-                <p:cNvPr id="38" name="矩形 37"/>
+                <p:cNvPr id="38" name="Rectangle 37"/>
                 <p:cNvSpPr/>
                 <p:nvPr/>
               </p:nvSpPr>
@@ -5546,7 +5546,7 @@
             </p:sp>
             <p:sp>
               <p:nvSpPr>
-                <p:cNvPr id="39" name="矩形 38"/>
+                <p:cNvPr id="39" name="Rectangle 38"/>
                 <p:cNvSpPr/>
                 <p:nvPr/>
               </p:nvSpPr>
@@ -5594,7 +5594,7 @@
             </p:sp>
             <p:sp>
               <p:nvSpPr>
-                <p:cNvPr id="40" name="矩形 39"/>
+                <p:cNvPr id="40" name="Rectangle 39"/>
                 <p:cNvSpPr/>
                 <p:nvPr/>
               </p:nvSpPr>
@@ -5642,7 +5642,7 @@
             </p:sp>
             <p:sp>
               <p:nvSpPr>
-                <p:cNvPr id="41" name="矩形 40"/>
+                <p:cNvPr id="41" name="Rectangle 40"/>
                 <p:cNvSpPr/>
                 <p:nvPr/>
               </p:nvSpPr>
@@ -5690,7 +5690,7 @@
             </p:sp>
             <p:sp>
               <p:nvSpPr>
-                <p:cNvPr id="42" name="矩形 41"/>
+                <p:cNvPr id="42" name="Rectangle 41"/>
                 <p:cNvSpPr/>
                 <p:nvPr/>
               </p:nvSpPr>
@@ -5738,7 +5738,7 @@
             </p:sp>
             <p:sp>
               <p:nvSpPr>
-                <p:cNvPr id="43" name="矩形 42"/>
+                <p:cNvPr id="43" name="Rectangle 42"/>
                 <p:cNvSpPr/>
                 <p:nvPr/>
               </p:nvSpPr>
@@ -5786,7 +5786,7 @@
             </p:sp>
             <p:sp>
               <p:nvSpPr>
-                <p:cNvPr id="44" name="矩形 43"/>
+                <p:cNvPr id="44" name="Rectangle 43"/>
                 <p:cNvSpPr/>
                 <p:nvPr/>
               </p:nvSpPr>
@@ -5834,7 +5834,7 @@
             </p:sp>
             <p:sp>
               <p:nvSpPr>
-                <p:cNvPr id="45" name="矩形 44"/>
+                <p:cNvPr id="45" name="Rectangle 44"/>
                 <p:cNvSpPr/>
                 <p:nvPr/>
               </p:nvSpPr>
@@ -5882,7 +5882,7 @@
             </p:sp>
             <p:sp>
               <p:nvSpPr>
-                <p:cNvPr id="46" name="矩形 45"/>
+                <p:cNvPr id="46" name="Rectangle 45"/>
                 <p:cNvSpPr/>
                 <p:nvPr/>
               </p:nvSpPr>
@@ -5930,7 +5930,7 @@
             </p:sp>
             <p:sp>
               <p:nvSpPr>
-                <p:cNvPr id="47" name="矩形 46"/>
+                <p:cNvPr id="47" name="Rectangle 46"/>
                 <p:cNvSpPr/>
                 <p:nvPr/>
               </p:nvSpPr>
@@ -5978,7 +5978,7 @@
             </p:sp>
             <p:sp>
               <p:nvSpPr>
-                <p:cNvPr id="48" name="矩形 47"/>
+                <p:cNvPr id="48" name="Rectangle 47"/>
                 <p:cNvSpPr/>
                 <p:nvPr/>
               </p:nvSpPr>
@@ -6026,7 +6026,7 @@
             </p:sp>
             <p:sp>
               <p:nvSpPr>
-                <p:cNvPr id="49" name="矩形 48"/>
+                <p:cNvPr id="49" name="Rectangle 48"/>
                 <p:cNvSpPr/>
                 <p:nvPr/>
               </p:nvSpPr>
@@ -6074,7 +6074,7 @@
             </p:sp>
             <p:sp>
               <p:nvSpPr>
-                <p:cNvPr id="50" name="矩形 49"/>
+                <p:cNvPr id="50" name="Rectangle 49"/>
                 <p:cNvSpPr/>
                 <p:nvPr/>
               </p:nvSpPr>
@@ -6122,7 +6122,7 @@
             </p:sp>
             <p:sp>
               <p:nvSpPr>
-                <p:cNvPr id="51" name="文本框 50"/>
+                <p:cNvPr id="51" name="Text Box 50"/>
                 <p:cNvSpPr txBox="1"/>
                 <p:nvPr/>
               </p:nvSpPr>
@@ -6155,7 +6155,7 @@
             </p:sp>
             <p:sp>
               <p:nvSpPr>
-                <p:cNvPr id="52" name="文本框 51"/>
+                <p:cNvPr id="52" name="Text Box 51"/>
                 <p:cNvSpPr txBox="1"/>
                 <p:nvPr/>
               </p:nvSpPr>
@@ -6185,7 +6185,7 @@
           </p:grpSp>
           <p:grpSp>
             <p:nvGrpSpPr>
-              <p:cNvPr id="53" name="组合 52"/>
+              <p:cNvPr id="53" name="Group 52"/>
               <p:cNvGrpSpPr/>
               <p:nvPr/>
             </p:nvGrpSpPr>
@@ -6199,7 +6199,7 @@
             </p:grpSpPr>
             <p:sp>
               <p:nvSpPr>
-                <p:cNvPr id="54" name="圆角矩形 53"/>
+                <p:cNvPr id="54" name="Rounded Rectangle 53"/>
                 <p:cNvSpPr/>
                 <p:nvPr/>
               </p:nvSpPr>
@@ -6249,7 +6249,7 @@
             </p:sp>
             <p:sp>
               <p:nvSpPr>
-                <p:cNvPr id="55" name="矩形 54"/>
+                <p:cNvPr id="55" name="Rectangle 54"/>
                 <p:cNvSpPr/>
                 <p:nvPr/>
               </p:nvSpPr>
@@ -6297,7 +6297,7 @@
             </p:sp>
             <p:sp>
               <p:nvSpPr>
-                <p:cNvPr id="56" name="矩形 55"/>
+                <p:cNvPr id="56" name="Rectangle 55"/>
                 <p:cNvSpPr/>
                 <p:nvPr/>
               </p:nvSpPr>
@@ -6345,7 +6345,7 @@
             </p:sp>
             <p:sp>
               <p:nvSpPr>
-                <p:cNvPr id="57" name="矩形 56"/>
+                <p:cNvPr id="57" name="Rectangle 56"/>
                 <p:cNvSpPr/>
                 <p:nvPr/>
               </p:nvSpPr>
@@ -6393,7 +6393,7 @@
             </p:sp>
             <p:sp>
               <p:nvSpPr>
-                <p:cNvPr id="58" name="矩形 57"/>
+                <p:cNvPr id="58" name="Rectangle 57"/>
                 <p:cNvSpPr/>
                 <p:nvPr/>
               </p:nvSpPr>
@@ -6441,7 +6441,7 @@
             </p:sp>
             <p:sp>
               <p:nvSpPr>
-                <p:cNvPr id="59" name="矩形 58"/>
+                <p:cNvPr id="59" name="Rectangle 58"/>
                 <p:cNvSpPr/>
                 <p:nvPr/>
               </p:nvSpPr>
@@ -6489,7 +6489,7 @@
             </p:sp>
             <p:sp>
               <p:nvSpPr>
-                <p:cNvPr id="60" name="矩形 59"/>
+                <p:cNvPr id="60" name="Rectangle 59"/>
                 <p:cNvSpPr/>
                 <p:nvPr/>
               </p:nvSpPr>
@@ -6537,7 +6537,7 @@
             </p:sp>
             <p:sp>
               <p:nvSpPr>
-                <p:cNvPr id="61" name="矩形 60"/>
+                <p:cNvPr id="61" name="Rectangle 60"/>
                 <p:cNvSpPr/>
                 <p:nvPr/>
               </p:nvSpPr>
@@ -6585,7 +6585,7 @@
             </p:sp>
             <p:sp>
               <p:nvSpPr>
-                <p:cNvPr id="62" name="矩形 61"/>
+                <p:cNvPr id="62" name="Rectangle 61"/>
                 <p:cNvSpPr/>
                 <p:nvPr/>
               </p:nvSpPr>
@@ -6633,7 +6633,7 @@
             </p:sp>
             <p:sp>
               <p:nvSpPr>
-                <p:cNvPr id="63" name="矩形 62"/>
+                <p:cNvPr id="63" name="Rectangle 62"/>
                 <p:cNvSpPr/>
                 <p:nvPr/>
               </p:nvSpPr>
@@ -6681,7 +6681,7 @@
             </p:sp>
             <p:sp>
               <p:nvSpPr>
-                <p:cNvPr id="64" name="矩形 63"/>
+                <p:cNvPr id="64" name="Rectangle 63"/>
                 <p:cNvSpPr/>
                 <p:nvPr/>
               </p:nvSpPr>
@@ -6729,7 +6729,7 @@
             </p:sp>
             <p:sp>
               <p:nvSpPr>
-                <p:cNvPr id="65" name="矩形 64"/>
+                <p:cNvPr id="65" name="Rectangle 64"/>
                 <p:cNvSpPr/>
                 <p:nvPr/>
               </p:nvSpPr>
@@ -6777,7 +6777,7 @@
             </p:sp>
             <p:sp>
               <p:nvSpPr>
-                <p:cNvPr id="66" name="矩形 65"/>
+                <p:cNvPr id="66" name="Rectangle 65"/>
                 <p:cNvSpPr/>
                 <p:nvPr/>
               </p:nvSpPr>
@@ -6825,7 +6825,7 @@
             </p:sp>
             <p:sp>
               <p:nvSpPr>
-                <p:cNvPr id="67" name="矩形 66"/>
+                <p:cNvPr id="67" name="Rectangle 66"/>
                 <p:cNvSpPr/>
                 <p:nvPr/>
               </p:nvSpPr>
@@ -6873,7 +6873,7 @@
             </p:sp>
             <p:sp>
               <p:nvSpPr>
-                <p:cNvPr id="68" name="矩形 67"/>
+                <p:cNvPr id="68" name="Rectangle 67"/>
                 <p:cNvSpPr/>
                 <p:nvPr/>
               </p:nvSpPr>
@@ -6921,7 +6921,7 @@
             </p:sp>
             <p:sp>
               <p:nvSpPr>
-                <p:cNvPr id="69" name="矩形 68"/>
+                <p:cNvPr id="69" name="Rectangle 68"/>
                 <p:cNvSpPr/>
                 <p:nvPr/>
               </p:nvSpPr>
@@ -6969,7 +6969,7 @@
             </p:sp>
             <p:sp>
               <p:nvSpPr>
-                <p:cNvPr id="70" name="矩形 69"/>
+                <p:cNvPr id="70" name="Rectangle 69"/>
                 <p:cNvSpPr/>
                 <p:nvPr/>
               </p:nvSpPr>
@@ -7017,7 +7017,7 @@
             </p:sp>
             <p:sp>
               <p:nvSpPr>
-                <p:cNvPr id="71" name="矩形 70"/>
+                <p:cNvPr id="71" name="Rectangle 70"/>
                 <p:cNvSpPr/>
                 <p:nvPr/>
               </p:nvSpPr>
@@ -7065,7 +7065,7 @@
             </p:sp>
             <p:sp>
               <p:nvSpPr>
-                <p:cNvPr id="72" name="矩形 71"/>
+                <p:cNvPr id="72" name="Rectangle 71"/>
                 <p:cNvSpPr/>
                 <p:nvPr/>
               </p:nvSpPr>
@@ -7113,7 +7113,7 @@
             </p:sp>
             <p:sp>
               <p:nvSpPr>
-                <p:cNvPr id="73" name="矩形 72"/>
+                <p:cNvPr id="73" name="Rectangle 72"/>
                 <p:cNvSpPr/>
                 <p:nvPr/>
               </p:nvSpPr>
@@ -7161,7 +7161,7 @@
             </p:sp>
             <p:sp>
               <p:nvSpPr>
-                <p:cNvPr id="74" name="矩形 73"/>
+                <p:cNvPr id="74" name="Rectangle 73"/>
                 <p:cNvSpPr/>
                 <p:nvPr/>
               </p:nvSpPr>
@@ -7209,7 +7209,7 @@
             </p:sp>
             <p:sp>
               <p:nvSpPr>
-                <p:cNvPr id="75" name="文本框 74"/>
+                <p:cNvPr id="75" name="Text Box 74"/>
                 <p:cNvSpPr txBox="1"/>
                 <p:nvPr/>
               </p:nvSpPr>
@@ -7242,7 +7242,7 @@
             </p:sp>
             <p:sp>
               <p:nvSpPr>
-                <p:cNvPr id="76" name="文本框 75"/>
+                <p:cNvPr id="76" name="Text Box 75"/>
                 <p:cNvSpPr txBox="1"/>
                 <p:nvPr/>
               </p:nvSpPr>
@@ -7272,7 +7272,7 @@
           </p:grpSp>
           <p:grpSp>
             <p:nvGrpSpPr>
-              <p:cNvPr id="77" name="组合 76"/>
+              <p:cNvPr id="77" name="Group 76"/>
               <p:cNvGrpSpPr/>
               <p:nvPr/>
             </p:nvGrpSpPr>
@@ -7286,7 +7286,7 @@
             </p:grpSpPr>
             <p:sp>
               <p:nvSpPr>
-                <p:cNvPr id="78" name="圆角矩形 77"/>
+                <p:cNvPr id="78" name="Rounded Rectangle 77"/>
                 <p:cNvSpPr/>
                 <p:nvPr/>
               </p:nvSpPr>
@@ -7336,7 +7336,7 @@
             </p:sp>
             <p:sp>
               <p:nvSpPr>
-                <p:cNvPr id="79" name="矩形 78"/>
+                <p:cNvPr id="79" name="Rectangle 78"/>
                 <p:cNvSpPr/>
                 <p:nvPr/>
               </p:nvSpPr>
@@ -7384,7 +7384,7 @@
             </p:sp>
             <p:sp>
               <p:nvSpPr>
-                <p:cNvPr id="80" name="矩形 79"/>
+                <p:cNvPr id="80" name="Rectangle 79"/>
                 <p:cNvSpPr/>
                 <p:nvPr/>
               </p:nvSpPr>
@@ -7432,7 +7432,7 @@
             </p:sp>
             <p:sp>
               <p:nvSpPr>
-                <p:cNvPr id="81" name="矩形 80"/>
+                <p:cNvPr id="81" name="Rectangle 80"/>
                 <p:cNvSpPr/>
                 <p:nvPr/>
               </p:nvSpPr>
@@ -7480,7 +7480,7 @@
             </p:sp>
             <p:sp>
               <p:nvSpPr>
-                <p:cNvPr id="82" name="矩形 81"/>
+                <p:cNvPr id="82" name="Rectangle 81"/>
                 <p:cNvSpPr/>
                 <p:nvPr/>
               </p:nvSpPr>
@@ -7528,7 +7528,7 @@
             </p:sp>
             <p:sp>
               <p:nvSpPr>
-                <p:cNvPr id="83" name="矩形 82"/>
+                <p:cNvPr id="83" name="Rectangle 82"/>
                 <p:cNvSpPr/>
                 <p:nvPr/>
               </p:nvSpPr>
@@ -7576,7 +7576,7 @@
             </p:sp>
             <p:sp>
               <p:nvSpPr>
-                <p:cNvPr id="84" name="矩形 83"/>
+                <p:cNvPr id="84" name="Rectangle 83"/>
                 <p:cNvSpPr/>
                 <p:nvPr/>
               </p:nvSpPr>
@@ -7624,7 +7624,7 @@
             </p:sp>
             <p:sp>
               <p:nvSpPr>
-                <p:cNvPr id="85" name="矩形 84"/>
+                <p:cNvPr id="85" name="Rectangle 84"/>
                 <p:cNvSpPr/>
                 <p:nvPr/>
               </p:nvSpPr>
@@ -7672,7 +7672,7 @@
             </p:sp>
             <p:sp>
               <p:nvSpPr>
-                <p:cNvPr id="86" name="矩形 85"/>
+                <p:cNvPr id="86" name="Rectangle 85"/>
                 <p:cNvSpPr/>
                 <p:nvPr/>
               </p:nvSpPr>
@@ -7720,7 +7720,7 @@
             </p:sp>
             <p:sp>
               <p:nvSpPr>
-                <p:cNvPr id="87" name="矩形 86"/>
+                <p:cNvPr id="87" name="Rectangle 86"/>
                 <p:cNvSpPr/>
                 <p:nvPr/>
               </p:nvSpPr>
@@ -7768,7 +7768,7 @@
             </p:sp>
             <p:sp>
               <p:nvSpPr>
-                <p:cNvPr id="88" name="矩形 87"/>
+                <p:cNvPr id="88" name="Rectangle 87"/>
                 <p:cNvSpPr/>
                 <p:nvPr/>
               </p:nvSpPr>
@@ -7816,7 +7816,7 @@
             </p:sp>
             <p:sp>
               <p:nvSpPr>
-                <p:cNvPr id="89" name="矩形 88"/>
+                <p:cNvPr id="89" name="Rectangle 88"/>
                 <p:cNvSpPr/>
                 <p:nvPr/>
               </p:nvSpPr>
@@ -7864,7 +7864,7 @@
             </p:sp>
             <p:sp>
               <p:nvSpPr>
-                <p:cNvPr id="90" name="矩形 89"/>
+                <p:cNvPr id="90" name="Rectangle 89"/>
                 <p:cNvSpPr/>
                 <p:nvPr/>
               </p:nvSpPr>
@@ -7912,7 +7912,7 @@
             </p:sp>
             <p:sp>
               <p:nvSpPr>
-                <p:cNvPr id="91" name="矩形 90"/>
+                <p:cNvPr id="91" name="Rectangle 90"/>
                 <p:cNvSpPr/>
                 <p:nvPr/>
               </p:nvSpPr>
@@ -7960,7 +7960,7 @@
             </p:sp>
             <p:sp>
               <p:nvSpPr>
-                <p:cNvPr id="92" name="矩形 91"/>
+                <p:cNvPr id="92" name="Rectangle 91"/>
                 <p:cNvSpPr/>
                 <p:nvPr/>
               </p:nvSpPr>
@@ -8008,7 +8008,7 @@
             </p:sp>
             <p:sp>
               <p:nvSpPr>
-                <p:cNvPr id="93" name="矩形 92"/>
+                <p:cNvPr id="93" name="Rectangle 92"/>
                 <p:cNvSpPr/>
                 <p:nvPr/>
               </p:nvSpPr>
@@ -8056,7 +8056,7 @@
             </p:sp>
             <p:sp>
               <p:nvSpPr>
-                <p:cNvPr id="94" name="矩形 93"/>
+                <p:cNvPr id="94" name="Rectangle 93"/>
                 <p:cNvSpPr/>
                 <p:nvPr/>
               </p:nvSpPr>
@@ -8104,7 +8104,7 @@
             </p:sp>
             <p:sp>
               <p:nvSpPr>
-                <p:cNvPr id="95" name="矩形 94"/>
+                <p:cNvPr id="95" name="Rectangle 94"/>
                 <p:cNvSpPr/>
                 <p:nvPr/>
               </p:nvSpPr>
@@ -8152,7 +8152,7 @@
             </p:sp>
             <p:sp>
               <p:nvSpPr>
-                <p:cNvPr id="96" name="矩形 95"/>
+                <p:cNvPr id="96" name="Rectangle 95"/>
                 <p:cNvSpPr/>
                 <p:nvPr/>
               </p:nvSpPr>
@@ -8200,7 +8200,7 @@
             </p:sp>
             <p:sp>
               <p:nvSpPr>
-                <p:cNvPr id="97" name="矩形 96"/>
+                <p:cNvPr id="97" name="Rectangle 96"/>
                 <p:cNvSpPr/>
                 <p:nvPr/>
               </p:nvSpPr>
@@ -8248,7 +8248,7 @@
             </p:sp>
             <p:sp>
               <p:nvSpPr>
-                <p:cNvPr id="98" name="矩形 97"/>
+                <p:cNvPr id="98" name="Rectangle 97"/>
                 <p:cNvSpPr/>
                 <p:nvPr/>
               </p:nvSpPr>
@@ -8296,7 +8296,7 @@
             </p:sp>
             <p:sp>
               <p:nvSpPr>
-                <p:cNvPr id="99" name="文本框 98"/>
+                <p:cNvPr id="99" name="Text Box 98"/>
                 <p:cNvSpPr txBox="1"/>
                 <p:nvPr/>
               </p:nvSpPr>
@@ -8329,7 +8329,7 @@
             </p:sp>
             <p:sp>
               <p:nvSpPr>
-                <p:cNvPr id="100" name="文本框 99"/>
+                <p:cNvPr id="100" name="Text Box 99"/>
                 <p:cNvSpPr txBox="1"/>
                 <p:nvPr/>
               </p:nvSpPr>
@@ -8367,7 +8367,7 @@
           </p:grpSp>
           <p:grpSp>
             <p:nvGrpSpPr>
-              <p:cNvPr id="107" name="组合 106"/>
+              <p:cNvPr id="107" name="Group 106"/>
               <p:cNvGrpSpPr/>
               <p:nvPr/>
             </p:nvGrpSpPr>
@@ -8381,7 +8381,7 @@
             </p:grpSpPr>
             <p:sp>
               <p:nvSpPr>
-                <p:cNvPr id="101" name="圆角矩形 100"/>
+                <p:cNvPr id="101" name="Rounded Rectangle 100"/>
                 <p:cNvSpPr/>
                 <p:nvPr/>
               </p:nvSpPr>
@@ -8433,7 +8433,7 @@
             </p:sp>
             <p:pic>
               <p:nvPicPr>
-                <p:cNvPr id="106" name="图片 105"/>
+                <p:cNvPr id="106" name="Picture 105"/>
                 <p:cNvPicPr>
                   <a:picLocks noChangeAspect="1"/>
                 </p:cNvPicPr>
@@ -8459,7 +8459,7 @@
           </p:grpSp>
           <p:sp>
             <p:nvSpPr>
-              <p:cNvPr id="120" name="文本框 119"/>
+              <p:cNvPr id="120" name="Text Box 119"/>
               <p:cNvSpPr txBox="1"/>
               <p:nvPr/>
             </p:nvSpPr>
@@ -8496,7 +8496,7 @@
           </p:sp>
           <p:sp>
             <p:nvSpPr>
-              <p:cNvPr id="123" name="下箭头 122"/>
+              <p:cNvPr id="123" name="Down Arrow 122"/>
               <p:cNvSpPr/>
               <p:nvPr>
                 <p:custDataLst>
@@ -8548,15 +8548,15 @@
               <a:p>
                 <a:pPr algn="ctr"/>
                 <a:endParaRPr lang="zh-CN" altLang="en-US" b="1">
-                  <a:latin typeface="微软雅黑" panose="020B0503020204020204" charset="-122"/>
-                  <a:ea typeface="微软雅黑" panose="020B0503020204020204" charset="-122"/>
+                  <a:latin typeface="Microsoft YaHei" panose="020B0503020204020204" charset="-122"/>
+                  <a:ea typeface="Microsoft YaHei" panose="020B0503020204020204" charset="-122"/>
                 </a:endParaRPr>
               </a:p>
             </p:txBody>
           </p:sp>
           <p:pic>
             <p:nvPicPr>
-              <p:cNvPr id="151" name="图片 150"/>
+              <p:cNvPr id="151" name="Picture 150"/>
               <p:cNvPicPr>
                 <a:picLocks noChangeAspect="1"/>
               </p:cNvPicPr>
@@ -8601,7 +8601,7 @@
           </p:pic>
           <p:cxnSp>
             <p:nvCxnSpPr>
-              <p:cNvPr id="154" name="肘形连接符 153"/>
+              <p:cNvPr id="154" name="Elbow Connector 153"/>
               <p:cNvCxnSpPr/>
               <p:nvPr/>
             </p:nvCxnSpPr>
@@ -8638,7 +8638,7 @@
           </p:cxnSp>
           <p:cxnSp>
             <p:nvCxnSpPr>
-              <p:cNvPr id="155" name="肘形连接符 154"/>
+              <p:cNvPr id="155" name="Elbow Connector 154"/>
               <p:cNvCxnSpPr/>
               <p:nvPr/>
             </p:nvCxnSpPr>
@@ -8675,7 +8675,7 @@
           </p:cxnSp>
           <p:cxnSp>
             <p:nvCxnSpPr>
-              <p:cNvPr id="157" name="肘形连接符 156"/>
+              <p:cNvPr id="157" name="Elbow Connector 156"/>
               <p:cNvCxnSpPr>
                 <a:endCxn id="101" idx="1"/>
               </p:cNvCxnSpPr>
@@ -8715,7 +8715,7 @@
           </p:cxnSp>
           <p:cxnSp>
             <p:nvCxnSpPr>
-              <p:cNvPr id="158" name="肘形连接符 157"/>
+              <p:cNvPr id="158" name="Elbow Connector 157"/>
               <p:cNvCxnSpPr/>
               <p:nvPr/>
             </p:nvCxnSpPr>
@@ -8753,7 +8753,7 @@
           </p:cxnSp>
           <p:cxnSp>
             <p:nvCxnSpPr>
-              <p:cNvPr id="159" name="直接箭头连接符 158"/>
+              <p:cNvPr id="159" name="Straight Arrow Connector 158"/>
               <p:cNvCxnSpPr>
                 <a:stCxn id="54" idx="2"/>
               </p:cNvCxnSpPr>
@@ -8791,7 +8791,7 @@
           </p:cxnSp>
           <p:cxnSp>
             <p:nvCxnSpPr>
-              <p:cNvPr id="160" name="直接箭头连接符 159"/>
+              <p:cNvPr id="160" name="Straight Arrow Connector 159"/>
               <p:cNvCxnSpPr/>
               <p:nvPr/>
             </p:nvCxnSpPr>
@@ -8827,7 +8827,7 @@
           </p:cxnSp>
           <p:cxnSp>
             <p:nvCxnSpPr>
-              <p:cNvPr id="161" name="直接箭头连接符 160"/>
+              <p:cNvPr id="161" name="Straight Arrow Connector 160"/>
               <p:cNvCxnSpPr/>
               <p:nvPr/>
             </p:nvCxnSpPr>
@@ -8864,7 +8864,7 @@
           </p:cxnSp>
           <p:cxnSp>
             <p:nvCxnSpPr>
-              <p:cNvPr id="162" name="直接箭头连接符 161"/>
+              <p:cNvPr id="162" name="Straight Arrow Connector 161"/>
               <p:cNvCxnSpPr/>
               <p:nvPr/>
             </p:nvCxnSpPr>
@@ -8902,7 +8902,7 @@
         </p:grpSp>
         <p:sp>
           <p:nvSpPr>
-            <p:cNvPr id="166" name="矩形 165"/>
+            <p:cNvPr id="166" name="Rectangle 165"/>
             <p:cNvSpPr/>
             <p:nvPr/>
           </p:nvSpPr>
@@ -8950,7 +8950,7 @@
         </p:sp>
         <p:grpSp>
           <p:nvGrpSpPr>
-            <p:cNvPr id="119" name="组合 118"/>
+            <p:cNvPr id="119" name="Group 118"/>
             <p:cNvGrpSpPr/>
             <p:nvPr/>
           </p:nvGrpSpPr>
@@ -8964,7 +8964,7 @@
           </p:grpSpPr>
           <p:sp>
             <p:nvSpPr>
-              <p:cNvPr id="395" name="圆角矩形 394"/>
+              <p:cNvPr id="395" name="Rounded Rectangle 394"/>
               <p:cNvSpPr/>
               <p:nvPr/>
             </p:nvSpPr>
@@ -9012,7 +9012,7 @@
           </p:sp>
           <p:sp>
             <p:nvSpPr>
-              <p:cNvPr id="191" name="圆角矩形 190"/>
+              <p:cNvPr id="191" name="Rounded Rectangle 190"/>
               <p:cNvSpPr/>
               <p:nvPr/>
             </p:nvSpPr>
@@ -9060,7 +9060,7 @@
           </p:sp>
           <p:sp>
             <p:nvSpPr>
-              <p:cNvPr id="208" name="圆角矩形 207"/>
+              <p:cNvPr id="208" name="Rounded Rectangle 207"/>
               <p:cNvSpPr/>
               <p:nvPr/>
             </p:nvSpPr>
@@ -9118,7 +9118,7 @@
           </p:sp>
           <p:sp>
             <p:nvSpPr>
-              <p:cNvPr id="193" name="圆角矩形 192"/>
+              <p:cNvPr id="193" name="Rounded Rectangle 192"/>
               <p:cNvSpPr/>
               <p:nvPr/>
             </p:nvSpPr>
@@ -9164,7 +9164,7 @@
           </p:sp>
           <p:sp>
             <p:nvSpPr>
-              <p:cNvPr id="192" name="圆角矩形 191"/>
+              <p:cNvPr id="192" name="Rounded Rectangle 191"/>
               <p:cNvSpPr/>
               <p:nvPr/>
             </p:nvSpPr>
@@ -9210,7 +9210,7 @@
           </p:sp>
           <p:sp>
             <p:nvSpPr>
-              <p:cNvPr id="128" name="矩形 127"/>
+              <p:cNvPr id="128" name="Rectangle 127"/>
               <p:cNvSpPr/>
               <p:nvPr/>
             </p:nvSpPr>
@@ -9258,7 +9258,7 @@
           </p:sp>
           <p:sp>
             <p:nvSpPr>
-              <p:cNvPr id="129" name="矩形 128"/>
+              <p:cNvPr id="129" name="Rectangle 128"/>
               <p:cNvSpPr/>
               <p:nvPr/>
             </p:nvSpPr>
@@ -9306,7 +9306,7 @@
           </p:sp>
           <p:sp>
             <p:nvSpPr>
-              <p:cNvPr id="130" name="矩形 129"/>
+              <p:cNvPr id="130" name="Rectangle 129"/>
               <p:cNvSpPr/>
               <p:nvPr/>
             </p:nvSpPr>
@@ -9354,7 +9354,7 @@
           </p:sp>
           <p:sp>
             <p:nvSpPr>
-              <p:cNvPr id="131" name="矩形 130"/>
+              <p:cNvPr id="131" name="Rectangle 130"/>
               <p:cNvSpPr/>
               <p:nvPr/>
             </p:nvSpPr>
@@ -9402,7 +9402,7 @@
           </p:sp>
           <p:sp>
             <p:nvSpPr>
-              <p:cNvPr id="132" name="矩形 131"/>
+              <p:cNvPr id="132" name="Rectangle 131"/>
               <p:cNvSpPr/>
               <p:nvPr/>
             </p:nvSpPr>
@@ -9450,7 +9450,7 @@
           </p:sp>
           <p:sp>
             <p:nvSpPr>
-              <p:cNvPr id="133" name="矩形 132"/>
+              <p:cNvPr id="133" name="Rectangle 132"/>
               <p:cNvSpPr/>
               <p:nvPr/>
             </p:nvSpPr>
@@ -9498,7 +9498,7 @@
           </p:sp>
           <p:sp>
             <p:nvSpPr>
-              <p:cNvPr id="134" name="矩形 133"/>
+              <p:cNvPr id="134" name="Rectangle 133"/>
               <p:cNvSpPr/>
               <p:nvPr/>
             </p:nvSpPr>
@@ -9546,7 +9546,7 @@
           </p:sp>
           <p:sp>
             <p:nvSpPr>
-              <p:cNvPr id="135" name="矩形 134"/>
+              <p:cNvPr id="135" name="Rectangle 134"/>
               <p:cNvSpPr/>
               <p:nvPr/>
             </p:nvSpPr>
@@ -9594,7 +9594,7 @@
           </p:sp>
           <p:sp>
             <p:nvSpPr>
-              <p:cNvPr id="136" name="矩形 135"/>
+              <p:cNvPr id="136" name="Rectangle 135"/>
               <p:cNvSpPr/>
               <p:nvPr/>
             </p:nvSpPr>
@@ -9642,7 +9642,7 @@
           </p:sp>
           <p:sp>
             <p:nvSpPr>
-              <p:cNvPr id="137" name="矩形 136"/>
+              <p:cNvPr id="137" name="Rectangle 136"/>
               <p:cNvSpPr/>
               <p:nvPr/>
             </p:nvSpPr>
@@ -9690,7 +9690,7 @@
           </p:sp>
           <p:sp>
             <p:nvSpPr>
-              <p:cNvPr id="138" name="矩形 137"/>
+              <p:cNvPr id="138" name="Rectangle 137"/>
               <p:cNvSpPr/>
               <p:nvPr/>
             </p:nvSpPr>
@@ -9738,7 +9738,7 @@
           </p:sp>
           <p:sp>
             <p:nvSpPr>
-              <p:cNvPr id="139" name="矩形 138"/>
+              <p:cNvPr id="139" name="Rectangle 138"/>
               <p:cNvSpPr/>
               <p:nvPr/>
             </p:nvSpPr>
@@ -9786,7 +9786,7 @@
           </p:sp>
           <p:sp>
             <p:nvSpPr>
-              <p:cNvPr id="140" name="矩形 139"/>
+              <p:cNvPr id="140" name="Rectangle 139"/>
               <p:cNvSpPr/>
               <p:nvPr/>
             </p:nvSpPr>
@@ -9834,7 +9834,7 @@
           </p:sp>
           <p:sp>
             <p:nvSpPr>
-              <p:cNvPr id="141" name="矩形 140"/>
+              <p:cNvPr id="141" name="Rectangle 140"/>
               <p:cNvSpPr/>
               <p:nvPr/>
             </p:nvSpPr>
@@ -9882,7 +9882,7 @@
           </p:sp>
           <p:sp>
             <p:nvSpPr>
-              <p:cNvPr id="142" name="矩形 141"/>
+              <p:cNvPr id="142" name="Rectangle 141"/>
               <p:cNvSpPr/>
               <p:nvPr/>
             </p:nvSpPr>
@@ -9930,7 +9930,7 @@
           </p:sp>
           <p:sp>
             <p:nvSpPr>
-              <p:cNvPr id="143" name="矩形 142"/>
+              <p:cNvPr id="143" name="Rectangle 142"/>
               <p:cNvSpPr/>
               <p:nvPr/>
             </p:nvSpPr>
@@ -9978,7 +9978,7 @@
           </p:sp>
           <p:sp>
             <p:nvSpPr>
-              <p:cNvPr id="144" name="矩形 143"/>
+              <p:cNvPr id="144" name="Rectangle 143"/>
               <p:cNvSpPr/>
               <p:nvPr/>
             </p:nvSpPr>
@@ -10026,7 +10026,7 @@
           </p:sp>
           <p:sp>
             <p:nvSpPr>
-              <p:cNvPr id="145" name="矩形 144"/>
+              <p:cNvPr id="145" name="Rectangle 144"/>
               <p:cNvSpPr/>
               <p:nvPr/>
             </p:nvSpPr>
@@ -10074,7 +10074,7 @@
           </p:sp>
           <p:sp>
             <p:nvSpPr>
-              <p:cNvPr id="146" name="矩形 145"/>
+              <p:cNvPr id="146" name="Rectangle 145"/>
               <p:cNvSpPr/>
               <p:nvPr/>
             </p:nvSpPr>
@@ -10122,7 +10122,7 @@
           </p:sp>
           <p:sp>
             <p:nvSpPr>
-              <p:cNvPr id="147" name="矩形 146"/>
+              <p:cNvPr id="147" name="Rectangle 146"/>
               <p:cNvSpPr/>
               <p:nvPr/>
             </p:nvSpPr>
@@ -10170,7 +10170,7 @@
           </p:sp>
           <p:sp>
             <p:nvSpPr>
-              <p:cNvPr id="148" name="矩形 147"/>
+              <p:cNvPr id="148" name="Rectangle 147"/>
               <p:cNvSpPr/>
               <p:nvPr/>
             </p:nvSpPr>
@@ -10218,7 +10218,7 @@
           </p:sp>
           <p:sp>
             <p:nvSpPr>
-              <p:cNvPr id="149" name="矩形 148"/>
+              <p:cNvPr id="149" name="Rectangle 148"/>
               <p:cNvSpPr/>
               <p:nvPr/>
             </p:nvSpPr>
@@ -10266,7 +10266,7 @@
           </p:sp>
           <p:sp>
             <p:nvSpPr>
-              <p:cNvPr id="150" name="矩形 149"/>
+              <p:cNvPr id="150" name="Rectangle 149"/>
               <p:cNvSpPr/>
               <p:nvPr/>
             </p:nvSpPr>
@@ -10314,7 +10314,7 @@
           </p:sp>
           <p:sp>
             <p:nvSpPr>
-              <p:cNvPr id="168" name="矩形 167"/>
+              <p:cNvPr id="168" name="Rectangle 167"/>
               <p:cNvSpPr/>
               <p:nvPr/>
             </p:nvSpPr>
@@ -10362,7 +10362,7 @@
           </p:sp>
           <p:sp>
             <p:nvSpPr>
-              <p:cNvPr id="169" name="矩形 168"/>
+              <p:cNvPr id="169" name="Rectangle 168"/>
               <p:cNvSpPr/>
               <p:nvPr/>
             </p:nvSpPr>
@@ -10410,7 +10410,7 @@
           </p:sp>
           <p:sp>
             <p:nvSpPr>
-              <p:cNvPr id="170" name="矩形 169"/>
+              <p:cNvPr id="170" name="Rectangle 169"/>
               <p:cNvSpPr/>
               <p:nvPr/>
             </p:nvSpPr>
@@ -10458,7 +10458,7 @@
           </p:sp>
           <p:sp>
             <p:nvSpPr>
-              <p:cNvPr id="171" name="矩形 170"/>
+              <p:cNvPr id="171" name="Rectangle 170"/>
               <p:cNvSpPr/>
               <p:nvPr/>
             </p:nvSpPr>
@@ -10506,7 +10506,7 @@
           </p:sp>
           <p:sp>
             <p:nvSpPr>
-              <p:cNvPr id="172" name="矩形 171"/>
+              <p:cNvPr id="172" name="Rectangle 171"/>
               <p:cNvSpPr/>
               <p:nvPr/>
             </p:nvSpPr>
@@ -10554,7 +10554,7 @@
           </p:sp>
           <p:sp>
             <p:nvSpPr>
-              <p:cNvPr id="173" name="矩形 172"/>
+              <p:cNvPr id="173" name="Rectangle 172"/>
               <p:cNvSpPr/>
               <p:nvPr/>
             </p:nvSpPr>
@@ -10602,7 +10602,7 @@
           </p:sp>
           <p:sp>
             <p:nvSpPr>
-              <p:cNvPr id="174" name="文本框 173"/>
+              <p:cNvPr id="174" name="Text Box 173"/>
               <p:cNvSpPr txBox="1"/>
               <p:nvPr/>
             </p:nvSpPr>
@@ -10631,7 +10631,7 @@
           </p:sp>
           <p:sp>
             <p:nvSpPr>
-              <p:cNvPr id="175" name="文本框 174"/>
+              <p:cNvPr id="175" name="Text Box 174"/>
               <p:cNvSpPr txBox="1"/>
               <p:nvPr/>
             </p:nvSpPr>
@@ -10660,7 +10660,7 @@
           </p:sp>
           <p:sp>
             <p:nvSpPr>
-              <p:cNvPr id="176" name="文本框 175"/>
+              <p:cNvPr id="176" name="Text Box 175"/>
               <p:cNvSpPr txBox="1"/>
               <p:nvPr/>
             </p:nvSpPr>
@@ -10689,7 +10689,7 @@
           </p:sp>
           <p:sp>
             <p:nvSpPr>
-              <p:cNvPr id="188" name="矩形 187"/>
+              <p:cNvPr id="188" name="Rectangle 187"/>
               <p:cNvSpPr/>
               <p:nvPr/>
             </p:nvSpPr>
@@ -10745,7 +10745,7 @@
           </p:sp>
           <p:sp>
             <p:nvSpPr>
-              <p:cNvPr id="179" name="文本框 178"/>
+              <p:cNvPr id="179" name="Text Box 178"/>
               <p:cNvSpPr txBox="1"/>
               <p:nvPr/>
             </p:nvSpPr>
@@ -10774,7 +10774,7 @@
           </p:sp>
           <p:sp>
             <p:nvSpPr>
-              <p:cNvPr id="194" name="文本框 193"/>
+              <p:cNvPr id="194" name="Text Box 193"/>
               <p:cNvSpPr txBox="1"/>
               <p:nvPr/>
             </p:nvSpPr>
@@ -10803,7 +10803,7 @@
           </p:sp>
           <p:sp>
             <p:nvSpPr>
-              <p:cNvPr id="196" name="文本框 195"/>
+              <p:cNvPr id="196" name="Text Box 195"/>
               <p:cNvSpPr txBox="1"/>
               <p:nvPr/>
             </p:nvSpPr>
@@ -10832,7 +10832,7 @@
           </p:sp>
           <p:sp>
             <p:nvSpPr>
-              <p:cNvPr id="197" name="文本框 196"/>
+              <p:cNvPr id="197" name="Text Box 196"/>
               <p:cNvSpPr txBox="1"/>
               <p:nvPr/>
             </p:nvSpPr>
@@ -10889,7 +10889,7 @@
           </p:sp>
           <p:sp>
             <p:nvSpPr>
-              <p:cNvPr id="203" name="下箭头 202"/>
+              <p:cNvPr id="203" name="Down Arrow 202"/>
               <p:cNvSpPr/>
               <p:nvPr>
                 <p:custDataLst>
@@ -10941,15 +10941,15 @@
               <a:p>
                 <a:pPr algn="ctr"/>
                 <a:endParaRPr lang="zh-CN" altLang="en-US" b="1">
-                  <a:latin typeface="微软雅黑" panose="020B0503020204020204" charset="-122"/>
-                  <a:ea typeface="微软雅黑" panose="020B0503020204020204" charset="-122"/>
+                  <a:latin typeface="Microsoft YaHei" panose="020B0503020204020204" charset="-122"/>
+                  <a:ea typeface="Microsoft YaHei" panose="020B0503020204020204" charset="-122"/>
                 </a:endParaRPr>
               </a:p>
             </p:txBody>
           </p:sp>
           <p:pic>
             <p:nvPicPr>
-              <p:cNvPr id="205" name="图形 28" descr="箭头: 向右旋转 纯色填充"/>
+              <p:cNvPr id="205" name="Shape 28" descr="Arrow: Right Rotation Solid Fill"/>
               <p:cNvPicPr>
                 <a:picLocks noChangeAspect="1"/>
               </p:cNvPicPr>
@@ -10989,7 +10989,7 @@
           </p:pic>
           <p:pic>
             <p:nvPicPr>
-              <p:cNvPr id="206" name="图形 28" descr="箭头: 向右旋转 纯色填充"/>
+              <p:cNvPr id="206" name="Shape 28" descr="Arrow: Right Rotation Solid Fill"/>
               <p:cNvPicPr>
                 <a:picLocks noChangeAspect="1"/>
               </p:cNvPicPr>
@@ -11029,7 +11029,7 @@
           </p:pic>
           <p:sp>
             <p:nvSpPr>
-              <p:cNvPr id="209" name="圆角矩形 208"/>
+              <p:cNvPr id="209" name="Rounded Rectangle 208"/>
               <p:cNvSpPr/>
               <p:nvPr/>
             </p:nvSpPr>
@@ -11087,7 +11087,7 @@
           </p:sp>
           <p:sp>
             <p:nvSpPr>
-              <p:cNvPr id="210" name="圆角矩形 209"/>
+              <p:cNvPr id="210" name="Rounded Rectangle 209"/>
               <p:cNvSpPr/>
               <p:nvPr/>
             </p:nvSpPr>
@@ -11145,7 +11145,7 @@
           </p:sp>
           <p:sp>
             <p:nvSpPr>
-              <p:cNvPr id="211" name="圆角矩形 210"/>
+              <p:cNvPr id="211" name="Rounded Rectangle 210"/>
               <p:cNvSpPr/>
               <p:nvPr/>
             </p:nvSpPr>
@@ -11193,7 +11193,7 @@
           </p:sp>
           <p:sp>
             <p:nvSpPr>
-              <p:cNvPr id="213" name="圆角矩形 212"/>
+              <p:cNvPr id="213" name="Rounded Rectangle 212"/>
               <p:cNvSpPr/>
               <p:nvPr/>
             </p:nvSpPr>
@@ -11241,7 +11241,7 @@
           </p:sp>
           <p:cxnSp>
             <p:nvCxnSpPr>
-              <p:cNvPr id="214" name="肘形连接符 213"/>
+              <p:cNvPr id="214" name="Elbow Connector 213"/>
               <p:cNvCxnSpPr>
                 <a:stCxn id="149" idx="2"/>
                 <a:endCxn id="211" idx="0"/>
@@ -11282,7 +11282,7 @@
           </p:cxnSp>
           <p:cxnSp>
             <p:nvCxnSpPr>
-              <p:cNvPr id="215" name="肘形连接符 214"/>
+              <p:cNvPr id="215" name="Elbow Connector 214"/>
               <p:cNvCxnSpPr/>
               <p:nvPr/>
             </p:nvCxnSpPr>
@@ -11320,7 +11320,7 @@
           </p:cxnSp>
           <p:pic>
             <p:nvPicPr>
-              <p:cNvPr id="216" name="图片 215"/>
+              <p:cNvPr id="216" name="Picture 215"/>
               <p:cNvPicPr>
                 <a:picLocks noChangeAspect="1"/>
               </p:cNvPicPr>
@@ -11358,7 +11358,7 @@
           </p:pic>
           <p:grpSp>
             <p:nvGrpSpPr>
-              <p:cNvPr id="219" name="组合 218"/>
+              <p:cNvPr id="219" name="Group 218"/>
               <p:cNvGrpSpPr/>
               <p:nvPr/>
             </p:nvGrpSpPr>
@@ -11372,7 +11372,7 @@
             </p:grpSpPr>
             <p:pic>
               <p:nvPicPr>
-                <p:cNvPr id="217" name="图片 216" descr="加号-镂空"/>
+                <p:cNvPr id="217" name="Picture 216" descr="Plus Outline"/>
                 <p:cNvPicPr>
                   <a:picLocks noChangeAspect="1"/>
                 </p:cNvPicPr>
@@ -11406,7 +11406,7 @@
             </p:pic>
             <p:pic>
               <p:nvPicPr>
-                <p:cNvPr id="218" name="图片 217"/>
+                <p:cNvPr id="218" name="Picture 217"/>
                 <p:cNvPicPr>
                   <a:picLocks noChangeAspect="1"/>
                 </p:cNvPicPr>
@@ -11445,7 +11445,7 @@
           </p:grpSp>
           <p:grpSp>
             <p:nvGrpSpPr>
-              <p:cNvPr id="220" name="组合 219"/>
+              <p:cNvPr id="220" name="Group 219"/>
               <p:cNvGrpSpPr/>
               <p:nvPr/>
             </p:nvGrpSpPr>
@@ -11459,7 +11459,7 @@
             </p:grpSpPr>
             <p:pic>
               <p:nvPicPr>
-                <p:cNvPr id="221" name="图片 220" descr="加号-镂空"/>
+                <p:cNvPr id="221" name="Picture 220" descr="Plus Outline"/>
                 <p:cNvPicPr>
                   <a:picLocks noChangeAspect="1"/>
                 </p:cNvPicPr>
@@ -11493,7 +11493,7 @@
             </p:pic>
             <p:pic>
               <p:nvPicPr>
-                <p:cNvPr id="222" name="图片 221"/>
+                <p:cNvPr id="222" name="Picture 221"/>
                 <p:cNvPicPr>
                   <a:picLocks noChangeAspect="1"/>
                 </p:cNvPicPr>
@@ -11532,7 +11532,7 @@
           </p:grpSp>
           <p:sp>
             <p:nvSpPr>
-              <p:cNvPr id="223" name="文本框 222"/>
+              <p:cNvPr id="223" name="Text Box 222"/>
               <p:cNvSpPr txBox="1"/>
               <p:nvPr/>
             </p:nvSpPr>
@@ -11599,7 +11599,7 @@
           </p:sp>
           <p:sp>
             <p:nvSpPr>
-              <p:cNvPr id="224" name="文本框 223"/>
+              <p:cNvPr id="224" name="Text Box 223"/>
               <p:cNvSpPr txBox="1"/>
               <p:nvPr/>
             </p:nvSpPr>
@@ -11671,7 +11671,7 @@
           </p:sp>
           <p:cxnSp>
             <p:nvCxnSpPr>
-              <p:cNvPr id="225" name="直接箭头连接符 224"/>
+              <p:cNvPr id="225" name="Straight Arrow Connector 224"/>
               <p:cNvCxnSpPr/>
               <p:nvPr/>
             </p:nvCxnSpPr>
@@ -11707,7 +11707,7 @@
           </p:cxnSp>
           <p:pic>
             <p:nvPicPr>
-              <p:cNvPr id="226" name="图片 225"/>
+              <p:cNvPr id="226" name="Picture 225"/>
               <p:cNvPicPr>
                 <a:picLocks noChangeAspect="1"/>
               </p:cNvPicPr>
@@ -11745,7 +11745,7 @@
           </p:pic>
           <p:cxnSp>
             <p:nvCxnSpPr>
-              <p:cNvPr id="227" name="直接箭头连接符 226"/>
+              <p:cNvPr id="227" name="Straight Arrow Connector 226"/>
               <p:cNvCxnSpPr/>
               <p:nvPr/>
             </p:nvCxnSpPr>
@@ -11781,7 +11781,7 @@
           </p:cxnSp>
           <p:cxnSp>
             <p:nvCxnSpPr>
-              <p:cNvPr id="228" name="直接箭头连接符 227"/>
+              <p:cNvPr id="228" name="Straight Arrow Connector 227"/>
               <p:cNvCxnSpPr>
                 <a:endCxn id="222" idx="2"/>
               </p:cNvCxnSpPr>
@@ -11819,7 +11819,7 @@
           </p:cxnSp>
           <p:sp>
             <p:nvSpPr>
-              <p:cNvPr id="392" name="文本框 391"/>
+              <p:cNvPr id="392" name="Text Box 391"/>
               <p:cNvSpPr txBox="1"/>
               <p:nvPr/>
             </p:nvSpPr>
@@ -11856,7 +11856,7 @@
           </p:sp>
           <p:sp>
             <p:nvSpPr>
-              <p:cNvPr id="394" name="圆角矩形 393"/>
+              <p:cNvPr id="394" name="Rounded Rectangle 393"/>
               <p:cNvSpPr/>
               <p:nvPr/>
             </p:nvSpPr>
@@ -11920,7 +11920,7 @@
           </p:sp>
           <p:sp>
             <p:nvSpPr>
-              <p:cNvPr id="397" name="文本框 396"/>
+              <p:cNvPr id="397" name="Text Box 396"/>
               <p:cNvSpPr txBox="1"/>
               <p:nvPr/>
             </p:nvSpPr>
@@ -11949,7 +11949,7 @@
           </p:sp>
           <p:grpSp>
             <p:nvGrpSpPr>
-              <p:cNvPr id="400" name="组合 399"/>
+              <p:cNvPr id="400" name="Group 399"/>
               <p:cNvGrpSpPr/>
               <p:nvPr/>
             </p:nvGrpSpPr>
@@ -11963,7 +11963,7 @@
             </p:grpSpPr>
             <p:grpSp>
               <p:nvGrpSpPr>
-                <p:cNvPr id="343" name="组合 342"/>
+                <p:cNvPr id="343" name="Group 342"/>
                 <p:cNvGrpSpPr/>
                 <p:nvPr/>
               </p:nvGrpSpPr>
@@ -11977,7 +11977,7 @@
               </p:grpSpPr>
               <p:sp>
                 <p:nvSpPr>
-                  <p:cNvPr id="340" name="圆角矩形 339"/>
+                  <p:cNvPr id="340" name="Rounded Rectangle 339"/>
                   <p:cNvSpPr/>
                   <p:nvPr/>
                 </p:nvSpPr>
@@ -12027,7 +12027,7 @@
               </p:sp>
               <p:grpSp>
                 <p:nvGrpSpPr>
-                  <p:cNvPr id="313" name="组合 312"/>
+                  <p:cNvPr id="313" name="Group 312"/>
                   <p:cNvGrpSpPr/>
                   <p:nvPr/>
                 </p:nvGrpSpPr>
@@ -12041,7 +12041,7 @@
                 </p:grpSpPr>
                 <p:sp>
                   <p:nvSpPr>
-                    <p:cNvPr id="311" name="圆角矩形 310"/>
+                    <p:cNvPr id="311" name="Rounded Rectangle 310"/>
                     <p:cNvSpPr/>
                     <p:nvPr/>
                   </p:nvSpPr>
@@ -12089,7 +12089,7 @@
                 </p:sp>
                 <p:sp>
                   <p:nvSpPr>
-                    <p:cNvPr id="312" name="文本框 311"/>
+                    <p:cNvPr id="312" name="Text Box 311"/>
                     <p:cNvSpPr txBox="1"/>
                     <p:nvPr/>
                   </p:nvSpPr>
@@ -12119,7 +12119,7 @@
               </p:grpSp>
               <p:grpSp>
                 <p:nvGrpSpPr>
-                  <p:cNvPr id="314" name="组合 313"/>
+                  <p:cNvPr id="314" name="Group 313"/>
                   <p:cNvGrpSpPr/>
                   <p:nvPr/>
                 </p:nvGrpSpPr>
@@ -12133,7 +12133,7 @@
                 </p:grpSpPr>
                 <p:sp>
                   <p:nvSpPr>
-                    <p:cNvPr id="315" name="圆角矩形 314"/>
+                    <p:cNvPr id="315" name="Rounded Rectangle 314"/>
                     <p:cNvSpPr/>
                     <p:nvPr/>
                   </p:nvSpPr>
@@ -12181,7 +12181,7 @@
                 </p:sp>
                 <p:sp>
                   <p:nvSpPr>
-                    <p:cNvPr id="316" name="文本框 315"/>
+                    <p:cNvPr id="316" name="Text Box 315"/>
                     <p:cNvSpPr txBox="1"/>
                     <p:nvPr/>
                   </p:nvSpPr>
@@ -12211,7 +12211,7 @@
               </p:grpSp>
               <p:pic>
                 <p:nvPicPr>
-                  <p:cNvPr id="326" name="图片 325" descr="双向箭头"/>
+                  <p:cNvPr id="326" name="Picture 325" descr="Double Arrow"/>
                   <p:cNvPicPr>
                     <a:picLocks noChangeAspect="1"/>
                   </p:cNvPicPr>
@@ -12245,7 +12245,7 @@
               </p:pic>
               <p:grpSp>
                 <p:nvGrpSpPr>
-                  <p:cNvPr id="327" name="组合 326"/>
+                  <p:cNvPr id="327" name="Group 326"/>
                   <p:cNvGrpSpPr/>
                   <p:nvPr/>
                 </p:nvGrpSpPr>
@@ -12259,7 +12259,7 @@
                 </p:grpSpPr>
                 <p:sp>
                   <p:nvSpPr>
-                    <p:cNvPr id="328" name="圆角矩形 327"/>
+                    <p:cNvPr id="328" name="Rounded Rectangle 327"/>
                     <p:cNvSpPr/>
                     <p:nvPr/>
                   </p:nvSpPr>
@@ -12307,7 +12307,7 @@
                 </p:sp>
                 <p:sp>
                   <p:nvSpPr>
-                    <p:cNvPr id="329" name="文本框 328"/>
+                    <p:cNvPr id="329" name="Text Box 328"/>
                     <p:cNvSpPr txBox="1"/>
                     <p:nvPr/>
                   </p:nvSpPr>
@@ -12337,7 +12337,7 @@
               </p:grpSp>
               <p:grpSp>
                 <p:nvGrpSpPr>
-                  <p:cNvPr id="330" name="组合 329"/>
+                  <p:cNvPr id="330" name="Group 329"/>
                   <p:cNvGrpSpPr/>
                   <p:nvPr/>
                 </p:nvGrpSpPr>
@@ -12351,7 +12351,7 @@
                 </p:grpSpPr>
                 <p:sp>
                   <p:nvSpPr>
-                    <p:cNvPr id="331" name="圆角矩形 330"/>
+                    <p:cNvPr id="331" name="Rounded Rectangle 330"/>
                     <p:cNvSpPr/>
                     <p:nvPr/>
                   </p:nvSpPr>
@@ -12399,7 +12399,7 @@
                 </p:sp>
                 <p:sp>
                   <p:nvSpPr>
-                    <p:cNvPr id="332" name="文本框 331"/>
+                    <p:cNvPr id="332" name="Text Box 331"/>
                     <p:cNvSpPr txBox="1"/>
                     <p:nvPr/>
                   </p:nvSpPr>
@@ -12429,7 +12429,7 @@
               </p:grpSp>
               <p:grpSp>
                 <p:nvGrpSpPr>
-                  <p:cNvPr id="333" name="组合 332"/>
+                  <p:cNvPr id="333" name="Group 332"/>
                   <p:cNvGrpSpPr/>
                   <p:nvPr/>
                 </p:nvGrpSpPr>
@@ -12443,7 +12443,7 @@
                 </p:grpSpPr>
                 <p:sp>
                   <p:nvSpPr>
-                    <p:cNvPr id="334" name="圆角矩形 333"/>
+                    <p:cNvPr id="334" name="Rounded Rectangle 333"/>
                     <p:cNvSpPr/>
                     <p:nvPr/>
                   </p:nvSpPr>
@@ -12491,7 +12491,7 @@
                 </p:sp>
                 <p:sp>
                   <p:nvSpPr>
-                    <p:cNvPr id="335" name="文本框 334"/>
+                    <p:cNvPr id="335" name="Text Box 334"/>
                     <p:cNvSpPr txBox="1"/>
                     <p:nvPr/>
                   </p:nvSpPr>
@@ -12521,7 +12521,7 @@
               </p:grpSp>
               <p:pic>
                 <p:nvPicPr>
-                  <p:cNvPr id="338" name="图片 337" descr="双向箭头"/>
+                  <p:cNvPr id="338" name="Picture 337" descr="Double Arrow"/>
                   <p:cNvPicPr>
                     <a:picLocks noChangeAspect="1"/>
                   </p:cNvPicPr>
@@ -12555,7 +12555,7 @@
               </p:pic>
               <p:pic>
                 <p:nvPicPr>
-                  <p:cNvPr id="339" name="图片 338" descr="双向箭头"/>
+                  <p:cNvPr id="339" name="Picture 338" descr="Double Arrow"/>
                   <p:cNvPicPr>
                     <a:picLocks noChangeAspect="1"/>
                   </p:cNvPicPr>
@@ -12589,7 +12589,7 @@
               </p:pic>
               <p:sp>
                 <p:nvSpPr>
-                  <p:cNvPr id="341" name="文本框 340"/>
+                  <p:cNvPr id="341" name="Text Box 340"/>
                   <p:cNvSpPr txBox="1"/>
                   <p:nvPr/>
                 </p:nvSpPr>
@@ -12619,7 +12619,7 @@
             </p:grpSp>
             <p:grpSp>
               <p:nvGrpSpPr>
-                <p:cNvPr id="310" name="组合 309"/>
+                <p:cNvPr id="310" name="Group 309"/>
                 <p:cNvGrpSpPr/>
                 <p:nvPr/>
               </p:nvGrpSpPr>
@@ -12633,7 +12633,7 @@
               </p:grpSpPr>
               <p:sp>
                 <p:nvSpPr>
-                  <p:cNvPr id="306" name="圆角矩形 305"/>
+                  <p:cNvPr id="306" name="Rounded Rectangle 305"/>
                   <p:cNvSpPr/>
                   <p:nvPr/>
                 </p:nvSpPr>
@@ -12683,7 +12683,7 @@
               </p:sp>
               <p:grpSp>
                 <p:nvGrpSpPr>
-                  <p:cNvPr id="307" name="组合 306"/>
+                  <p:cNvPr id="307" name="Group 306"/>
                   <p:cNvGrpSpPr/>
                   <p:nvPr/>
                 </p:nvGrpSpPr>
@@ -12697,7 +12697,7 @@
                 </p:grpSpPr>
                 <p:sp>
                   <p:nvSpPr>
-                    <p:cNvPr id="230" name="圆角矩形 229"/>
+                    <p:cNvPr id="230" name="Rounded Rectangle 229"/>
                     <p:cNvSpPr/>
                     <p:nvPr/>
                   </p:nvSpPr>
@@ -12749,7 +12749,7 @@
                 </p:sp>
                 <p:sp>
                   <p:nvSpPr>
-                    <p:cNvPr id="231" name="文本框 230"/>
+                    <p:cNvPr id="231" name="Text Box 230"/>
                     <p:cNvSpPr txBox="1"/>
                     <p:nvPr/>
                   </p:nvSpPr>
@@ -12782,7 +12782,7 @@
                 </p:sp>
                 <p:sp>
                   <p:nvSpPr>
-                    <p:cNvPr id="232" name="圆角矩形 231"/>
+                    <p:cNvPr id="232" name="Rounded Rectangle 231"/>
                     <p:cNvSpPr/>
                     <p:nvPr/>
                   </p:nvSpPr>
@@ -12834,7 +12834,7 @@
                 </p:sp>
                 <p:sp>
                   <p:nvSpPr>
-                    <p:cNvPr id="233" name="文本框 232"/>
+                    <p:cNvPr id="233" name="Text Box 232"/>
                     <p:cNvSpPr txBox="1"/>
                     <p:nvPr/>
                   </p:nvSpPr>
@@ -12867,7 +12867,7 @@
                 </p:sp>
                 <p:sp>
                   <p:nvSpPr>
-                    <p:cNvPr id="234" name="圆角矩形 233"/>
+                    <p:cNvPr id="234" name="Rounded Rectangle 233"/>
                     <p:cNvSpPr/>
                     <p:nvPr/>
                   </p:nvSpPr>
@@ -12919,7 +12919,7 @@
                 </p:sp>
                 <p:sp>
                   <p:nvSpPr>
-                    <p:cNvPr id="235" name="文本框 234"/>
+                    <p:cNvPr id="235" name="Text Box 234"/>
                     <p:cNvSpPr txBox="1"/>
                     <p:nvPr/>
                   </p:nvSpPr>
@@ -12952,7 +12952,7 @@
                 </p:sp>
                 <p:sp>
                   <p:nvSpPr>
-                    <p:cNvPr id="236" name="圆角矩形 235"/>
+                    <p:cNvPr id="236" name="Rounded Rectangle 235"/>
                     <p:cNvSpPr/>
                     <p:nvPr/>
                   </p:nvSpPr>
@@ -13004,7 +13004,7 @@
                 </p:sp>
                 <p:sp>
                   <p:nvSpPr>
-                    <p:cNvPr id="237" name="文本框 236"/>
+                    <p:cNvPr id="237" name="Text Box 236"/>
                     <p:cNvSpPr txBox="1"/>
                     <p:nvPr/>
                   </p:nvSpPr>
@@ -13037,7 +13037,7 @@
                 </p:sp>
                 <p:sp>
                   <p:nvSpPr>
-                    <p:cNvPr id="238" name="圆角矩形 237"/>
+                    <p:cNvPr id="238" name="Rounded Rectangle 237"/>
                     <p:cNvSpPr/>
                     <p:nvPr/>
                   </p:nvSpPr>
@@ -13089,7 +13089,7 @@
                 </p:sp>
                 <p:sp>
                   <p:nvSpPr>
-                    <p:cNvPr id="239" name="文本框 238"/>
+                    <p:cNvPr id="239" name="Text Box 238"/>
                     <p:cNvSpPr txBox="1"/>
                     <p:nvPr/>
                   </p:nvSpPr>
@@ -13122,7 +13122,7 @@
                 </p:sp>
                 <p:sp>
                   <p:nvSpPr>
-                    <p:cNvPr id="240" name="圆角矩形 239"/>
+                    <p:cNvPr id="240" name="Rounded Rectangle 239"/>
                     <p:cNvSpPr/>
                     <p:nvPr/>
                   </p:nvSpPr>
@@ -13174,7 +13174,7 @@
                 </p:sp>
                 <p:sp>
                   <p:nvSpPr>
-                    <p:cNvPr id="241" name="文本框 240"/>
+                    <p:cNvPr id="241" name="Text Box 240"/>
                     <p:cNvSpPr txBox="1"/>
                     <p:nvPr/>
                   </p:nvSpPr>
@@ -13207,7 +13207,7 @@
                 </p:sp>
                 <p:pic>
                   <p:nvPicPr>
-                    <p:cNvPr id="278" name="图片 277" descr="双向箭头"/>
+                    <p:cNvPr id="278" name="Picture 277" descr="Double Arrow"/>
                     <p:cNvPicPr>
                       <a:picLocks noChangeAspect="1"/>
                     </p:cNvPicPr>
@@ -13241,7 +13241,7 @@
                 </p:pic>
                 <p:pic>
                   <p:nvPicPr>
-                    <p:cNvPr id="279" name="图片 278" descr="双向箭头"/>
+                    <p:cNvPr id="279" name="Picture 278" descr="Double Arrow"/>
                     <p:cNvPicPr>
                       <a:picLocks noChangeAspect="1"/>
                     </p:cNvPicPr>
@@ -13275,7 +13275,7 @@
                 </p:pic>
                 <p:pic>
                   <p:nvPicPr>
-                    <p:cNvPr id="280" name="图片 279" descr="双向箭头"/>
+                    <p:cNvPr id="280" name="Picture 279" descr="Double Arrow"/>
                     <p:cNvPicPr>
                       <a:picLocks noChangeAspect="1"/>
                     </p:cNvPicPr>
@@ -13309,7 +13309,7 @@
                 </p:pic>
                 <p:sp>
                   <p:nvSpPr>
-                    <p:cNvPr id="281" name="圆角矩形 280"/>
+                    <p:cNvPr id="281" name="Rounded Rectangle 280"/>
                     <p:cNvSpPr/>
                     <p:nvPr/>
                   </p:nvSpPr>
@@ -13361,7 +13361,7 @@
                 </p:sp>
                 <p:sp>
                   <p:nvSpPr>
-                    <p:cNvPr id="282" name="文本框 281"/>
+                    <p:cNvPr id="282" name="Text Box 281"/>
                     <p:cNvSpPr txBox="1"/>
                     <p:nvPr/>
                   </p:nvSpPr>
@@ -13394,7 +13394,7 @@
                 </p:sp>
                 <p:sp>
                   <p:nvSpPr>
-                    <p:cNvPr id="283" name="圆角矩形 282"/>
+                    <p:cNvPr id="283" name="Rounded Rectangle 282"/>
                     <p:cNvSpPr/>
                     <p:nvPr/>
                   </p:nvSpPr>
@@ -13446,7 +13446,7 @@
                 </p:sp>
                 <p:sp>
                   <p:nvSpPr>
-                    <p:cNvPr id="284" name="文本框 283"/>
+                    <p:cNvPr id="284" name="Text Box 283"/>
                     <p:cNvSpPr txBox="1"/>
                     <p:nvPr/>
                   </p:nvSpPr>
@@ -13479,7 +13479,7 @@
                 </p:sp>
                 <p:sp>
                   <p:nvSpPr>
-                    <p:cNvPr id="285" name="圆角矩形 284"/>
+                    <p:cNvPr id="285" name="Rounded Rectangle 284"/>
                     <p:cNvSpPr/>
                     <p:nvPr/>
                   </p:nvSpPr>
@@ -13531,7 +13531,7 @@
                 </p:sp>
                 <p:sp>
                   <p:nvSpPr>
-                    <p:cNvPr id="286" name="文本框 285"/>
+                    <p:cNvPr id="286" name="Text Box 285"/>
                     <p:cNvSpPr txBox="1"/>
                     <p:nvPr/>
                   </p:nvSpPr>
@@ -13564,7 +13564,7 @@
                 </p:sp>
                 <p:sp>
                   <p:nvSpPr>
-                    <p:cNvPr id="287" name="圆角矩形 286"/>
+                    <p:cNvPr id="287" name="Rounded Rectangle 286"/>
                     <p:cNvSpPr/>
                     <p:nvPr/>
                   </p:nvSpPr>
@@ -13616,7 +13616,7 @@
                 </p:sp>
                 <p:sp>
                   <p:nvSpPr>
-                    <p:cNvPr id="288" name="文本框 287"/>
+                    <p:cNvPr id="288" name="Text Box 287"/>
                     <p:cNvSpPr txBox="1"/>
                     <p:nvPr/>
                   </p:nvSpPr>
@@ -13646,7 +13646,7 @@
                 </p:sp>
                 <p:sp>
                   <p:nvSpPr>
-                    <p:cNvPr id="289" name="圆角矩形 288"/>
+                    <p:cNvPr id="289" name="Rounded Rectangle 288"/>
                     <p:cNvSpPr/>
                     <p:nvPr/>
                   </p:nvSpPr>
@@ -13698,7 +13698,7 @@
                 </p:sp>
                 <p:sp>
                   <p:nvSpPr>
-                    <p:cNvPr id="290" name="文本框 289"/>
+                    <p:cNvPr id="290" name="Text Box 289"/>
                     <p:cNvSpPr txBox="1"/>
                     <p:nvPr/>
                   </p:nvSpPr>
@@ -13728,7 +13728,7 @@
                 </p:sp>
                 <p:sp>
                   <p:nvSpPr>
-                    <p:cNvPr id="291" name="圆角矩形 290"/>
+                    <p:cNvPr id="291" name="Rounded Rectangle 290"/>
                     <p:cNvSpPr/>
                     <p:nvPr/>
                   </p:nvSpPr>
@@ -13780,7 +13780,7 @@
                 </p:sp>
                 <p:sp>
                   <p:nvSpPr>
-                    <p:cNvPr id="292" name="文本框 291"/>
+                    <p:cNvPr id="292" name="Text Box 291"/>
                     <p:cNvSpPr txBox="1"/>
                     <p:nvPr/>
                   </p:nvSpPr>
@@ -13810,7 +13810,7 @@
                 </p:sp>
                 <p:pic>
                   <p:nvPicPr>
-                    <p:cNvPr id="293" name="图片 292" descr="双向箭头"/>
+                    <p:cNvPr id="293" name="Picture 292" descr="Double Arrow"/>
                     <p:cNvPicPr>
                       <a:picLocks noChangeAspect="1"/>
                     </p:cNvPicPr>
@@ -13844,7 +13844,7 @@
                 </p:pic>
                 <p:pic>
                   <p:nvPicPr>
-                    <p:cNvPr id="294" name="图片 293" descr="双向箭头"/>
+                    <p:cNvPr id="294" name="Picture 293" descr="Double Arrow"/>
                     <p:cNvPicPr>
                       <a:picLocks noChangeAspect="1"/>
                     </p:cNvPicPr>
@@ -13878,7 +13878,7 @@
                 </p:pic>
                 <p:pic>
                   <p:nvPicPr>
-                    <p:cNvPr id="295" name="图片 294" descr="双向箭头"/>
+                    <p:cNvPr id="295" name="Picture 294" descr="Double Arrow"/>
                     <p:cNvPicPr>
                       <a:picLocks noChangeAspect="1"/>
                     </p:cNvPicPr>
@@ -13912,7 +13912,7 @@
                 </p:pic>
                 <p:pic>
                   <p:nvPicPr>
-                    <p:cNvPr id="297" name="图片 296" descr="双向箭头"/>
+                    <p:cNvPr id="297" name="Picture 296" descr="Double Arrow"/>
                     <p:cNvPicPr>
                       <a:picLocks noChangeAspect="1"/>
                     </p:cNvPicPr>
@@ -13946,7 +13946,7 @@
                 </p:pic>
                 <p:pic>
                   <p:nvPicPr>
-                    <p:cNvPr id="298" name="图片 297" descr="双向箭头"/>
+                    <p:cNvPr id="298" name="Picture 297" descr="Double Arrow"/>
                     <p:cNvPicPr>
                       <a:picLocks noChangeAspect="1"/>
                     </p:cNvPicPr>
@@ -13980,7 +13980,7 @@
                 </p:pic>
                 <p:pic>
                   <p:nvPicPr>
-                    <p:cNvPr id="299" name="图片 298" descr="双向箭头"/>
+                    <p:cNvPr id="299" name="Picture 298" descr="Double Arrow"/>
                     <p:cNvPicPr>
                       <a:picLocks noChangeAspect="1"/>
                     </p:cNvPicPr>
@@ -14014,7 +14014,7 @@
                 </p:pic>
                 <p:pic>
                   <p:nvPicPr>
-                    <p:cNvPr id="300" name="图片 299" descr="双向箭头"/>
+                    <p:cNvPr id="300" name="Picture 299" descr="Double Arrow"/>
                     <p:cNvPicPr>
                       <a:picLocks noChangeAspect="1"/>
                     </p:cNvPicPr>
@@ -14048,7 +14048,7 @@
                 </p:pic>
                 <p:pic>
                   <p:nvPicPr>
-                    <p:cNvPr id="301" name="图片 300" descr="双向箭头"/>
+                    <p:cNvPr id="301" name="Picture 300" descr="Double Arrow"/>
                     <p:cNvPicPr>
                       <a:picLocks noChangeAspect="1"/>
                     </p:cNvPicPr>
@@ -14082,7 +14082,7 @@
                 </p:pic>
                 <p:pic>
                   <p:nvPicPr>
-                    <p:cNvPr id="302" name="图片 301" descr="双向箭头"/>
+                    <p:cNvPr id="302" name="Picture 301" descr="Double Arrow"/>
                     <p:cNvPicPr>
                       <a:picLocks noChangeAspect="1"/>
                     </p:cNvPicPr>
@@ -14116,7 +14116,7 @@
                 </p:pic>
                 <p:sp>
                   <p:nvSpPr>
-                    <p:cNvPr id="303" name="文本框 302"/>
+                    <p:cNvPr id="303" name="Text Box 302"/>
                     <p:cNvSpPr txBox="1"/>
                     <p:nvPr/>
                   </p:nvSpPr>
@@ -14149,7 +14149,7 @@
                 </p:sp>
                 <p:sp>
                   <p:nvSpPr>
-                    <p:cNvPr id="304" name="文本框 303"/>
+                    <p:cNvPr id="304" name="Text Box 303"/>
                     <p:cNvSpPr txBox="1"/>
                     <p:nvPr/>
                   </p:nvSpPr>
@@ -14182,7 +14182,7 @@
                 </p:sp>
                 <p:sp>
                   <p:nvSpPr>
-                    <p:cNvPr id="305" name="文本框 304"/>
+                    <p:cNvPr id="305" name="Text Box 304"/>
                     <p:cNvSpPr txBox="1"/>
                     <p:nvPr/>
                   </p:nvSpPr>
@@ -14216,7 +14216,7 @@
               </p:grpSp>
               <p:sp>
                 <p:nvSpPr>
-                  <p:cNvPr id="309" name="文本框 308"/>
+                  <p:cNvPr id="309" name="Text Box 308"/>
                   <p:cNvSpPr txBox="1"/>
                   <p:nvPr/>
                 </p:nvSpPr>
@@ -14246,7 +14246,7 @@
             </p:grpSp>
             <p:grpSp>
               <p:nvGrpSpPr>
-                <p:cNvPr id="396" name="组合 395"/>
+                <p:cNvPr id="396" name="Group 395"/>
                 <p:cNvGrpSpPr/>
                 <p:nvPr/>
               </p:nvGrpSpPr>
@@ -14260,7 +14260,7 @@
               </p:grpSpPr>
               <p:grpSp>
                 <p:nvGrpSpPr>
-                  <p:cNvPr id="388" name="组合 387"/>
+                  <p:cNvPr id="388" name="Group 387"/>
                   <p:cNvGrpSpPr/>
                   <p:nvPr/>
                 </p:nvGrpSpPr>
@@ -14274,7 +14274,7 @@
                 </p:grpSpPr>
                 <p:grpSp>
                   <p:nvGrpSpPr>
-                    <p:cNvPr id="373" name="组合 372"/>
+                    <p:cNvPr id="373" name="Group 372"/>
                     <p:cNvGrpSpPr/>
                     <p:nvPr/>
                   </p:nvGrpSpPr>
@@ -14291,7 +14291,7 @@
                   </p:grpSpPr>
                   <p:sp>
                     <p:nvSpPr>
-                      <p:cNvPr id="374" name="矩形 373"/>
+                      <p:cNvPr id="374" name="Rectangle 373"/>
                       <p:cNvSpPr/>
                       <p:nvPr/>
                     </p:nvSpPr>
@@ -14337,7 +14337,7 @@
                   </p:sp>
                   <p:pic>
                     <p:nvPicPr>
-                      <p:cNvPr id="375" name="图片 374" descr="叉-镂空"/>
+                      <p:cNvPr id="375" name="Picture 374" descr="Cross Outline"/>
                       <p:cNvPicPr>
                         <a:picLocks noChangeAspect="1"/>
                       </p:cNvPicPr>
@@ -14367,7 +14367,7 @@
                 </p:grpSp>
                 <p:sp>
                   <p:nvSpPr>
-                    <p:cNvPr id="344" name="矩形 343"/>
+                    <p:cNvPr id="344" name="Rectangle 343"/>
                     <p:cNvSpPr/>
                     <p:nvPr/>
                   </p:nvSpPr>
@@ -14415,7 +14415,7 @@
                 </p:sp>
                 <p:pic>
                   <p:nvPicPr>
-                    <p:cNvPr id="345" name="图片 344" descr="勾-镂空"/>
+                    <p:cNvPr id="345" name="Picture 344" descr="Check Outline"/>
                     <p:cNvPicPr>
                       <a:picLocks noChangeAspect="1"/>
                     </p:cNvPicPr>
@@ -14449,7 +14449,7 @@
                 </p:pic>
                 <p:sp>
                   <p:nvSpPr>
-                    <p:cNvPr id="346" name="矩形 345"/>
+                    <p:cNvPr id="346" name="Rectangle 345"/>
                     <p:cNvSpPr/>
                     <p:nvPr/>
                   </p:nvSpPr>
@@ -14497,7 +14497,7 @@
                 </p:sp>
                 <p:pic>
                   <p:nvPicPr>
-                    <p:cNvPr id="347" name="图片 346" descr="勾-镂空"/>
+                    <p:cNvPr id="347" name="Picture 346" descr="Check Outline"/>
                     <p:cNvPicPr>
                       <a:picLocks noChangeAspect="1"/>
                     </p:cNvPicPr>
@@ -14531,7 +14531,7 @@
                 </p:pic>
                 <p:sp>
                   <p:nvSpPr>
-                    <p:cNvPr id="348" name="矩形 347"/>
+                    <p:cNvPr id="348" name="Rectangle 347"/>
                     <p:cNvSpPr/>
                     <p:nvPr/>
                   </p:nvSpPr>
@@ -14579,7 +14579,7 @@
                 </p:sp>
                 <p:pic>
                   <p:nvPicPr>
-                    <p:cNvPr id="349" name="图片 348" descr="勾-镂空"/>
+                    <p:cNvPr id="349" name="Picture 348" descr="Check Outline"/>
                     <p:cNvPicPr>
                       <a:picLocks noChangeAspect="1"/>
                     </p:cNvPicPr>
@@ -14613,7 +14613,7 @@
                 </p:pic>
                 <p:sp>
                   <p:nvSpPr>
-                    <p:cNvPr id="350" name="矩形 349"/>
+                    <p:cNvPr id="350" name="Rectangle 349"/>
                     <p:cNvSpPr/>
                     <p:nvPr/>
                   </p:nvSpPr>
@@ -14661,7 +14661,7 @@
                 </p:sp>
                 <p:pic>
                   <p:nvPicPr>
-                    <p:cNvPr id="351" name="图片 350" descr="勾-镂空"/>
+                    <p:cNvPr id="351" name="Picture 350" descr="Check Outline"/>
                     <p:cNvPicPr>
                       <a:picLocks noChangeAspect="1"/>
                     </p:cNvPicPr>
@@ -14695,7 +14695,7 @@
                 </p:pic>
                 <p:sp>
                   <p:nvSpPr>
-                    <p:cNvPr id="352" name="矩形 351"/>
+                    <p:cNvPr id="352" name="Rectangle 351"/>
                     <p:cNvSpPr/>
                     <p:nvPr/>
                   </p:nvSpPr>
@@ -14743,7 +14743,7 @@
                 </p:sp>
                 <p:pic>
                   <p:nvPicPr>
-                    <p:cNvPr id="353" name="图片 352" descr="勾-镂空"/>
+                    <p:cNvPr id="353" name="Picture 352" descr="Check Outline"/>
                     <p:cNvPicPr>
                       <a:picLocks noChangeAspect="1"/>
                     </p:cNvPicPr>
@@ -14777,7 +14777,7 @@
                 </p:pic>
                 <p:sp>
                   <p:nvSpPr>
-                    <p:cNvPr id="354" name="矩形 353"/>
+                    <p:cNvPr id="354" name="Rectangle 353"/>
                     <p:cNvSpPr/>
                     <p:nvPr/>
                   </p:nvSpPr>
@@ -14825,7 +14825,7 @@
                 </p:sp>
                 <p:pic>
                   <p:nvPicPr>
-                    <p:cNvPr id="355" name="图片 354" descr="勾-镂空"/>
+                    <p:cNvPr id="355" name="Picture 354" descr="Check Outline"/>
                     <p:cNvPicPr>
                       <a:picLocks noChangeAspect="1"/>
                     </p:cNvPicPr>
@@ -14859,7 +14859,7 @@
                 </p:pic>
                 <p:grpSp>
                   <p:nvGrpSpPr>
-                    <p:cNvPr id="369" name="组合 368"/>
+                    <p:cNvPr id="369" name="Group 368"/>
                     <p:cNvGrpSpPr/>
                     <p:nvPr/>
                   </p:nvGrpSpPr>
@@ -14873,7 +14873,7 @@
                   </p:grpSpPr>
                   <p:sp>
                     <p:nvSpPr>
-                      <p:cNvPr id="356" name="矩形 355"/>
+                      <p:cNvPr id="356" name="Rectangle 355"/>
                       <p:cNvSpPr/>
                       <p:nvPr/>
                     </p:nvSpPr>
@@ -14921,7 +14921,7 @@
                   </p:sp>
                   <p:pic>
                     <p:nvPicPr>
-                      <p:cNvPr id="362" name="图片 361" descr="叉-镂空"/>
+                      <p:cNvPr id="362" name="Picture 361" descr="Cross Outline"/>
                       <p:cNvPicPr>
                         <a:picLocks noChangeAspect="1"/>
                       </p:cNvPicPr>
@@ -14956,7 +14956,7 @@
                 </p:grpSp>
                 <p:pic>
                   <p:nvPicPr>
-                    <p:cNvPr id="384" name="图片 383" descr="叉-镂空"/>
+                    <p:cNvPr id="384" name="Picture 383" descr="Cross Outline"/>
                     <p:cNvPicPr>
                       <a:picLocks noChangeAspect="1"/>
                     </p:cNvPicPr>
@@ -14990,7 +14990,7 @@
                 </p:pic>
                 <p:grpSp>
                   <p:nvGrpSpPr>
-                    <p:cNvPr id="376" name="组合 375"/>
+                    <p:cNvPr id="376" name="Group 375"/>
                     <p:cNvGrpSpPr/>
                     <p:nvPr/>
                   </p:nvGrpSpPr>
@@ -15007,7 +15007,7 @@
                   </p:grpSpPr>
                   <p:sp>
                     <p:nvSpPr>
-                      <p:cNvPr id="377" name="矩形 376"/>
+                      <p:cNvPr id="377" name="Rectangle 376"/>
                       <p:cNvSpPr/>
                       <p:nvPr/>
                     </p:nvSpPr>
@@ -15053,7 +15053,7 @@
                   </p:sp>
                   <p:pic>
                     <p:nvPicPr>
-                      <p:cNvPr id="378" name="图片 377" descr="叉-镂空"/>
+                      <p:cNvPr id="378" name="Picture 377" descr="Cross Outline"/>
                       <p:cNvPicPr>
                         <a:picLocks noChangeAspect="1"/>
                       </p:cNvPicPr>
@@ -15083,7 +15083,7 @@
                 </p:grpSp>
                 <p:pic>
                   <p:nvPicPr>
-                    <p:cNvPr id="387" name="图片 386" descr="叉-镂空"/>
+                    <p:cNvPr id="387" name="Picture 386" descr="Cross Outline"/>
                     <p:cNvPicPr>
                       <a:picLocks noChangeAspect="1"/>
                     </p:cNvPicPr>
@@ -15118,7 +15118,7 @@
               </p:grpSp>
               <p:sp>
                 <p:nvSpPr>
-                  <p:cNvPr id="389" name="文本框 388"/>
+                  <p:cNvPr id="389" name="Text Box 388"/>
                   <p:cNvSpPr txBox="1"/>
                   <p:nvPr/>
                 </p:nvSpPr>
@@ -15147,7 +15147,7 @@
               </p:sp>
               <p:sp>
                 <p:nvSpPr>
-                  <p:cNvPr id="390" name="文本框 389"/>
+                  <p:cNvPr id="390" name="Text Box 389"/>
                   <p:cNvSpPr txBox="1"/>
                   <p:nvPr/>
                 </p:nvSpPr>
@@ -15176,7 +15176,7 @@
               </p:sp>
               <p:sp>
                 <p:nvSpPr>
-                  <p:cNvPr id="391" name="文本框 390"/>
+                  <p:cNvPr id="391" name="Text Box 390"/>
                   <p:cNvSpPr txBox="1"/>
                   <p:nvPr/>
                 </p:nvSpPr>
@@ -15206,7 +15206,7 @@
             </p:grpSp>
             <p:pic>
               <p:nvPicPr>
-                <p:cNvPr id="399" name="图片 398" descr="循环"/>
+                <p:cNvPr id="399" name="Picture 398" descr="Loop"/>
                 <p:cNvPicPr>
                   <a:picLocks noChangeAspect="1"/>
                 </p:cNvPicPr>
@@ -15241,7 +15241,7 @@
           </p:grpSp>
           <p:sp>
             <p:nvSpPr>
-              <p:cNvPr id="401" name="下箭头 400"/>
+              <p:cNvPr id="401" name="Down Arrow 400"/>
               <p:cNvSpPr/>
               <p:nvPr>
                 <p:custDataLst>
@@ -15293,15 +15293,15 @@
               <a:p>
                 <a:pPr algn="ctr"/>
                 <a:endParaRPr lang="zh-CN" altLang="en-US" b="1">
-                  <a:latin typeface="微软雅黑" panose="020B0503020204020204" charset="-122"/>
-                  <a:ea typeface="微软雅黑" panose="020B0503020204020204" charset="-122"/>
+                  <a:latin typeface="Microsoft YaHei" panose="020B0503020204020204" charset="-122"/>
+                  <a:ea typeface="Microsoft YaHei" panose="020B0503020204020204" charset="-122"/>
                 </a:endParaRPr>
               </a:p>
             </p:txBody>
           </p:sp>
           <p:sp>
             <p:nvSpPr>
-              <p:cNvPr id="402" name="圆角矩形 401"/>
+              <p:cNvPr id="402" name="Rounded Rectangle 401"/>
               <p:cNvSpPr/>
               <p:nvPr/>
             </p:nvSpPr>
@@ -15349,7 +15349,7 @@
           </p:sp>
           <p:sp>
             <p:nvSpPr>
-              <p:cNvPr id="404" name="文本框 403"/>
+              <p:cNvPr id="404" name="Text Box 403"/>
               <p:cNvSpPr txBox="1"/>
               <p:nvPr/>
             </p:nvSpPr>
@@ -15378,7 +15378,7 @@
           </p:sp>
           <p:grpSp>
             <p:nvGrpSpPr>
-              <p:cNvPr id="112" name="组合 111"/>
+              <p:cNvPr id="112" name="Group 111"/>
               <p:cNvGrpSpPr/>
               <p:nvPr/>
             </p:nvGrpSpPr>
@@ -15392,7 +15392,7 @@
             </p:grpSpPr>
             <p:sp>
               <p:nvSpPr>
-                <p:cNvPr id="2" name="圆角矩形 1"/>
+                <p:cNvPr id="2" name="Rounded Rectangle 1"/>
                 <p:cNvSpPr/>
                 <p:nvPr/>
               </p:nvSpPr>
@@ -15440,7 +15440,7 @@
             </p:sp>
             <p:sp>
               <p:nvSpPr>
-                <p:cNvPr id="27" name="文本框 26"/>
+                <p:cNvPr id="27" name="Text Box 26"/>
                 <p:cNvSpPr txBox="1"/>
                 <p:nvPr/>
               </p:nvSpPr>
@@ -15470,7 +15470,7 @@
           </p:grpSp>
           <p:grpSp>
             <p:nvGrpSpPr>
-              <p:cNvPr id="108" name="组合 107"/>
+              <p:cNvPr id="108" name="Group 107"/>
               <p:cNvGrpSpPr/>
               <p:nvPr/>
             </p:nvGrpSpPr>
@@ -15484,7 +15484,7 @@
             </p:grpSpPr>
             <p:sp>
               <p:nvSpPr>
-                <p:cNvPr id="102" name="圆角矩形 101"/>
+                <p:cNvPr id="102" name="Rounded Rectangle 101"/>
                 <p:cNvSpPr/>
                 <p:nvPr/>
               </p:nvSpPr>
@@ -15532,7 +15532,7 @@
             </p:sp>
             <p:sp>
               <p:nvSpPr>
-                <p:cNvPr id="103" name="文本框 102"/>
+                <p:cNvPr id="103" name="Text Box 102"/>
                 <p:cNvSpPr txBox="1"/>
                 <p:nvPr/>
               </p:nvSpPr>
@@ -15562,7 +15562,7 @@
           </p:grpSp>
           <p:pic>
             <p:nvPicPr>
-              <p:cNvPr id="116" name="图形 28" descr="箭头: 向右旋转 纯色填充"/>
+              <p:cNvPr id="116" name="Shape 28" descr="Arrow: Right Rotation Solid Fill"/>
               <p:cNvPicPr>
                 <a:picLocks noChangeAspect="1"/>
               </p:cNvPicPr>
@@ -15602,7 +15602,7 @@
           </p:pic>
           <p:pic>
             <p:nvPicPr>
-              <p:cNvPr id="117" name="图形 28" descr="箭头: 向右旋转 纯色填充"/>
+              <p:cNvPr id="117" name="Shape 28" descr="Arrow: Right Rotation Solid Fill"/>
               <p:cNvPicPr>
                 <a:picLocks noChangeAspect="1"/>
               </p:cNvPicPr>
@@ -15643,7 +15643,7 @@
         </p:grpSp>
         <p:sp>
           <p:nvSpPr>
-            <p:cNvPr id="182" name="文本框 181"/>
+            <p:cNvPr id="182" name="Text Box 181"/>
             <p:cNvSpPr txBox="1"/>
             <p:nvPr/>
           </p:nvSpPr>
@@ -15679,7 +15679,7 @@
         </p:sp>
         <p:sp>
           <p:nvSpPr>
-            <p:cNvPr id="183" name="文本框 182"/>
+            <p:cNvPr id="183" name="Text Box 182"/>
             <p:cNvSpPr txBox="1"/>
             <p:nvPr/>
           </p:nvSpPr>
@@ -15736,7 +15736,7 @@
         </p:sp>
         <p:sp>
           <p:nvSpPr>
-            <p:cNvPr id="185" name="文本框 184"/>
+            <p:cNvPr id="185" name="Text Box 184"/>
             <p:cNvSpPr txBox="1"/>
             <p:nvPr/>
           </p:nvSpPr>
@@ -15793,7 +15793,7 @@
         </p:sp>
         <p:sp>
           <p:nvSpPr>
-            <p:cNvPr id="186" name="文本框 185"/>
+            <p:cNvPr id="186" name="Text Box 185"/>
             <p:cNvSpPr txBox="1"/>
             <p:nvPr/>
           </p:nvSpPr>
@@ -15850,7 +15850,7 @@
         </p:sp>
         <p:sp>
           <p:nvSpPr>
-            <p:cNvPr id="190" name="矩形 189"/>
+            <p:cNvPr id="190" name="Rectangle 189"/>
             <p:cNvSpPr/>
             <p:nvPr/>
           </p:nvSpPr>
@@ -15898,7 +15898,7 @@
         </p:sp>
         <p:sp>
           <p:nvSpPr>
-            <p:cNvPr id="187" name="文本框 186"/>
+            <p:cNvPr id="187" name="Text Box 186"/>
             <p:cNvSpPr txBox="1"/>
             <p:nvPr/>
           </p:nvSpPr>
@@ -15931,7 +15931,7 @@
         </p:sp>
         <p:sp>
           <p:nvSpPr>
-            <p:cNvPr id="115" name="文本框 114"/>
+            <p:cNvPr id="115" name="Text Box 114"/>
             <p:cNvSpPr txBox="1"/>
             <p:nvPr/>
           </p:nvSpPr>
@@ -15960,7 +15960,7 @@
         </p:sp>
         <p:pic>
           <p:nvPicPr>
-            <p:cNvPr id="152" name="图片 151"/>
+            <p:cNvPr id="152" name="Picture 151"/>
             <p:cNvPicPr>
               <a:picLocks noChangeAspect="1"/>
             </p:cNvPicPr>
@@ -15985,7 +15985,7 @@
         </p:pic>
         <p:pic>
           <p:nvPicPr>
-            <p:cNvPr id="153" name="图片 152"/>
+            <p:cNvPr id="153" name="Picture 152"/>
             <p:cNvPicPr>
               <a:picLocks noChangeAspect="1"/>
             </p:cNvPicPr>
@@ -16010,7 +16010,7 @@
         </p:pic>
         <p:sp>
           <p:nvSpPr>
-            <p:cNvPr id="198" name="文本框 197"/>
+            <p:cNvPr id="198" name="Text Box 197"/>
             <p:cNvSpPr txBox="1"/>
             <p:nvPr/>
           </p:nvSpPr>
@@ -16039,7 +16039,7 @@
         </p:sp>
         <p:sp>
           <p:nvSpPr>
-            <p:cNvPr id="199" name="文本框 198"/>
+            <p:cNvPr id="199" name="Text Box 198"/>
             <p:cNvSpPr txBox="1"/>
             <p:nvPr/>
           </p:nvSpPr>
@@ -16074,7 +16074,7 @@
         </p:sp>
         <p:sp>
           <p:nvSpPr>
-            <p:cNvPr id="200" name="文本框 199"/>
+            <p:cNvPr id="200" name="Text Box 199"/>
             <p:cNvSpPr txBox="1"/>
             <p:nvPr/>
           </p:nvSpPr>
@@ -16103,7 +16103,7 @@
         </p:sp>
         <p:pic>
           <p:nvPicPr>
-            <p:cNvPr id="202" name="图片 201" descr="正态分布"/>
+            <p:cNvPr id="202" name="Picture 201" descr="Normal Distribution"/>
             <p:cNvPicPr>
               <a:picLocks noChangeAspect="1"/>
             </p:cNvPicPr>
@@ -16144,7 +16144,7 @@
         </p:pic>
         <p:pic>
           <p:nvPicPr>
-            <p:cNvPr id="204" name="图片 203" descr="点状图"/>
+            <p:cNvPr id="204" name="Picture 203" descr="Dot Plot"/>
             <p:cNvPicPr>
               <a:picLocks noChangeAspect="1"/>
             </p:cNvPicPr>
@@ -16185,7 +16185,7 @@
         </p:pic>
         <p:sp>
           <p:nvSpPr>
-            <p:cNvPr id="207" name="文本框 206"/>
+            <p:cNvPr id="207" name="Text Box 206"/>
             <p:cNvSpPr txBox="1"/>
             <p:nvPr/>
           </p:nvSpPr>
@@ -16236,7 +16236,7 @@
         </p:sp>
         <p:cxnSp>
           <p:nvCxnSpPr>
-            <p:cNvPr id="212" name="直接箭头连接符 211"/>
+            <p:cNvPr id="212" name="Straight Arrow Connector 211"/>
             <p:cNvCxnSpPr/>
             <p:nvPr/>
           </p:nvCxnSpPr>
@@ -16272,7 +16272,7 @@
         </p:cxnSp>
         <p:cxnSp>
           <p:nvCxnSpPr>
-            <p:cNvPr id="229" name="直接箭头连接符 228"/>
+            <p:cNvPr id="229" name="Straight Arrow Connector 228"/>
             <p:cNvCxnSpPr/>
             <p:nvPr/>
           </p:nvCxnSpPr>
@@ -16337,7 +16337,7 @@
       </p:grpSpPr>
       <p:grpSp>
         <p:nvGrpSpPr>
-          <p:cNvPr id="242" name="组合 241"/>
+          <p:cNvPr id="242" name="Group 241"/>
           <p:cNvGrpSpPr/>
           <p:nvPr/>
         </p:nvGrpSpPr>
@@ -16351,7 +16351,7 @@
         </p:grpSpPr>
         <p:sp>
           <p:nvSpPr>
-            <p:cNvPr id="118" name="矩形 117"/>
+            <p:cNvPr id="118" name="Rectangle 117"/>
             <p:cNvSpPr/>
             <p:nvPr/>
           </p:nvSpPr>
@@ -16408,7 +16408,7 @@
         </p:sp>
         <p:sp>
           <p:nvSpPr>
-            <p:cNvPr id="164" name="矩形 163"/>
+            <p:cNvPr id="164" name="Rectangle 163"/>
             <p:cNvSpPr/>
             <p:nvPr/>
           </p:nvSpPr>
@@ -16454,7 +16454,7 @@
         </p:sp>
         <p:grpSp>
           <p:nvGrpSpPr>
-            <p:cNvPr id="163" name="组合 162"/>
+            <p:cNvPr id="163" name="Group 162"/>
             <p:cNvGrpSpPr/>
             <p:nvPr/>
           </p:nvGrpSpPr>
@@ -16468,7 +16468,7 @@
           </p:grpSpPr>
           <p:grpSp>
             <p:nvGrpSpPr>
-              <p:cNvPr id="28" name="组合 27"/>
+              <p:cNvPr id="28" name="Group 27"/>
               <p:cNvGrpSpPr/>
               <p:nvPr/>
             </p:nvGrpSpPr>
@@ -16482,7 +16482,7 @@
             </p:grpSpPr>
             <p:sp>
               <p:nvSpPr>
-                <p:cNvPr id="26" name="圆角矩形 25"/>
+                <p:cNvPr id="26" name="Rounded Rectangle 25"/>
                 <p:cNvSpPr/>
                 <p:nvPr/>
               </p:nvSpPr>
@@ -16532,7 +16532,7 @@
             </p:sp>
             <p:sp>
               <p:nvSpPr>
-                <p:cNvPr id="3" name="矩形 2"/>
+                <p:cNvPr id="3" name="Rectangle 2"/>
                 <p:cNvSpPr/>
                 <p:nvPr/>
               </p:nvSpPr>
@@ -16580,7 +16580,7 @@
             </p:sp>
             <p:sp>
               <p:nvSpPr>
-                <p:cNvPr id="4" name="矩形 3"/>
+                <p:cNvPr id="4" name="Rectangle 3"/>
                 <p:cNvSpPr/>
                 <p:nvPr/>
               </p:nvSpPr>
@@ -16628,7 +16628,7 @@
             </p:sp>
             <p:sp>
               <p:nvSpPr>
-                <p:cNvPr id="6" name="矩形 5"/>
+                <p:cNvPr id="6" name="Rectangle 5"/>
                 <p:cNvSpPr/>
                 <p:nvPr/>
               </p:nvSpPr>
@@ -16676,7 +16676,7 @@
             </p:sp>
             <p:sp>
               <p:nvSpPr>
-                <p:cNvPr id="7" name="矩形 6"/>
+                <p:cNvPr id="7" name="Rectangle 6"/>
                 <p:cNvSpPr/>
                 <p:nvPr/>
               </p:nvSpPr>
@@ -16724,7 +16724,7 @@
             </p:sp>
             <p:sp>
               <p:nvSpPr>
-                <p:cNvPr id="8" name="矩形 7"/>
+                <p:cNvPr id="8" name="Rectangle 7"/>
                 <p:cNvSpPr/>
                 <p:nvPr/>
               </p:nvSpPr>
@@ -16772,7 +16772,7 @@
             </p:sp>
             <p:sp>
               <p:nvSpPr>
-                <p:cNvPr id="9" name="矩形 8"/>
+                <p:cNvPr id="9" name="Rectangle 8"/>
                 <p:cNvSpPr/>
                 <p:nvPr/>
               </p:nvSpPr>
@@ -16820,7 +16820,7 @@
             </p:sp>
             <p:sp>
               <p:nvSpPr>
-                <p:cNvPr id="10" name="矩形 9"/>
+                <p:cNvPr id="10" name="Rectangle 9"/>
                 <p:cNvSpPr/>
                 <p:nvPr/>
               </p:nvSpPr>
@@ -16868,7 +16868,7 @@
             </p:sp>
             <p:sp>
               <p:nvSpPr>
-                <p:cNvPr id="11" name="矩形 10"/>
+                <p:cNvPr id="11" name="Rectangle 10"/>
                 <p:cNvSpPr/>
                 <p:nvPr/>
               </p:nvSpPr>
@@ -16916,7 +16916,7 @@
             </p:sp>
             <p:sp>
               <p:nvSpPr>
-                <p:cNvPr id="12" name="矩形 11"/>
+                <p:cNvPr id="12" name="Rectangle 11"/>
                 <p:cNvSpPr/>
                 <p:nvPr/>
               </p:nvSpPr>
@@ -16964,7 +16964,7 @@
             </p:sp>
             <p:sp>
               <p:nvSpPr>
-                <p:cNvPr id="13" name="矩形 12"/>
+                <p:cNvPr id="13" name="Rectangle 12"/>
                 <p:cNvSpPr/>
                 <p:nvPr/>
               </p:nvSpPr>
@@ -17012,7 +17012,7 @@
             </p:sp>
             <p:sp>
               <p:nvSpPr>
-                <p:cNvPr id="14" name="矩形 13"/>
+                <p:cNvPr id="14" name="Rectangle 13"/>
                 <p:cNvSpPr/>
                 <p:nvPr/>
               </p:nvSpPr>
@@ -17060,7 +17060,7 @@
             </p:sp>
             <p:sp>
               <p:nvSpPr>
-                <p:cNvPr id="15" name="矩形 14"/>
+                <p:cNvPr id="15" name="Rectangle 14"/>
                 <p:cNvSpPr/>
                 <p:nvPr/>
               </p:nvSpPr>
@@ -17108,7 +17108,7 @@
             </p:sp>
             <p:sp>
               <p:nvSpPr>
-                <p:cNvPr id="16" name="矩形 15"/>
+                <p:cNvPr id="16" name="Rectangle 15"/>
                 <p:cNvSpPr/>
                 <p:nvPr/>
               </p:nvSpPr>
@@ -17156,7 +17156,7 @@
             </p:sp>
             <p:sp>
               <p:nvSpPr>
-                <p:cNvPr id="17" name="矩形 16"/>
+                <p:cNvPr id="17" name="Rectangle 16"/>
                 <p:cNvSpPr/>
                 <p:nvPr/>
               </p:nvSpPr>
@@ -17204,7 +17204,7 @@
             </p:sp>
             <p:sp>
               <p:nvSpPr>
-                <p:cNvPr id="18" name="矩形 17"/>
+                <p:cNvPr id="18" name="Rectangle 17"/>
                 <p:cNvSpPr/>
                 <p:nvPr/>
               </p:nvSpPr>
@@ -17252,7 +17252,7 @@
             </p:sp>
             <p:sp>
               <p:nvSpPr>
-                <p:cNvPr id="19" name="矩形 18"/>
+                <p:cNvPr id="19" name="Rectangle 18"/>
                 <p:cNvSpPr/>
                 <p:nvPr/>
               </p:nvSpPr>
@@ -17300,7 +17300,7 @@
             </p:sp>
             <p:sp>
               <p:nvSpPr>
-                <p:cNvPr id="20" name="矩形 19"/>
+                <p:cNvPr id="20" name="Rectangle 19"/>
                 <p:cNvSpPr/>
                 <p:nvPr/>
               </p:nvSpPr>
@@ -17348,7 +17348,7 @@
             </p:sp>
             <p:sp>
               <p:nvSpPr>
-                <p:cNvPr id="21" name="矩形 20"/>
+                <p:cNvPr id="21" name="Rectangle 20"/>
                 <p:cNvSpPr/>
                 <p:nvPr/>
               </p:nvSpPr>
@@ -17396,7 +17396,7 @@
             </p:sp>
             <p:sp>
               <p:nvSpPr>
-                <p:cNvPr id="22" name="矩形 21"/>
+                <p:cNvPr id="22" name="Rectangle 21"/>
                 <p:cNvSpPr/>
                 <p:nvPr/>
               </p:nvSpPr>
@@ -17444,7 +17444,7 @@
             </p:sp>
             <p:sp>
               <p:nvSpPr>
-                <p:cNvPr id="23" name="矩形 22"/>
+                <p:cNvPr id="23" name="Rectangle 22"/>
                 <p:cNvSpPr/>
                 <p:nvPr/>
               </p:nvSpPr>
@@ -17492,7 +17492,7 @@
             </p:sp>
             <p:sp>
               <p:nvSpPr>
-                <p:cNvPr id="24" name="文本框 23"/>
+                <p:cNvPr id="24" name="Text Box 23"/>
                 <p:cNvSpPr txBox="1"/>
                 <p:nvPr/>
               </p:nvSpPr>
@@ -17525,7 +17525,7 @@
             </p:sp>
             <p:sp>
               <p:nvSpPr>
-                <p:cNvPr id="25" name="文本框 24"/>
+                <p:cNvPr id="25" name="Text Box 24"/>
                 <p:cNvSpPr txBox="1"/>
                 <p:nvPr/>
               </p:nvSpPr>
@@ -17555,7 +17555,7 @@
           </p:grpSp>
           <p:grpSp>
             <p:nvGrpSpPr>
-              <p:cNvPr id="29" name="组合 28"/>
+              <p:cNvPr id="29" name="Group 28"/>
               <p:cNvGrpSpPr/>
               <p:nvPr/>
             </p:nvGrpSpPr>
@@ -17569,7 +17569,7 @@
             </p:grpSpPr>
             <p:sp>
               <p:nvSpPr>
-                <p:cNvPr id="30" name="圆角矩形 29"/>
+                <p:cNvPr id="30" name="Rounded Rectangle 29"/>
                 <p:cNvSpPr/>
                 <p:nvPr/>
               </p:nvSpPr>
@@ -17619,7 +17619,7 @@
             </p:sp>
             <p:sp>
               <p:nvSpPr>
-                <p:cNvPr id="31" name="矩形 30"/>
+                <p:cNvPr id="31" name="Rectangle 30"/>
                 <p:cNvSpPr/>
                 <p:nvPr/>
               </p:nvSpPr>
@@ -17667,7 +17667,7 @@
             </p:sp>
             <p:sp>
               <p:nvSpPr>
-                <p:cNvPr id="32" name="矩形 31"/>
+                <p:cNvPr id="32" name="Rectangle 31"/>
                 <p:cNvSpPr/>
                 <p:nvPr/>
               </p:nvSpPr>
@@ -17715,7 +17715,7 @@
             </p:sp>
             <p:sp>
               <p:nvSpPr>
-                <p:cNvPr id="33" name="矩形 32"/>
+                <p:cNvPr id="33" name="Rectangle 32"/>
                 <p:cNvSpPr/>
                 <p:nvPr/>
               </p:nvSpPr>
@@ -17763,7 +17763,7 @@
             </p:sp>
             <p:sp>
               <p:nvSpPr>
-                <p:cNvPr id="34" name="矩形 33"/>
+                <p:cNvPr id="34" name="Rectangle 33"/>
                 <p:cNvSpPr/>
                 <p:nvPr/>
               </p:nvSpPr>
@@ -17811,7 +17811,7 @@
             </p:sp>
             <p:sp>
               <p:nvSpPr>
-                <p:cNvPr id="35" name="矩形 34"/>
+                <p:cNvPr id="35" name="Rectangle 34"/>
                 <p:cNvSpPr/>
                 <p:nvPr/>
               </p:nvSpPr>
@@ -17859,7 +17859,7 @@
             </p:sp>
             <p:sp>
               <p:nvSpPr>
-                <p:cNvPr id="36" name="矩形 35"/>
+                <p:cNvPr id="36" name="Rectangle 35"/>
                 <p:cNvSpPr/>
                 <p:nvPr/>
               </p:nvSpPr>
@@ -17907,7 +17907,7 @@
             </p:sp>
             <p:sp>
               <p:nvSpPr>
-                <p:cNvPr id="37" name="矩形 36"/>
+                <p:cNvPr id="37" name="Rectangle 36"/>
                 <p:cNvSpPr/>
                 <p:nvPr/>
               </p:nvSpPr>
@@ -17955,7 +17955,7 @@
             </p:sp>
             <p:sp>
               <p:nvSpPr>
-                <p:cNvPr id="38" name="矩形 37"/>
+                <p:cNvPr id="38" name="Rectangle 37"/>
                 <p:cNvSpPr/>
                 <p:nvPr/>
               </p:nvSpPr>
@@ -18003,7 +18003,7 @@
             </p:sp>
             <p:sp>
               <p:nvSpPr>
-                <p:cNvPr id="39" name="矩形 38"/>
+                <p:cNvPr id="39" name="Rectangle 38"/>
                 <p:cNvSpPr/>
                 <p:nvPr/>
               </p:nvSpPr>
@@ -18051,7 +18051,7 @@
             </p:sp>
             <p:sp>
               <p:nvSpPr>
-                <p:cNvPr id="40" name="矩形 39"/>
+                <p:cNvPr id="40" name="Rectangle 39"/>
                 <p:cNvSpPr/>
                 <p:nvPr/>
               </p:nvSpPr>
@@ -18099,7 +18099,7 @@
             </p:sp>
             <p:sp>
               <p:nvSpPr>
-                <p:cNvPr id="41" name="矩形 40"/>
+                <p:cNvPr id="41" name="Rectangle 40"/>
                 <p:cNvSpPr/>
                 <p:nvPr/>
               </p:nvSpPr>
@@ -18147,7 +18147,7 @@
             </p:sp>
             <p:sp>
               <p:nvSpPr>
-                <p:cNvPr id="42" name="矩形 41"/>
+                <p:cNvPr id="42" name="Rectangle 41"/>
                 <p:cNvSpPr/>
                 <p:nvPr/>
               </p:nvSpPr>
@@ -18195,7 +18195,7 @@
             </p:sp>
             <p:sp>
               <p:nvSpPr>
-                <p:cNvPr id="43" name="矩形 42"/>
+                <p:cNvPr id="43" name="Rectangle 42"/>
                 <p:cNvSpPr/>
                 <p:nvPr/>
               </p:nvSpPr>
@@ -18243,7 +18243,7 @@
             </p:sp>
             <p:sp>
               <p:nvSpPr>
-                <p:cNvPr id="44" name="矩形 43"/>
+                <p:cNvPr id="44" name="Rectangle 43"/>
                 <p:cNvSpPr/>
                 <p:nvPr/>
               </p:nvSpPr>
@@ -18291,7 +18291,7 @@
             </p:sp>
             <p:sp>
               <p:nvSpPr>
-                <p:cNvPr id="45" name="矩形 44"/>
+                <p:cNvPr id="45" name="Rectangle 44"/>
                 <p:cNvSpPr/>
                 <p:nvPr/>
               </p:nvSpPr>
@@ -18339,7 +18339,7 @@
             </p:sp>
             <p:sp>
               <p:nvSpPr>
-                <p:cNvPr id="46" name="矩形 45"/>
+                <p:cNvPr id="46" name="Rectangle 45"/>
                 <p:cNvSpPr/>
                 <p:nvPr/>
               </p:nvSpPr>
@@ -18387,7 +18387,7 @@
             </p:sp>
             <p:sp>
               <p:nvSpPr>
-                <p:cNvPr id="47" name="矩形 46"/>
+                <p:cNvPr id="47" name="Rectangle 46"/>
                 <p:cNvSpPr/>
                 <p:nvPr/>
               </p:nvSpPr>
@@ -18435,7 +18435,7 @@
             </p:sp>
             <p:sp>
               <p:nvSpPr>
-                <p:cNvPr id="48" name="矩形 47"/>
+                <p:cNvPr id="48" name="Rectangle 47"/>
                 <p:cNvSpPr/>
                 <p:nvPr/>
               </p:nvSpPr>
@@ -18483,7 +18483,7 @@
             </p:sp>
             <p:sp>
               <p:nvSpPr>
-                <p:cNvPr id="49" name="矩形 48"/>
+                <p:cNvPr id="49" name="Rectangle 48"/>
                 <p:cNvSpPr/>
                 <p:nvPr/>
               </p:nvSpPr>
@@ -18531,7 +18531,7 @@
             </p:sp>
             <p:sp>
               <p:nvSpPr>
-                <p:cNvPr id="50" name="矩形 49"/>
+                <p:cNvPr id="50" name="Rectangle 49"/>
                 <p:cNvSpPr/>
                 <p:nvPr/>
               </p:nvSpPr>
@@ -18579,7 +18579,7 @@
             </p:sp>
             <p:sp>
               <p:nvSpPr>
-                <p:cNvPr id="51" name="文本框 50"/>
+                <p:cNvPr id="51" name="Text Box 50"/>
                 <p:cNvSpPr txBox="1"/>
                 <p:nvPr/>
               </p:nvSpPr>
@@ -18612,7 +18612,7 @@
             </p:sp>
             <p:sp>
               <p:nvSpPr>
-                <p:cNvPr id="52" name="文本框 51"/>
+                <p:cNvPr id="52" name="Text Box 51"/>
                 <p:cNvSpPr txBox="1"/>
                 <p:nvPr/>
               </p:nvSpPr>
@@ -18642,7 +18642,7 @@
           </p:grpSp>
           <p:grpSp>
             <p:nvGrpSpPr>
-              <p:cNvPr id="53" name="组合 52"/>
+              <p:cNvPr id="53" name="Group 52"/>
               <p:cNvGrpSpPr/>
               <p:nvPr/>
             </p:nvGrpSpPr>
@@ -18656,7 +18656,7 @@
             </p:grpSpPr>
             <p:sp>
               <p:nvSpPr>
-                <p:cNvPr id="54" name="圆角矩形 53"/>
+                <p:cNvPr id="54" name="Rounded Rectangle 53"/>
                 <p:cNvSpPr/>
                 <p:nvPr/>
               </p:nvSpPr>
@@ -18706,7 +18706,7 @@
             </p:sp>
             <p:sp>
               <p:nvSpPr>
-                <p:cNvPr id="55" name="矩形 54"/>
+                <p:cNvPr id="55" name="Rectangle 54"/>
                 <p:cNvSpPr/>
                 <p:nvPr/>
               </p:nvSpPr>
@@ -18754,7 +18754,7 @@
             </p:sp>
             <p:sp>
               <p:nvSpPr>
-                <p:cNvPr id="56" name="矩形 55"/>
+                <p:cNvPr id="56" name="Rectangle 55"/>
                 <p:cNvSpPr/>
                 <p:nvPr/>
               </p:nvSpPr>
@@ -18802,7 +18802,7 @@
             </p:sp>
             <p:sp>
               <p:nvSpPr>
-                <p:cNvPr id="57" name="矩形 56"/>
+                <p:cNvPr id="57" name="Rectangle 56"/>
                 <p:cNvSpPr/>
                 <p:nvPr/>
               </p:nvSpPr>
@@ -18850,7 +18850,7 @@
             </p:sp>
             <p:sp>
               <p:nvSpPr>
-                <p:cNvPr id="58" name="矩形 57"/>
+                <p:cNvPr id="58" name="Rectangle 57"/>
                 <p:cNvSpPr/>
                 <p:nvPr/>
               </p:nvSpPr>
@@ -18898,7 +18898,7 @@
             </p:sp>
             <p:sp>
               <p:nvSpPr>
-                <p:cNvPr id="59" name="矩形 58"/>
+                <p:cNvPr id="59" name="Rectangle 58"/>
                 <p:cNvSpPr/>
                 <p:nvPr/>
               </p:nvSpPr>
@@ -18946,7 +18946,7 @@
             </p:sp>
             <p:sp>
               <p:nvSpPr>
-                <p:cNvPr id="60" name="矩形 59"/>
+                <p:cNvPr id="60" name="Rectangle 59"/>
                 <p:cNvSpPr/>
                 <p:nvPr/>
               </p:nvSpPr>
@@ -18994,7 +18994,7 @@
             </p:sp>
             <p:sp>
               <p:nvSpPr>
-                <p:cNvPr id="61" name="矩形 60"/>
+                <p:cNvPr id="61" name="Rectangle 60"/>
                 <p:cNvSpPr/>
                 <p:nvPr/>
               </p:nvSpPr>
@@ -19042,7 +19042,7 @@
             </p:sp>
             <p:sp>
               <p:nvSpPr>
-                <p:cNvPr id="62" name="矩形 61"/>
+                <p:cNvPr id="62" name="Rectangle 61"/>
                 <p:cNvSpPr/>
                 <p:nvPr/>
               </p:nvSpPr>
@@ -19090,7 +19090,7 @@
             </p:sp>
             <p:sp>
               <p:nvSpPr>
-                <p:cNvPr id="63" name="矩形 62"/>
+                <p:cNvPr id="63" name="Rectangle 62"/>
                 <p:cNvSpPr/>
                 <p:nvPr/>
               </p:nvSpPr>
@@ -19138,7 +19138,7 @@
             </p:sp>
             <p:sp>
               <p:nvSpPr>
-                <p:cNvPr id="64" name="矩形 63"/>
+                <p:cNvPr id="64" name="Rectangle 63"/>
                 <p:cNvSpPr/>
                 <p:nvPr/>
               </p:nvSpPr>
@@ -19186,7 +19186,7 @@
             </p:sp>
             <p:sp>
               <p:nvSpPr>
-                <p:cNvPr id="65" name="矩形 64"/>
+                <p:cNvPr id="65" name="Rectangle 64"/>
                 <p:cNvSpPr/>
                 <p:nvPr/>
               </p:nvSpPr>
@@ -19234,7 +19234,7 @@
             </p:sp>
             <p:sp>
               <p:nvSpPr>
-                <p:cNvPr id="66" name="矩形 65"/>
+                <p:cNvPr id="66" name="Rectangle 65"/>
                 <p:cNvSpPr/>
                 <p:nvPr/>
               </p:nvSpPr>
@@ -19282,7 +19282,7 @@
             </p:sp>
             <p:sp>
               <p:nvSpPr>
-                <p:cNvPr id="67" name="矩形 66"/>
+                <p:cNvPr id="67" name="Rectangle 66"/>
                 <p:cNvSpPr/>
                 <p:nvPr/>
               </p:nvSpPr>
@@ -19330,7 +19330,7 @@
             </p:sp>
             <p:sp>
               <p:nvSpPr>
-                <p:cNvPr id="68" name="矩形 67"/>
+                <p:cNvPr id="68" name="Rectangle 67"/>
                 <p:cNvSpPr/>
                 <p:nvPr/>
               </p:nvSpPr>
@@ -19378,7 +19378,7 @@
             </p:sp>
             <p:sp>
               <p:nvSpPr>
-                <p:cNvPr id="69" name="矩形 68"/>
+                <p:cNvPr id="69" name="Rectangle 68"/>
                 <p:cNvSpPr/>
                 <p:nvPr/>
               </p:nvSpPr>
@@ -19426,7 +19426,7 @@
             </p:sp>
             <p:sp>
               <p:nvSpPr>
-                <p:cNvPr id="70" name="矩形 69"/>
+                <p:cNvPr id="70" name="Rectangle 69"/>
                 <p:cNvSpPr/>
                 <p:nvPr/>
               </p:nvSpPr>
@@ -19474,7 +19474,7 @@
             </p:sp>
             <p:sp>
               <p:nvSpPr>
-                <p:cNvPr id="71" name="矩形 70"/>
+                <p:cNvPr id="71" name="Rectangle 70"/>
                 <p:cNvSpPr/>
                 <p:nvPr/>
               </p:nvSpPr>
@@ -19522,7 +19522,7 @@
             </p:sp>
             <p:sp>
               <p:nvSpPr>
-                <p:cNvPr id="72" name="矩形 71"/>
+                <p:cNvPr id="72" name="Rectangle 71"/>
                 <p:cNvSpPr/>
                 <p:nvPr/>
               </p:nvSpPr>
@@ -19570,7 +19570,7 @@
             </p:sp>
             <p:sp>
               <p:nvSpPr>
-                <p:cNvPr id="73" name="矩形 72"/>
+                <p:cNvPr id="73" name="Rectangle 72"/>
                 <p:cNvSpPr/>
                 <p:nvPr/>
               </p:nvSpPr>
@@ -19618,7 +19618,7 @@
             </p:sp>
             <p:sp>
               <p:nvSpPr>
-                <p:cNvPr id="74" name="矩形 73"/>
+                <p:cNvPr id="74" name="Rectangle 73"/>
                 <p:cNvSpPr/>
                 <p:nvPr/>
               </p:nvSpPr>
@@ -19666,7 +19666,7 @@
             </p:sp>
             <p:sp>
               <p:nvSpPr>
-                <p:cNvPr id="75" name="文本框 74"/>
+                <p:cNvPr id="75" name="Text Box 74"/>
                 <p:cNvSpPr txBox="1"/>
                 <p:nvPr/>
               </p:nvSpPr>
@@ -19699,7 +19699,7 @@
             </p:sp>
             <p:sp>
               <p:nvSpPr>
-                <p:cNvPr id="76" name="文本框 75"/>
+                <p:cNvPr id="76" name="Text Box 75"/>
                 <p:cNvSpPr txBox="1"/>
                 <p:nvPr/>
               </p:nvSpPr>
@@ -19729,7 +19729,7 @@
           </p:grpSp>
           <p:grpSp>
             <p:nvGrpSpPr>
-              <p:cNvPr id="77" name="组合 76"/>
+              <p:cNvPr id="77" name="Group 76"/>
               <p:cNvGrpSpPr/>
               <p:nvPr/>
             </p:nvGrpSpPr>
@@ -19743,7 +19743,7 @@
             </p:grpSpPr>
             <p:sp>
               <p:nvSpPr>
-                <p:cNvPr id="78" name="圆角矩形 77"/>
+                <p:cNvPr id="78" name="Rounded Rectangle 77"/>
                 <p:cNvSpPr/>
                 <p:nvPr/>
               </p:nvSpPr>
@@ -19793,7 +19793,7 @@
             </p:sp>
             <p:sp>
               <p:nvSpPr>
-                <p:cNvPr id="79" name="矩形 78"/>
+                <p:cNvPr id="79" name="Rectangle 78"/>
                 <p:cNvSpPr/>
                 <p:nvPr/>
               </p:nvSpPr>
@@ -19841,7 +19841,7 @@
             </p:sp>
             <p:sp>
               <p:nvSpPr>
-                <p:cNvPr id="80" name="矩形 79"/>
+                <p:cNvPr id="80" name="Rectangle 79"/>
                 <p:cNvSpPr/>
                 <p:nvPr/>
               </p:nvSpPr>
@@ -19889,7 +19889,7 @@
             </p:sp>
             <p:sp>
               <p:nvSpPr>
-                <p:cNvPr id="81" name="矩形 80"/>
+                <p:cNvPr id="81" name="Rectangle 80"/>
                 <p:cNvSpPr/>
                 <p:nvPr/>
               </p:nvSpPr>
@@ -19937,7 +19937,7 @@
             </p:sp>
             <p:sp>
               <p:nvSpPr>
-                <p:cNvPr id="82" name="矩形 81"/>
+                <p:cNvPr id="82" name="Rectangle 81"/>
                 <p:cNvSpPr/>
                 <p:nvPr/>
               </p:nvSpPr>
@@ -19985,7 +19985,7 @@
             </p:sp>
             <p:sp>
               <p:nvSpPr>
-                <p:cNvPr id="83" name="矩形 82"/>
+                <p:cNvPr id="83" name="Rectangle 82"/>
                 <p:cNvSpPr/>
                 <p:nvPr/>
               </p:nvSpPr>
@@ -20033,7 +20033,7 @@
             </p:sp>
             <p:sp>
               <p:nvSpPr>
-                <p:cNvPr id="84" name="矩形 83"/>
+                <p:cNvPr id="84" name="Rectangle 83"/>
                 <p:cNvSpPr/>
                 <p:nvPr/>
               </p:nvSpPr>
@@ -20081,7 +20081,7 @@
             </p:sp>
             <p:sp>
               <p:nvSpPr>
-                <p:cNvPr id="85" name="矩形 84"/>
+                <p:cNvPr id="85" name="Rectangle 84"/>
                 <p:cNvSpPr/>
                 <p:nvPr/>
               </p:nvSpPr>
@@ -20129,7 +20129,7 @@
             </p:sp>
             <p:sp>
               <p:nvSpPr>
-                <p:cNvPr id="86" name="矩形 85"/>
+                <p:cNvPr id="86" name="Rectangle 85"/>
                 <p:cNvSpPr/>
                 <p:nvPr/>
               </p:nvSpPr>
@@ -20177,7 +20177,7 @@
             </p:sp>
             <p:sp>
               <p:nvSpPr>
-                <p:cNvPr id="87" name="矩形 86"/>
+                <p:cNvPr id="87" name="Rectangle 86"/>
                 <p:cNvSpPr/>
                 <p:nvPr/>
               </p:nvSpPr>
@@ -20225,7 +20225,7 @@
             </p:sp>
             <p:sp>
               <p:nvSpPr>
-                <p:cNvPr id="88" name="矩形 87"/>
+                <p:cNvPr id="88" name="Rectangle 87"/>
                 <p:cNvSpPr/>
                 <p:nvPr/>
               </p:nvSpPr>
@@ -20273,7 +20273,7 @@
             </p:sp>
             <p:sp>
               <p:nvSpPr>
-                <p:cNvPr id="89" name="矩形 88"/>
+                <p:cNvPr id="89" name="Rectangle 88"/>
                 <p:cNvSpPr/>
                 <p:nvPr/>
               </p:nvSpPr>
@@ -20321,7 +20321,7 @@
             </p:sp>
             <p:sp>
               <p:nvSpPr>
-                <p:cNvPr id="90" name="矩形 89"/>
+                <p:cNvPr id="90" name="Rectangle 89"/>
                 <p:cNvSpPr/>
                 <p:nvPr/>
               </p:nvSpPr>
@@ -20369,7 +20369,7 @@
             </p:sp>
             <p:sp>
               <p:nvSpPr>
-                <p:cNvPr id="91" name="矩形 90"/>
+                <p:cNvPr id="91" name="Rectangle 90"/>
                 <p:cNvSpPr/>
                 <p:nvPr/>
               </p:nvSpPr>
@@ -20417,7 +20417,7 @@
             </p:sp>
             <p:sp>
               <p:nvSpPr>
-                <p:cNvPr id="92" name="矩形 91"/>
+                <p:cNvPr id="92" name="Rectangle 91"/>
                 <p:cNvSpPr/>
                 <p:nvPr/>
               </p:nvSpPr>
@@ -20465,7 +20465,7 @@
             </p:sp>
             <p:sp>
               <p:nvSpPr>
-                <p:cNvPr id="93" name="矩形 92"/>
+                <p:cNvPr id="93" name="Rectangle 92"/>
                 <p:cNvSpPr/>
                 <p:nvPr/>
               </p:nvSpPr>
@@ -20513,7 +20513,7 @@
             </p:sp>
             <p:sp>
               <p:nvSpPr>
-                <p:cNvPr id="94" name="矩形 93"/>
+                <p:cNvPr id="94" name="Rectangle 93"/>
                 <p:cNvSpPr/>
                 <p:nvPr/>
               </p:nvSpPr>
@@ -20561,7 +20561,7 @@
             </p:sp>
             <p:sp>
               <p:nvSpPr>
-                <p:cNvPr id="95" name="矩形 94"/>
+                <p:cNvPr id="95" name="Rectangle 94"/>
                 <p:cNvSpPr/>
                 <p:nvPr/>
               </p:nvSpPr>
@@ -20609,7 +20609,7 @@
             </p:sp>
             <p:sp>
               <p:nvSpPr>
-                <p:cNvPr id="96" name="矩形 95"/>
+                <p:cNvPr id="96" name="Rectangle 95"/>
                 <p:cNvSpPr/>
                 <p:nvPr/>
               </p:nvSpPr>
@@ -20657,7 +20657,7 @@
             </p:sp>
             <p:sp>
               <p:nvSpPr>
-                <p:cNvPr id="97" name="矩形 96"/>
+                <p:cNvPr id="97" name="Rectangle 96"/>
                 <p:cNvSpPr/>
                 <p:nvPr/>
               </p:nvSpPr>
@@ -20705,7 +20705,7 @@
             </p:sp>
             <p:sp>
               <p:nvSpPr>
-                <p:cNvPr id="98" name="矩形 97"/>
+                <p:cNvPr id="98" name="Rectangle 97"/>
                 <p:cNvSpPr/>
                 <p:nvPr/>
               </p:nvSpPr>
@@ -20753,7 +20753,7 @@
             </p:sp>
             <p:sp>
               <p:nvSpPr>
-                <p:cNvPr id="99" name="文本框 98"/>
+                <p:cNvPr id="99" name="Text Box 98"/>
                 <p:cNvSpPr txBox="1"/>
                 <p:nvPr/>
               </p:nvSpPr>
@@ -20786,7 +20786,7 @@
             </p:sp>
             <p:sp>
               <p:nvSpPr>
-                <p:cNvPr id="100" name="文本框 99"/>
+                <p:cNvPr id="100" name="Text Box 99"/>
                 <p:cNvSpPr txBox="1"/>
                 <p:nvPr/>
               </p:nvSpPr>
@@ -20824,7 +20824,7 @@
           </p:grpSp>
           <p:grpSp>
             <p:nvGrpSpPr>
-              <p:cNvPr id="107" name="组合 106"/>
+              <p:cNvPr id="107" name="Group 106"/>
               <p:cNvGrpSpPr/>
               <p:nvPr/>
             </p:nvGrpSpPr>
@@ -20838,7 +20838,7 @@
             </p:grpSpPr>
             <p:sp>
               <p:nvSpPr>
-                <p:cNvPr id="101" name="圆角矩形 100"/>
+                <p:cNvPr id="101" name="Rounded Rectangle 100"/>
                 <p:cNvSpPr/>
                 <p:nvPr/>
               </p:nvSpPr>
@@ -20890,7 +20890,7 @@
             </p:sp>
             <p:pic>
               <p:nvPicPr>
-                <p:cNvPr id="106" name="图片 105"/>
+                <p:cNvPr id="106" name="Picture 105"/>
                 <p:cNvPicPr>
                   <a:picLocks noChangeAspect="1"/>
                 </p:cNvPicPr>
@@ -20916,7 +20916,7 @@
           </p:grpSp>
           <p:sp>
             <p:nvSpPr>
-              <p:cNvPr id="120" name="文本框 119"/>
+              <p:cNvPr id="120" name="Text Box 119"/>
               <p:cNvSpPr txBox="1"/>
               <p:nvPr/>
             </p:nvSpPr>
@@ -20953,7 +20953,7 @@
           </p:sp>
           <p:sp>
             <p:nvSpPr>
-              <p:cNvPr id="123" name="下箭头 122"/>
+              <p:cNvPr id="123" name="Down Arrow 122"/>
               <p:cNvSpPr/>
               <p:nvPr>
                 <p:custDataLst>
@@ -21005,15 +21005,15 @@
               <a:p>
                 <a:pPr algn="ctr"/>
                 <a:endParaRPr lang="zh-CN" altLang="en-US" b="1">
-                  <a:latin typeface="微软雅黑" panose="020B0503020204020204" charset="-122"/>
-                  <a:ea typeface="微软雅黑" panose="020B0503020204020204" charset="-122"/>
+                  <a:latin typeface="Microsoft YaHei" panose="020B0503020204020204" charset="-122"/>
+                  <a:ea typeface="Microsoft YaHei" panose="020B0503020204020204" charset="-122"/>
                 </a:endParaRPr>
               </a:p>
             </p:txBody>
           </p:sp>
           <p:pic>
             <p:nvPicPr>
-              <p:cNvPr id="151" name="图片 150"/>
+              <p:cNvPr id="151" name="Picture 150"/>
               <p:cNvPicPr>
                 <a:picLocks noChangeAspect="1"/>
               </p:cNvPicPr>
@@ -21058,7 +21058,7 @@
           </p:pic>
           <p:cxnSp>
             <p:nvCxnSpPr>
-              <p:cNvPr id="154" name="肘形连接符 153"/>
+              <p:cNvPr id="154" name="Elbow Connector 153"/>
               <p:cNvCxnSpPr/>
               <p:nvPr/>
             </p:nvCxnSpPr>
@@ -21095,7 +21095,7 @@
           </p:cxnSp>
           <p:cxnSp>
             <p:nvCxnSpPr>
-              <p:cNvPr id="155" name="肘形连接符 154"/>
+              <p:cNvPr id="155" name="Elbow Connector 154"/>
               <p:cNvCxnSpPr/>
               <p:nvPr/>
             </p:nvCxnSpPr>
@@ -21132,7 +21132,7 @@
           </p:cxnSp>
           <p:cxnSp>
             <p:nvCxnSpPr>
-              <p:cNvPr id="157" name="肘形连接符 156"/>
+              <p:cNvPr id="157" name="Elbow Connector 156"/>
               <p:cNvCxnSpPr>
                 <a:endCxn id="101" idx="1"/>
               </p:cNvCxnSpPr>
@@ -21172,7 +21172,7 @@
           </p:cxnSp>
           <p:cxnSp>
             <p:nvCxnSpPr>
-              <p:cNvPr id="158" name="肘形连接符 157"/>
+              <p:cNvPr id="158" name="Elbow Connector 157"/>
               <p:cNvCxnSpPr/>
               <p:nvPr/>
             </p:nvCxnSpPr>
@@ -21210,7 +21210,7 @@
           </p:cxnSp>
           <p:cxnSp>
             <p:nvCxnSpPr>
-              <p:cNvPr id="159" name="直接箭头连接符 158"/>
+              <p:cNvPr id="159" name="Straight Arrow Connector 158"/>
               <p:cNvCxnSpPr>
                 <a:stCxn id="54" idx="2"/>
               </p:cNvCxnSpPr>
@@ -21248,7 +21248,7 @@
           </p:cxnSp>
           <p:cxnSp>
             <p:nvCxnSpPr>
-              <p:cNvPr id="160" name="直接箭头连接符 159"/>
+              <p:cNvPr id="160" name="Straight Arrow Connector 159"/>
               <p:cNvCxnSpPr/>
               <p:nvPr/>
             </p:nvCxnSpPr>
@@ -21284,7 +21284,7 @@
           </p:cxnSp>
           <p:cxnSp>
             <p:nvCxnSpPr>
-              <p:cNvPr id="161" name="直接箭头连接符 160"/>
+              <p:cNvPr id="161" name="Straight Arrow Connector 160"/>
               <p:cNvCxnSpPr/>
               <p:nvPr/>
             </p:nvCxnSpPr>
@@ -21321,7 +21321,7 @@
           </p:cxnSp>
           <p:cxnSp>
             <p:nvCxnSpPr>
-              <p:cNvPr id="162" name="直接箭头连接符 161"/>
+              <p:cNvPr id="162" name="Straight Arrow Connector 161"/>
               <p:cNvCxnSpPr/>
               <p:nvPr/>
             </p:nvCxnSpPr>
@@ -21359,7 +21359,7 @@
         </p:grpSp>
         <p:sp>
           <p:nvSpPr>
-            <p:cNvPr id="166" name="矩形 165"/>
+            <p:cNvPr id="166" name="Rectangle 165"/>
             <p:cNvSpPr/>
             <p:nvPr/>
           </p:nvSpPr>
@@ -21407,7 +21407,7 @@
         </p:sp>
         <p:grpSp>
           <p:nvGrpSpPr>
-            <p:cNvPr id="119" name="组合 118"/>
+            <p:cNvPr id="119" name="Group 118"/>
             <p:cNvGrpSpPr/>
             <p:nvPr/>
           </p:nvGrpSpPr>
@@ -21421,7 +21421,7 @@
           </p:grpSpPr>
           <p:sp>
             <p:nvSpPr>
-              <p:cNvPr id="395" name="圆角矩形 394"/>
+              <p:cNvPr id="395" name="Rounded Rectangle 394"/>
               <p:cNvSpPr/>
               <p:nvPr/>
             </p:nvSpPr>
@@ -21469,7 +21469,7 @@
           </p:sp>
           <p:sp>
             <p:nvSpPr>
-              <p:cNvPr id="191" name="圆角矩形 190"/>
+              <p:cNvPr id="191" name="Rounded Rectangle 190"/>
               <p:cNvSpPr/>
               <p:nvPr/>
             </p:nvSpPr>
@@ -21517,7 +21517,7 @@
           </p:sp>
           <p:sp>
             <p:nvSpPr>
-              <p:cNvPr id="208" name="圆角矩形 207"/>
+              <p:cNvPr id="208" name="Rounded Rectangle 207"/>
               <p:cNvSpPr/>
               <p:nvPr/>
             </p:nvSpPr>
@@ -21575,7 +21575,7 @@
           </p:sp>
           <p:sp>
             <p:nvSpPr>
-              <p:cNvPr id="193" name="圆角矩形 192"/>
+              <p:cNvPr id="193" name="Rounded Rectangle 192"/>
               <p:cNvSpPr/>
               <p:nvPr/>
             </p:nvSpPr>
@@ -21621,7 +21621,7 @@
           </p:sp>
           <p:sp>
             <p:nvSpPr>
-              <p:cNvPr id="192" name="圆角矩形 191"/>
+              <p:cNvPr id="192" name="Rounded Rectangle 191"/>
               <p:cNvSpPr/>
               <p:nvPr/>
             </p:nvSpPr>
@@ -21667,7 +21667,7 @@
           </p:sp>
           <p:sp>
             <p:nvSpPr>
-              <p:cNvPr id="128" name="矩形 127"/>
+              <p:cNvPr id="128" name="Rectangle 127"/>
               <p:cNvSpPr/>
               <p:nvPr/>
             </p:nvSpPr>
@@ -21715,7 +21715,7 @@
           </p:sp>
           <p:sp>
             <p:nvSpPr>
-              <p:cNvPr id="129" name="矩形 128"/>
+              <p:cNvPr id="129" name="Rectangle 128"/>
               <p:cNvSpPr/>
               <p:nvPr/>
             </p:nvSpPr>
@@ -21763,7 +21763,7 @@
           </p:sp>
           <p:sp>
             <p:nvSpPr>
-              <p:cNvPr id="130" name="矩形 129"/>
+              <p:cNvPr id="130" name="Rectangle 129"/>
               <p:cNvSpPr/>
               <p:nvPr/>
             </p:nvSpPr>
@@ -21811,7 +21811,7 @@
           </p:sp>
           <p:sp>
             <p:nvSpPr>
-              <p:cNvPr id="131" name="矩形 130"/>
+              <p:cNvPr id="131" name="Rectangle 130"/>
               <p:cNvSpPr/>
               <p:nvPr/>
             </p:nvSpPr>
@@ -21859,7 +21859,7 @@
           </p:sp>
           <p:sp>
             <p:nvSpPr>
-              <p:cNvPr id="132" name="矩形 131"/>
+              <p:cNvPr id="132" name="Rectangle 131"/>
               <p:cNvSpPr/>
               <p:nvPr/>
             </p:nvSpPr>
@@ -21907,7 +21907,7 @@
           </p:sp>
           <p:sp>
             <p:nvSpPr>
-              <p:cNvPr id="133" name="矩形 132"/>
+              <p:cNvPr id="133" name="Rectangle 132"/>
               <p:cNvSpPr/>
               <p:nvPr/>
             </p:nvSpPr>
@@ -21955,7 +21955,7 @@
           </p:sp>
           <p:sp>
             <p:nvSpPr>
-              <p:cNvPr id="134" name="矩形 133"/>
+              <p:cNvPr id="134" name="Rectangle 133"/>
               <p:cNvSpPr/>
               <p:nvPr/>
             </p:nvSpPr>
@@ -22003,7 +22003,7 @@
           </p:sp>
           <p:sp>
             <p:nvSpPr>
-              <p:cNvPr id="135" name="矩形 134"/>
+              <p:cNvPr id="135" name="Rectangle 134"/>
               <p:cNvSpPr/>
               <p:nvPr/>
             </p:nvSpPr>
@@ -22051,7 +22051,7 @@
           </p:sp>
           <p:sp>
             <p:nvSpPr>
-              <p:cNvPr id="136" name="矩形 135"/>
+              <p:cNvPr id="136" name="Rectangle 135"/>
               <p:cNvSpPr/>
               <p:nvPr/>
             </p:nvSpPr>
@@ -22099,7 +22099,7 @@
           </p:sp>
           <p:sp>
             <p:nvSpPr>
-              <p:cNvPr id="137" name="矩形 136"/>
+              <p:cNvPr id="137" name="Rectangle 136"/>
               <p:cNvSpPr/>
               <p:nvPr/>
             </p:nvSpPr>
@@ -22147,7 +22147,7 @@
           </p:sp>
           <p:sp>
             <p:nvSpPr>
-              <p:cNvPr id="138" name="矩形 137"/>
+              <p:cNvPr id="138" name="Rectangle 137"/>
               <p:cNvSpPr/>
               <p:nvPr/>
             </p:nvSpPr>
@@ -22195,7 +22195,7 @@
           </p:sp>
           <p:sp>
             <p:nvSpPr>
-              <p:cNvPr id="139" name="矩形 138"/>
+              <p:cNvPr id="139" name="Rectangle 138"/>
               <p:cNvSpPr/>
               <p:nvPr/>
             </p:nvSpPr>
@@ -22243,7 +22243,7 @@
           </p:sp>
           <p:sp>
             <p:nvSpPr>
-              <p:cNvPr id="140" name="矩形 139"/>
+              <p:cNvPr id="140" name="Rectangle 139"/>
               <p:cNvSpPr/>
               <p:nvPr/>
             </p:nvSpPr>
@@ -22291,7 +22291,7 @@
           </p:sp>
           <p:sp>
             <p:nvSpPr>
-              <p:cNvPr id="141" name="矩形 140"/>
+              <p:cNvPr id="141" name="Rectangle 140"/>
               <p:cNvSpPr/>
               <p:nvPr/>
             </p:nvSpPr>
@@ -22339,7 +22339,7 @@
           </p:sp>
           <p:sp>
             <p:nvSpPr>
-              <p:cNvPr id="142" name="矩形 141"/>
+              <p:cNvPr id="142" name="Rectangle 141"/>
               <p:cNvSpPr/>
               <p:nvPr/>
             </p:nvSpPr>
@@ -22387,7 +22387,7 @@
           </p:sp>
           <p:sp>
             <p:nvSpPr>
-              <p:cNvPr id="143" name="矩形 142"/>
+              <p:cNvPr id="143" name="Rectangle 142"/>
               <p:cNvSpPr/>
               <p:nvPr/>
             </p:nvSpPr>
@@ -22435,7 +22435,7 @@
           </p:sp>
           <p:sp>
             <p:nvSpPr>
-              <p:cNvPr id="144" name="矩形 143"/>
+              <p:cNvPr id="144" name="Rectangle 143"/>
               <p:cNvSpPr/>
               <p:nvPr/>
             </p:nvSpPr>
@@ -22483,7 +22483,7 @@
           </p:sp>
           <p:sp>
             <p:nvSpPr>
-              <p:cNvPr id="145" name="矩形 144"/>
+              <p:cNvPr id="145" name="Rectangle 144"/>
               <p:cNvSpPr/>
               <p:nvPr/>
             </p:nvSpPr>
@@ -22531,7 +22531,7 @@
           </p:sp>
           <p:sp>
             <p:nvSpPr>
-              <p:cNvPr id="146" name="矩形 145"/>
+              <p:cNvPr id="146" name="Rectangle 145"/>
               <p:cNvSpPr/>
               <p:nvPr/>
             </p:nvSpPr>
@@ -22579,7 +22579,7 @@
           </p:sp>
           <p:sp>
             <p:nvSpPr>
-              <p:cNvPr id="147" name="矩形 146"/>
+              <p:cNvPr id="147" name="Rectangle 146"/>
               <p:cNvSpPr/>
               <p:nvPr/>
             </p:nvSpPr>
@@ -22627,7 +22627,7 @@
           </p:sp>
           <p:sp>
             <p:nvSpPr>
-              <p:cNvPr id="148" name="矩形 147"/>
+              <p:cNvPr id="148" name="Rectangle 147"/>
               <p:cNvSpPr/>
               <p:nvPr/>
             </p:nvSpPr>
@@ -22675,7 +22675,7 @@
           </p:sp>
           <p:sp>
             <p:nvSpPr>
-              <p:cNvPr id="149" name="矩形 148"/>
+              <p:cNvPr id="149" name="Rectangle 148"/>
               <p:cNvSpPr/>
               <p:nvPr/>
             </p:nvSpPr>
@@ -22723,7 +22723,7 @@
           </p:sp>
           <p:sp>
             <p:nvSpPr>
-              <p:cNvPr id="150" name="矩形 149"/>
+              <p:cNvPr id="150" name="Rectangle 149"/>
               <p:cNvSpPr/>
               <p:nvPr/>
             </p:nvSpPr>
@@ -22771,7 +22771,7 @@
           </p:sp>
           <p:sp>
             <p:nvSpPr>
-              <p:cNvPr id="168" name="矩形 167"/>
+              <p:cNvPr id="168" name="Rectangle 167"/>
               <p:cNvSpPr/>
               <p:nvPr/>
             </p:nvSpPr>
@@ -22819,7 +22819,7 @@
           </p:sp>
           <p:sp>
             <p:nvSpPr>
-              <p:cNvPr id="169" name="矩形 168"/>
+              <p:cNvPr id="169" name="Rectangle 168"/>
               <p:cNvSpPr/>
               <p:nvPr/>
             </p:nvSpPr>
@@ -22867,7 +22867,7 @@
           </p:sp>
           <p:sp>
             <p:nvSpPr>
-              <p:cNvPr id="170" name="矩形 169"/>
+              <p:cNvPr id="170" name="Rectangle 169"/>
               <p:cNvSpPr/>
               <p:nvPr/>
             </p:nvSpPr>
@@ -22915,7 +22915,7 @@
           </p:sp>
           <p:sp>
             <p:nvSpPr>
-              <p:cNvPr id="171" name="矩形 170"/>
+              <p:cNvPr id="171" name="Rectangle 170"/>
               <p:cNvSpPr/>
               <p:nvPr/>
             </p:nvSpPr>
@@ -22963,7 +22963,7 @@
           </p:sp>
           <p:sp>
             <p:nvSpPr>
-              <p:cNvPr id="172" name="矩形 171"/>
+              <p:cNvPr id="172" name="Rectangle 171"/>
               <p:cNvSpPr/>
               <p:nvPr/>
             </p:nvSpPr>
@@ -23011,7 +23011,7 @@
           </p:sp>
           <p:sp>
             <p:nvSpPr>
-              <p:cNvPr id="173" name="矩形 172"/>
+              <p:cNvPr id="173" name="Rectangle 172"/>
               <p:cNvSpPr/>
               <p:nvPr/>
             </p:nvSpPr>
@@ -23059,7 +23059,7 @@
           </p:sp>
           <p:sp>
             <p:nvSpPr>
-              <p:cNvPr id="174" name="文本框 173"/>
+              <p:cNvPr id="174" name="Text Box 173"/>
               <p:cNvSpPr txBox="1"/>
               <p:nvPr/>
             </p:nvSpPr>
@@ -23088,7 +23088,7 @@
           </p:sp>
           <p:sp>
             <p:nvSpPr>
-              <p:cNvPr id="175" name="文本框 174"/>
+              <p:cNvPr id="175" name="Text Box 174"/>
               <p:cNvSpPr txBox="1"/>
               <p:nvPr/>
             </p:nvSpPr>
@@ -23117,7 +23117,7 @@
           </p:sp>
           <p:sp>
             <p:nvSpPr>
-              <p:cNvPr id="176" name="文本框 175"/>
+              <p:cNvPr id="176" name="Text Box 175"/>
               <p:cNvSpPr txBox="1"/>
               <p:nvPr/>
             </p:nvSpPr>
@@ -23146,7 +23146,7 @@
           </p:sp>
           <p:sp>
             <p:nvSpPr>
-              <p:cNvPr id="188" name="矩形 187"/>
+              <p:cNvPr id="188" name="Rectangle 187"/>
               <p:cNvSpPr/>
               <p:nvPr/>
             </p:nvSpPr>
@@ -23202,7 +23202,7 @@
           </p:sp>
           <p:sp>
             <p:nvSpPr>
-              <p:cNvPr id="179" name="文本框 178"/>
+              <p:cNvPr id="179" name="Text Box 178"/>
               <p:cNvSpPr txBox="1"/>
               <p:nvPr/>
             </p:nvSpPr>
@@ -23231,7 +23231,7 @@
           </p:sp>
           <p:sp>
             <p:nvSpPr>
-              <p:cNvPr id="194" name="文本框 193"/>
+              <p:cNvPr id="194" name="Text Box 193"/>
               <p:cNvSpPr txBox="1"/>
               <p:nvPr/>
             </p:nvSpPr>
@@ -23260,7 +23260,7 @@
           </p:sp>
           <p:sp>
             <p:nvSpPr>
-              <p:cNvPr id="196" name="文本框 195"/>
+              <p:cNvPr id="196" name="Text Box 195"/>
               <p:cNvSpPr txBox="1"/>
               <p:nvPr/>
             </p:nvSpPr>
@@ -23289,7 +23289,7 @@
           </p:sp>
           <p:sp>
             <p:nvSpPr>
-              <p:cNvPr id="197" name="文本框 196"/>
+              <p:cNvPr id="197" name="Text Box 196"/>
               <p:cNvSpPr txBox="1"/>
               <p:nvPr/>
             </p:nvSpPr>
@@ -23346,7 +23346,7 @@
           </p:sp>
           <p:sp>
             <p:nvSpPr>
-              <p:cNvPr id="203" name="下箭头 202"/>
+              <p:cNvPr id="203" name="Down Arrow 202"/>
               <p:cNvSpPr/>
               <p:nvPr>
                 <p:custDataLst>
@@ -23398,15 +23398,15 @@
               <a:p>
                 <a:pPr algn="ctr"/>
                 <a:endParaRPr lang="zh-CN" altLang="en-US" b="1">
-                  <a:latin typeface="微软雅黑" panose="020B0503020204020204" charset="-122"/>
-                  <a:ea typeface="微软雅黑" panose="020B0503020204020204" charset="-122"/>
+                  <a:latin typeface="Microsoft YaHei" panose="020B0503020204020204" charset="-122"/>
+                  <a:ea typeface="Microsoft YaHei" panose="020B0503020204020204" charset="-122"/>
                 </a:endParaRPr>
               </a:p>
             </p:txBody>
           </p:sp>
           <p:pic>
             <p:nvPicPr>
-              <p:cNvPr id="205" name="图形 28" descr="箭头: 向右旋转 纯色填充"/>
+              <p:cNvPr id="205" name="Shape 28" descr="Arrow: Right Rotation Solid Fill"/>
               <p:cNvPicPr>
                 <a:picLocks noChangeAspect="1"/>
               </p:cNvPicPr>
@@ -23446,7 +23446,7 @@
           </p:pic>
           <p:pic>
             <p:nvPicPr>
-              <p:cNvPr id="206" name="图形 28" descr="箭头: 向右旋转 纯色填充"/>
+              <p:cNvPr id="206" name="Shape 28" descr="Arrow: Right Rotation Solid Fill"/>
               <p:cNvPicPr>
                 <a:picLocks noChangeAspect="1"/>
               </p:cNvPicPr>
@@ -23486,7 +23486,7 @@
           </p:pic>
           <p:sp>
             <p:nvSpPr>
-              <p:cNvPr id="209" name="圆角矩形 208"/>
+              <p:cNvPr id="209" name="Rounded Rectangle 208"/>
               <p:cNvSpPr/>
               <p:nvPr/>
             </p:nvSpPr>
@@ -23544,7 +23544,7 @@
           </p:sp>
           <p:sp>
             <p:nvSpPr>
-              <p:cNvPr id="210" name="圆角矩形 209"/>
+              <p:cNvPr id="210" name="Rounded Rectangle 209"/>
               <p:cNvSpPr/>
               <p:nvPr/>
             </p:nvSpPr>
@@ -23602,7 +23602,7 @@
           </p:sp>
           <p:sp>
             <p:nvSpPr>
-              <p:cNvPr id="211" name="圆角矩形 210"/>
+              <p:cNvPr id="211" name="Rounded Rectangle 210"/>
               <p:cNvSpPr/>
               <p:nvPr/>
             </p:nvSpPr>
@@ -23650,7 +23650,7 @@
           </p:sp>
           <p:sp>
             <p:nvSpPr>
-              <p:cNvPr id="213" name="圆角矩形 212"/>
+              <p:cNvPr id="213" name="Rounded Rectangle 212"/>
               <p:cNvSpPr/>
               <p:nvPr/>
             </p:nvSpPr>
@@ -23698,7 +23698,7 @@
           </p:sp>
           <p:cxnSp>
             <p:nvCxnSpPr>
-              <p:cNvPr id="214" name="肘形连接符 213"/>
+              <p:cNvPr id="214" name="Elbow Connector 213"/>
               <p:cNvCxnSpPr>
                 <a:stCxn id="149" idx="2"/>
                 <a:endCxn id="211" idx="0"/>
@@ -23739,7 +23739,7 @@
           </p:cxnSp>
           <p:cxnSp>
             <p:nvCxnSpPr>
-              <p:cNvPr id="215" name="肘形连接符 214"/>
+              <p:cNvPr id="215" name="Elbow Connector 214"/>
               <p:cNvCxnSpPr/>
               <p:nvPr/>
             </p:nvCxnSpPr>
@@ -23777,7 +23777,7 @@
           </p:cxnSp>
           <p:pic>
             <p:nvPicPr>
-              <p:cNvPr id="216" name="图片 215"/>
+              <p:cNvPr id="216" name="Picture 215"/>
               <p:cNvPicPr>
                 <a:picLocks noChangeAspect="1"/>
               </p:cNvPicPr>
@@ -23815,7 +23815,7 @@
           </p:pic>
           <p:grpSp>
             <p:nvGrpSpPr>
-              <p:cNvPr id="219" name="组合 218"/>
+              <p:cNvPr id="219" name="Group 218"/>
               <p:cNvGrpSpPr/>
               <p:nvPr/>
             </p:nvGrpSpPr>
@@ -23829,7 +23829,7 @@
             </p:grpSpPr>
             <p:pic>
               <p:nvPicPr>
-                <p:cNvPr id="217" name="图片 216" descr="加号-镂空"/>
+                <p:cNvPr id="217" name="Picture 216" descr="Plus Outline"/>
                 <p:cNvPicPr>
                   <a:picLocks noChangeAspect="1"/>
                 </p:cNvPicPr>
@@ -23863,7 +23863,7 @@
             </p:pic>
             <p:pic>
               <p:nvPicPr>
-                <p:cNvPr id="218" name="图片 217"/>
+                <p:cNvPr id="218" name="Picture 217"/>
                 <p:cNvPicPr>
                   <a:picLocks noChangeAspect="1"/>
                 </p:cNvPicPr>
@@ -23902,7 +23902,7 @@
           </p:grpSp>
           <p:grpSp>
             <p:nvGrpSpPr>
-              <p:cNvPr id="220" name="组合 219"/>
+              <p:cNvPr id="220" name="Group 219"/>
               <p:cNvGrpSpPr/>
               <p:nvPr/>
             </p:nvGrpSpPr>
@@ -23916,7 +23916,7 @@
             </p:grpSpPr>
             <p:pic>
               <p:nvPicPr>
-                <p:cNvPr id="221" name="图片 220" descr="加号-镂空"/>
+                <p:cNvPr id="221" name="Picture 220" descr="Plus Outline"/>
                 <p:cNvPicPr>
                   <a:picLocks noChangeAspect="1"/>
                 </p:cNvPicPr>
@@ -23950,7 +23950,7 @@
             </p:pic>
             <p:pic>
               <p:nvPicPr>
-                <p:cNvPr id="222" name="图片 221"/>
+                <p:cNvPr id="222" name="Picture 221"/>
                 <p:cNvPicPr>
                   <a:picLocks noChangeAspect="1"/>
                 </p:cNvPicPr>
@@ -23989,7 +23989,7 @@
           </p:grpSp>
           <p:sp>
             <p:nvSpPr>
-              <p:cNvPr id="223" name="文本框 222"/>
+              <p:cNvPr id="223" name="Text Box 222"/>
               <p:cNvSpPr txBox="1"/>
               <p:nvPr/>
             </p:nvSpPr>
@@ -24056,7 +24056,7 @@
           </p:sp>
           <p:sp>
             <p:nvSpPr>
-              <p:cNvPr id="224" name="文本框 223"/>
+              <p:cNvPr id="224" name="Text Box 223"/>
               <p:cNvSpPr txBox="1"/>
               <p:nvPr/>
             </p:nvSpPr>
@@ -24128,7 +24128,7 @@
           </p:sp>
           <p:cxnSp>
             <p:nvCxnSpPr>
-              <p:cNvPr id="225" name="直接箭头连接符 224"/>
+              <p:cNvPr id="225" name="Straight Arrow Connector 224"/>
               <p:cNvCxnSpPr/>
               <p:nvPr/>
             </p:nvCxnSpPr>
@@ -24164,7 +24164,7 @@
           </p:cxnSp>
           <p:pic>
             <p:nvPicPr>
-              <p:cNvPr id="226" name="图片 225"/>
+              <p:cNvPr id="226" name="Picture 225"/>
               <p:cNvPicPr>
                 <a:picLocks noChangeAspect="1"/>
               </p:cNvPicPr>
@@ -24202,7 +24202,7 @@
           </p:pic>
           <p:cxnSp>
             <p:nvCxnSpPr>
-              <p:cNvPr id="227" name="直接箭头连接符 226"/>
+              <p:cNvPr id="227" name="Straight Arrow Connector 226"/>
               <p:cNvCxnSpPr/>
               <p:nvPr/>
             </p:nvCxnSpPr>
@@ -24238,7 +24238,7 @@
           </p:cxnSp>
           <p:cxnSp>
             <p:nvCxnSpPr>
-              <p:cNvPr id="228" name="直接箭头连接符 227"/>
+              <p:cNvPr id="228" name="Straight Arrow Connector 227"/>
               <p:cNvCxnSpPr>
                 <a:endCxn id="222" idx="2"/>
               </p:cNvCxnSpPr>
@@ -24276,7 +24276,7 @@
           </p:cxnSp>
           <p:sp>
             <p:nvSpPr>
-              <p:cNvPr id="392" name="文本框 391"/>
+              <p:cNvPr id="392" name="Text Box 391"/>
               <p:cNvSpPr txBox="1"/>
               <p:nvPr/>
             </p:nvSpPr>
@@ -24313,7 +24313,7 @@
           </p:sp>
           <p:sp>
             <p:nvSpPr>
-              <p:cNvPr id="394" name="圆角矩形 393"/>
+              <p:cNvPr id="394" name="Rounded Rectangle 393"/>
               <p:cNvSpPr/>
               <p:nvPr/>
             </p:nvSpPr>
@@ -24377,7 +24377,7 @@
           </p:sp>
           <p:sp>
             <p:nvSpPr>
-              <p:cNvPr id="397" name="文本框 396"/>
+              <p:cNvPr id="397" name="Text Box 396"/>
               <p:cNvSpPr txBox="1"/>
               <p:nvPr/>
             </p:nvSpPr>
@@ -24406,7 +24406,7 @@
           </p:sp>
           <p:grpSp>
             <p:nvGrpSpPr>
-              <p:cNvPr id="400" name="组合 399"/>
+              <p:cNvPr id="400" name="Group 399"/>
               <p:cNvGrpSpPr/>
               <p:nvPr/>
             </p:nvGrpSpPr>
@@ -24420,7 +24420,7 @@
             </p:grpSpPr>
             <p:grpSp>
               <p:nvGrpSpPr>
-                <p:cNvPr id="343" name="组合 342"/>
+                <p:cNvPr id="343" name="Group 342"/>
                 <p:cNvGrpSpPr/>
                 <p:nvPr/>
               </p:nvGrpSpPr>
@@ -24434,7 +24434,7 @@
               </p:grpSpPr>
               <p:sp>
                 <p:nvSpPr>
-                  <p:cNvPr id="340" name="圆角矩形 339"/>
+                  <p:cNvPr id="340" name="Rounded Rectangle 339"/>
                   <p:cNvSpPr/>
                   <p:nvPr/>
                 </p:nvSpPr>
@@ -24484,7 +24484,7 @@
               </p:sp>
               <p:grpSp>
                 <p:nvGrpSpPr>
-                  <p:cNvPr id="313" name="组合 312"/>
+                  <p:cNvPr id="313" name="Group 312"/>
                   <p:cNvGrpSpPr/>
                   <p:nvPr/>
                 </p:nvGrpSpPr>
@@ -24498,7 +24498,7 @@
                 </p:grpSpPr>
                 <p:sp>
                   <p:nvSpPr>
-                    <p:cNvPr id="311" name="圆角矩形 310"/>
+                    <p:cNvPr id="311" name="Rounded Rectangle 310"/>
                     <p:cNvSpPr/>
                     <p:nvPr/>
                   </p:nvSpPr>
@@ -24546,7 +24546,7 @@
                 </p:sp>
                 <p:sp>
                   <p:nvSpPr>
-                    <p:cNvPr id="312" name="文本框 311"/>
+                    <p:cNvPr id="312" name="Text Box 311"/>
                     <p:cNvSpPr txBox="1"/>
                     <p:nvPr/>
                   </p:nvSpPr>
@@ -24576,7 +24576,7 @@
               </p:grpSp>
               <p:grpSp>
                 <p:nvGrpSpPr>
-                  <p:cNvPr id="314" name="组合 313"/>
+                  <p:cNvPr id="314" name="Group 313"/>
                   <p:cNvGrpSpPr/>
                   <p:nvPr/>
                 </p:nvGrpSpPr>
@@ -24590,7 +24590,7 @@
                 </p:grpSpPr>
                 <p:sp>
                   <p:nvSpPr>
-                    <p:cNvPr id="315" name="圆角矩形 314"/>
+                    <p:cNvPr id="315" name="Rounded Rectangle 314"/>
                     <p:cNvSpPr/>
                     <p:nvPr/>
                   </p:nvSpPr>
@@ -24638,7 +24638,7 @@
                 </p:sp>
                 <p:sp>
                   <p:nvSpPr>
-                    <p:cNvPr id="316" name="文本框 315"/>
+                    <p:cNvPr id="316" name="Text Box 315"/>
                     <p:cNvSpPr txBox="1"/>
                     <p:nvPr/>
                   </p:nvSpPr>
@@ -24668,7 +24668,7 @@
               </p:grpSp>
               <p:pic>
                 <p:nvPicPr>
-                  <p:cNvPr id="326" name="图片 325" descr="双向箭头"/>
+                  <p:cNvPr id="326" name="Picture 325" descr="Double Arrow"/>
                   <p:cNvPicPr>
                     <a:picLocks noChangeAspect="1"/>
                   </p:cNvPicPr>
@@ -24702,7 +24702,7 @@
               </p:pic>
               <p:grpSp>
                 <p:nvGrpSpPr>
-                  <p:cNvPr id="327" name="组合 326"/>
+                  <p:cNvPr id="327" name="Group 326"/>
                   <p:cNvGrpSpPr/>
                   <p:nvPr/>
                 </p:nvGrpSpPr>
@@ -24716,7 +24716,7 @@
                 </p:grpSpPr>
                 <p:sp>
                   <p:nvSpPr>
-                    <p:cNvPr id="328" name="圆角矩形 327"/>
+                    <p:cNvPr id="328" name="Rounded Rectangle 327"/>
                     <p:cNvSpPr/>
                     <p:nvPr/>
                   </p:nvSpPr>
@@ -24764,7 +24764,7 @@
                 </p:sp>
                 <p:sp>
                   <p:nvSpPr>
-                    <p:cNvPr id="329" name="文本框 328"/>
+                    <p:cNvPr id="329" name="Text Box 328"/>
                     <p:cNvSpPr txBox="1"/>
                     <p:nvPr/>
                   </p:nvSpPr>
@@ -24794,7 +24794,7 @@
               </p:grpSp>
               <p:grpSp>
                 <p:nvGrpSpPr>
-                  <p:cNvPr id="330" name="组合 329"/>
+                  <p:cNvPr id="330" name="Group 329"/>
                   <p:cNvGrpSpPr/>
                   <p:nvPr/>
                 </p:nvGrpSpPr>
@@ -24808,7 +24808,7 @@
                 </p:grpSpPr>
                 <p:sp>
                   <p:nvSpPr>
-                    <p:cNvPr id="331" name="圆角矩形 330"/>
+                    <p:cNvPr id="331" name="Rounded Rectangle 330"/>
                     <p:cNvSpPr/>
                     <p:nvPr/>
                   </p:nvSpPr>
@@ -24856,7 +24856,7 @@
                 </p:sp>
                 <p:sp>
                   <p:nvSpPr>
-                    <p:cNvPr id="332" name="文本框 331"/>
+                    <p:cNvPr id="332" name="Text Box 331"/>
                     <p:cNvSpPr txBox="1"/>
                     <p:nvPr/>
                   </p:nvSpPr>
@@ -24886,7 +24886,7 @@
               </p:grpSp>
               <p:grpSp>
                 <p:nvGrpSpPr>
-                  <p:cNvPr id="333" name="组合 332"/>
+                  <p:cNvPr id="333" name="Group 332"/>
                   <p:cNvGrpSpPr/>
                   <p:nvPr/>
                 </p:nvGrpSpPr>
@@ -24900,7 +24900,7 @@
                 </p:grpSpPr>
                 <p:sp>
                   <p:nvSpPr>
-                    <p:cNvPr id="334" name="圆角矩形 333"/>
+                    <p:cNvPr id="334" name="Rounded Rectangle 333"/>
                     <p:cNvSpPr/>
                     <p:nvPr/>
                   </p:nvSpPr>
@@ -24948,7 +24948,7 @@
                 </p:sp>
                 <p:sp>
                   <p:nvSpPr>
-                    <p:cNvPr id="335" name="文本框 334"/>
+                    <p:cNvPr id="335" name="Text Box 334"/>
                     <p:cNvSpPr txBox="1"/>
                     <p:nvPr/>
                   </p:nvSpPr>
@@ -24978,7 +24978,7 @@
               </p:grpSp>
               <p:pic>
                 <p:nvPicPr>
-                  <p:cNvPr id="338" name="图片 337" descr="双向箭头"/>
+                  <p:cNvPr id="338" name="Picture 337" descr="Double Arrow"/>
                   <p:cNvPicPr>
                     <a:picLocks noChangeAspect="1"/>
                   </p:cNvPicPr>
@@ -25012,7 +25012,7 @@
               </p:pic>
               <p:pic>
                 <p:nvPicPr>
-                  <p:cNvPr id="339" name="图片 338" descr="双向箭头"/>
+                  <p:cNvPr id="339" name="Picture 338" descr="Double Arrow"/>
                   <p:cNvPicPr>
                     <a:picLocks noChangeAspect="1"/>
                   </p:cNvPicPr>
@@ -25046,7 +25046,7 @@
               </p:pic>
               <p:sp>
                 <p:nvSpPr>
-                  <p:cNvPr id="341" name="文本框 340"/>
+                  <p:cNvPr id="341" name="Text Box 340"/>
                   <p:cNvSpPr txBox="1"/>
                   <p:nvPr/>
                 </p:nvSpPr>
@@ -25076,7 +25076,7 @@
             </p:grpSp>
             <p:grpSp>
               <p:nvGrpSpPr>
-                <p:cNvPr id="310" name="组合 309"/>
+                <p:cNvPr id="310" name="Group 309"/>
                 <p:cNvGrpSpPr/>
                 <p:nvPr/>
               </p:nvGrpSpPr>
@@ -25090,7 +25090,7 @@
               </p:grpSpPr>
               <p:sp>
                 <p:nvSpPr>
-                  <p:cNvPr id="306" name="圆角矩形 305"/>
+                  <p:cNvPr id="306" name="Rounded Rectangle 305"/>
                   <p:cNvSpPr/>
                   <p:nvPr/>
                 </p:nvSpPr>
@@ -25140,7 +25140,7 @@
               </p:sp>
               <p:grpSp>
                 <p:nvGrpSpPr>
-                  <p:cNvPr id="307" name="组合 306"/>
+                  <p:cNvPr id="307" name="Group 306"/>
                   <p:cNvGrpSpPr/>
                   <p:nvPr/>
                 </p:nvGrpSpPr>
@@ -25154,7 +25154,7 @@
                 </p:grpSpPr>
                 <p:sp>
                   <p:nvSpPr>
-                    <p:cNvPr id="230" name="圆角矩形 229"/>
+                    <p:cNvPr id="230" name="Rounded Rectangle 229"/>
                     <p:cNvSpPr/>
                     <p:nvPr/>
                   </p:nvSpPr>
@@ -25206,7 +25206,7 @@
                 </p:sp>
                 <p:sp>
                   <p:nvSpPr>
-                    <p:cNvPr id="231" name="文本框 230"/>
+                    <p:cNvPr id="231" name="Text Box 230"/>
                     <p:cNvSpPr txBox="1"/>
                     <p:nvPr/>
                   </p:nvSpPr>
@@ -25239,7 +25239,7 @@
                 </p:sp>
                 <p:sp>
                   <p:nvSpPr>
-                    <p:cNvPr id="232" name="圆角矩形 231"/>
+                    <p:cNvPr id="232" name="Rounded Rectangle 231"/>
                     <p:cNvSpPr/>
                     <p:nvPr/>
                   </p:nvSpPr>
@@ -25291,7 +25291,7 @@
                 </p:sp>
                 <p:sp>
                   <p:nvSpPr>
-                    <p:cNvPr id="233" name="文本框 232"/>
+                    <p:cNvPr id="233" name="Text Box 232"/>
                     <p:cNvSpPr txBox="1"/>
                     <p:nvPr/>
                   </p:nvSpPr>
@@ -25324,7 +25324,7 @@
                 </p:sp>
                 <p:sp>
                   <p:nvSpPr>
-                    <p:cNvPr id="234" name="圆角矩形 233"/>
+                    <p:cNvPr id="234" name="Rounded Rectangle 233"/>
                     <p:cNvSpPr/>
                     <p:nvPr/>
                   </p:nvSpPr>
@@ -25376,7 +25376,7 @@
                 </p:sp>
                 <p:sp>
                   <p:nvSpPr>
-                    <p:cNvPr id="235" name="文本框 234"/>
+                    <p:cNvPr id="235" name="Text Box 234"/>
                     <p:cNvSpPr txBox="1"/>
                     <p:nvPr/>
                   </p:nvSpPr>
@@ -25409,7 +25409,7 @@
                 </p:sp>
                 <p:sp>
                   <p:nvSpPr>
-                    <p:cNvPr id="236" name="圆角矩形 235"/>
+                    <p:cNvPr id="236" name="Rounded Rectangle 235"/>
                     <p:cNvSpPr/>
                     <p:nvPr/>
                   </p:nvSpPr>
@@ -25461,7 +25461,7 @@
                 </p:sp>
                 <p:sp>
                   <p:nvSpPr>
-                    <p:cNvPr id="237" name="文本框 236"/>
+                    <p:cNvPr id="237" name="Text Box 236"/>
                     <p:cNvSpPr txBox="1"/>
                     <p:nvPr/>
                   </p:nvSpPr>
@@ -25494,7 +25494,7 @@
                 </p:sp>
                 <p:sp>
                   <p:nvSpPr>
-                    <p:cNvPr id="238" name="圆角矩形 237"/>
+                    <p:cNvPr id="238" name="Rounded Rectangle 237"/>
                     <p:cNvSpPr/>
                     <p:nvPr/>
                   </p:nvSpPr>
@@ -25546,7 +25546,7 @@
                 </p:sp>
                 <p:sp>
                   <p:nvSpPr>
-                    <p:cNvPr id="239" name="文本框 238"/>
+                    <p:cNvPr id="239" name="Text Box 238"/>
                     <p:cNvSpPr txBox="1"/>
                     <p:nvPr/>
                   </p:nvSpPr>
@@ -25579,7 +25579,7 @@
                 </p:sp>
                 <p:sp>
                   <p:nvSpPr>
-                    <p:cNvPr id="240" name="圆角矩形 239"/>
+                    <p:cNvPr id="240" name="Rounded Rectangle 239"/>
                     <p:cNvSpPr/>
                     <p:nvPr/>
                   </p:nvSpPr>
@@ -25631,7 +25631,7 @@
                 </p:sp>
                 <p:sp>
                   <p:nvSpPr>
-                    <p:cNvPr id="241" name="文本框 240"/>
+                    <p:cNvPr id="241" name="Text Box 240"/>
                     <p:cNvSpPr txBox="1"/>
                     <p:nvPr/>
                   </p:nvSpPr>
@@ -25664,7 +25664,7 @@
                 </p:sp>
                 <p:pic>
                   <p:nvPicPr>
-                    <p:cNvPr id="278" name="图片 277" descr="双向箭头"/>
+                    <p:cNvPr id="278" name="Picture 277" descr="Double Arrow"/>
                     <p:cNvPicPr>
                       <a:picLocks noChangeAspect="1"/>
                     </p:cNvPicPr>
@@ -25698,7 +25698,7 @@
                 </p:pic>
                 <p:pic>
                   <p:nvPicPr>
-                    <p:cNvPr id="279" name="图片 278" descr="双向箭头"/>
+                    <p:cNvPr id="279" name="Picture 278" descr="Double Arrow"/>
                     <p:cNvPicPr>
                       <a:picLocks noChangeAspect="1"/>
                     </p:cNvPicPr>
@@ -25732,7 +25732,7 @@
                 </p:pic>
                 <p:pic>
                   <p:nvPicPr>
-                    <p:cNvPr id="280" name="图片 279" descr="双向箭头"/>
+                    <p:cNvPr id="280" name="Picture 279" descr="Double Arrow"/>
                     <p:cNvPicPr>
                       <a:picLocks noChangeAspect="1"/>
                     </p:cNvPicPr>
@@ -25766,7 +25766,7 @@
                 </p:pic>
                 <p:sp>
                   <p:nvSpPr>
-                    <p:cNvPr id="281" name="圆角矩形 280"/>
+                    <p:cNvPr id="281" name="Rounded Rectangle 280"/>
                     <p:cNvSpPr/>
                     <p:nvPr/>
                   </p:nvSpPr>
@@ -25818,7 +25818,7 @@
                 </p:sp>
                 <p:sp>
                   <p:nvSpPr>
-                    <p:cNvPr id="282" name="文本框 281"/>
+                    <p:cNvPr id="282" name="Text Box 281"/>
                     <p:cNvSpPr txBox="1"/>
                     <p:nvPr/>
                   </p:nvSpPr>
@@ -25851,7 +25851,7 @@
                 </p:sp>
                 <p:sp>
                   <p:nvSpPr>
-                    <p:cNvPr id="283" name="圆角矩形 282"/>
+                    <p:cNvPr id="283" name="Rounded Rectangle 282"/>
                     <p:cNvSpPr/>
                     <p:nvPr/>
                   </p:nvSpPr>
@@ -25903,7 +25903,7 @@
                 </p:sp>
                 <p:sp>
                   <p:nvSpPr>
-                    <p:cNvPr id="284" name="文本框 283"/>
+                    <p:cNvPr id="284" name="Text Box 283"/>
                     <p:cNvSpPr txBox="1"/>
                     <p:nvPr/>
                   </p:nvSpPr>
@@ -25936,7 +25936,7 @@
                 </p:sp>
                 <p:sp>
                   <p:nvSpPr>
-                    <p:cNvPr id="285" name="圆角矩形 284"/>
+                    <p:cNvPr id="285" name="Rounded Rectangle 284"/>
                     <p:cNvSpPr/>
                     <p:nvPr/>
                   </p:nvSpPr>
@@ -25988,7 +25988,7 @@
                 </p:sp>
                 <p:sp>
                   <p:nvSpPr>
-                    <p:cNvPr id="286" name="文本框 285"/>
+                    <p:cNvPr id="286" name="Text Box 285"/>
                     <p:cNvSpPr txBox="1"/>
                     <p:nvPr/>
                   </p:nvSpPr>
@@ -26021,7 +26021,7 @@
                 </p:sp>
                 <p:sp>
                   <p:nvSpPr>
-                    <p:cNvPr id="287" name="圆角矩形 286"/>
+                    <p:cNvPr id="287" name="Rounded Rectangle 286"/>
                     <p:cNvSpPr/>
                     <p:nvPr/>
                   </p:nvSpPr>
@@ -26073,7 +26073,7 @@
                 </p:sp>
                 <p:sp>
                   <p:nvSpPr>
-                    <p:cNvPr id="288" name="文本框 287"/>
+                    <p:cNvPr id="288" name="Text Box 287"/>
                     <p:cNvSpPr txBox="1"/>
                     <p:nvPr/>
                   </p:nvSpPr>
@@ -26103,7 +26103,7 @@
                 </p:sp>
                 <p:sp>
                   <p:nvSpPr>
-                    <p:cNvPr id="289" name="圆角矩形 288"/>
+                    <p:cNvPr id="289" name="Rounded Rectangle 288"/>
                     <p:cNvSpPr/>
                     <p:nvPr/>
                   </p:nvSpPr>
@@ -26155,7 +26155,7 @@
                 </p:sp>
                 <p:sp>
                   <p:nvSpPr>
-                    <p:cNvPr id="290" name="文本框 289"/>
+                    <p:cNvPr id="290" name="Text Box 289"/>
                     <p:cNvSpPr txBox="1"/>
                     <p:nvPr/>
                   </p:nvSpPr>
@@ -26185,7 +26185,7 @@
                 </p:sp>
                 <p:sp>
                   <p:nvSpPr>
-                    <p:cNvPr id="291" name="圆角矩形 290"/>
+                    <p:cNvPr id="291" name="Rounded Rectangle 290"/>
                     <p:cNvSpPr/>
                     <p:nvPr/>
                   </p:nvSpPr>
@@ -26237,7 +26237,7 @@
                 </p:sp>
                 <p:sp>
                   <p:nvSpPr>
-                    <p:cNvPr id="292" name="文本框 291"/>
+                    <p:cNvPr id="292" name="Text Box 291"/>
                     <p:cNvSpPr txBox="1"/>
                     <p:nvPr/>
                   </p:nvSpPr>
@@ -26267,7 +26267,7 @@
                 </p:sp>
                 <p:pic>
                   <p:nvPicPr>
-                    <p:cNvPr id="293" name="图片 292" descr="双向箭头"/>
+                    <p:cNvPr id="293" name="Picture 292" descr="Double Arrow"/>
                     <p:cNvPicPr>
                       <a:picLocks noChangeAspect="1"/>
                     </p:cNvPicPr>
@@ -26301,7 +26301,7 @@
                 </p:pic>
                 <p:pic>
                   <p:nvPicPr>
-                    <p:cNvPr id="294" name="图片 293" descr="双向箭头"/>
+                    <p:cNvPr id="294" name="Picture 293" descr="Double Arrow"/>
                     <p:cNvPicPr>
                       <a:picLocks noChangeAspect="1"/>
                     </p:cNvPicPr>
@@ -26335,7 +26335,7 @@
                 </p:pic>
                 <p:pic>
                   <p:nvPicPr>
-                    <p:cNvPr id="295" name="图片 294" descr="双向箭头"/>
+                    <p:cNvPr id="295" name="Picture 294" descr="Double Arrow"/>
                     <p:cNvPicPr>
                       <a:picLocks noChangeAspect="1"/>
                     </p:cNvPicPr>
@@ -26369,7 +26369,7 @@
                 </p:pic>
                 <p:pic>
                   <p:nvPicPr>
-                    <p:cNvPr id="297" name="图片 296" descr="双向箭头"/>
+                    <p:cNvPr id="297" name="Picture 296" descr="Double Arrow"/>
                     <p:cNvPicPr>
                       <a:picLocks noChangeAspect="1"/>
                     </p:cNvPicPr>
@@ -26403,7 +26403,7 @@
                 </p:pic>
                 <p:pic>
                   <p:nvPicPr>
-                    <p:cNvPr id="298" name="图片 297" descr="双向箭头"/>
+                    <p:cNvPr id="298" name="Picture 297" descr="Double Arrow"/>
                     <p:cNvPicPr>
                       <a:picLocks noChangeAspect="1"/>
                     </p:cNvPicPr>
@@ -26437,7 +26437,7 @@
                 </p:pic>
                 <p:pic>
                   <p:nvPicPr>
-                    <p:cNvPr id="299" name="图片 298" descr="双向箭头"/>
+                    <p:cNvPr id="299" name="Picture 298" descr="Double Arrow"/>
                     <p:cNvPicPr>
                       <a:picLocks noChangeAspect="1"/>
                     </p:cNvPicPr>
@@ -26471,7 +26471,7 @@
                 </p:pic>
                 <p:pic>
                   <p:nvPicPr>
-                    <p:cNvPr id="300" name="图片 299" descr="双向箭头"/>
+                    <p:cNvPr id="300" name="Picture 299" descr="Double Arrow"/>
                     <p:cNvPicPr>
                       <a:picLocks noChangeAspect="1"/>
                     </p:cNvPicPr>
@@ -26505,7 +26505,7 @@
                 </p:pic>
                 <p:pic>
                   <p:nvPicPr>
-                    <p:cNvPr id="301" name="图片 300" descr="双向箭头"/>
+                    <p:cNvPr id="301" name="Picture 300" descr="Double Arrow"/>
                     <p:cNvPicPr>
                       <a:picLocks noChangeAspect="1"/>
                     </p:cNvPicPr>
@@ -26539,7 +26539,7 @@
                 </p:pic>
                 <p:pic>
                   <p:nvPicPr>
-                    <p:cNvPr id="302" name="图片 301" descr="双向箭头"/>
+                    <p:cNvPr id="302" name="Picture 301" descr="Double Arrow"/>
                     <p:cNvPicPr>
                       <a:picLocks noChangeAspect="1"/>
                     </p:cNvPicPr>
@@ -26573,7 +26573,7 @@
                 </p:pic>
                 <p:sp>
                   <p:nvSpPr>
-                    <p:cNvPr id="303" name="文本框 302"/>
+                    <p:cNvPr id="303" name="Text Box 302"/>
                     <p:cNvSpPr txBox="1"/>
                     <p:nvPr/>
                   </p:nvSpPr>
@@ -26606,7 +26606,7 @@
                 </p:sp>
                 <p:sp>
                   <p:nvSpPr>
-                    <p:cNvPr id="304" name="文本框 303"/>
+                    <p:cNvPr id="304" name="Text Box 303"/>
                     <p:cNvSpPr txBox="1"/>
                     <p:nvPr/>
                   </p:nvSpPr>
@@ -26639,7 +26639,7 @@
                 </p:sp>
                 <p:sp>
                   <p:nvSpPr>
-                    <p:cNvPr id="305" name="文本框 304"/>
+                    <p:cNvPr id="305" name="Text Box 304"/>
                     <p:cNvSpPr txBox="1"/>
                     <p:nvPr/>
                   </p:nvSpPr>
@@ -26673,7 +26673,7 @@
               </p:grpSp>
               <p:sp>
                 <p:nvSpPr>
-                  <p:cNvPr id="309" name="文本框 308"/>
+                  <p:cNvPr id="309" name="Text Box 308"/>
                   <p:cNvSpPr txBox="1"/>
                   <p:nvPr/>
                 </p:nvSpPr>
@@ -26703,7 +26703,7 @@
             </p:grpSp>
             <p:grpSp>
               <p:nvGrpSpPr>
-                <p:cNvPr id="396" name="组合 395"/>
+                <p:cNvPr id="396" name="Group 395"/>
                 <p:cNvGrpSpPr/>
                 <p:nvPr/>
               </p:nvGrpSpPr>
@@ -26717,7 +26717,7 @@
               </p:grpSpPr>
               <p:grpSp>
                 <p:nvGrpSpPr>
-                  <p:cNvPr id="388" name="组合 387"/>
+                  <p:cNvPr id="388" name="Group 387"/>
                   <p:cNvGrpSpPr/>
                   <p:nvPr/>
                 </p:nvGrpSpPr>
@@ -26731,7 +26731,7 @@
                 </p:grpSpPr>
                 <p:grpSp>
                   <p:nvGrpSpPr>
-                    <p:cNvPr id="373" name="组合 372"/>
+                    <p:cNvPr id="373" name="Group 372"/>
                     <p:cNvGrpSpPr/>
                     <p:nvPr/>
                   </p:nvGrpSpPr>
@@ -26748,7 +26748,7 @@
                   </p:grpSpPr>
                   <p:sp>
                     <p:nvSpPr>
-                      <p:cNvPr id="374" name="矩形 373"/>
+                      <p:cNvPr id="374" name="Rectangle 373"/>
                       <p:cNvSpPr/>
                       <p:nvPr/>
                     </p:nvSpPr>
@@ -26794,7 +26794,7 @@
                   </p:sp>
                   <p:pic>
                     <p:nvPicPr>
-                      <p:cNvPr id="375" name="图片 374" descr="叉-镂空"/>
+                      <p:cNvPr id="375" name="Picture 374" descr="Cross Outline"/>
                       <p:cNvPicPr>
                         <a:picLocks noChangeAspect="1"/>
                       </p:cNvPicPr>
@@ -26824,7 +26824,7 @@
                 </p:grpSp>
                 <p:sp>
                   <p:nvSpPr>
-                    <p:cNvPr id="344" name="矩形 343"/>
+                    <p:cNvPr id="344" name="Rectangle 343"/>
                     <p:cNvSpPr/>
                     <p:nvPr/>
                   </p:nvSpPr>
@@ -26872,7 +26872,7 @@
                 </p:sp>
                 <p:pic>
                   <p:nvPicPr>
-                    <p:cNvPr id="345" name="图片 344" descr="勾-镂空"/>
+                    <p:cNvPr id="345" name="Picture 344" descr="Check Outline"/>
                     <p:cNvPicPr>
                       <a:picLocks noChangeAspect="1"/>
                     </p:cNvPicPr>
@@ -26906,7 +26906,7 @@
                 </p:pic>
                 <p:sp>
                   <p:nvSpPr>
-                    <p:cNvPr id="346" name="矩形 345"/>
+                    <p:cNvPr id="346" name="Rectangle 345"/>
                     <p:cNvSpPr/>
                     <p:nvPr/>
                   </p:nvSpPr>
@@ -26954,7 +26954,7 @@
                 </p:sp>
                 <p:pic>
                   <p:nvPicPr>
-                    <p:cNvPr id="347" name="图片 346" descr="勾-镂空"/>
+                    <p:cNvPr id="347" name="Picture 346" descr="Check Outline"/>
                     <p:cNvPicPr>
                       <a:picLocks noChangeAspect="1"/>
                     </p:cNvPicPr>
@@ -26988,7 +26988,7 @@
                 </p:pic>
                 <p:sp>
                   <p:nvSpPr>
-                    <p:cNvPr id="348" name="矩形 347"/>
+                    <p:cNvPr id="348" name="Rectangle 347"/>
                     <p:cNvSpPr/>
                     <p:nvPr/>
                   </p:nvSpPr>
@@ -27036,7 +27036,7 @@
                 </p:sp>
                 <p:pic>
                   <p:nvPicPr>
-                    <p:cNvPr id="349" name="图片 348" descr="勾-镂空"/>
+                    <p:cNvPr id="349" name="Picture 348" descr="Check Outline"/>
                     <p:cNvPicPr>
                       <a:picLocks noChangeAspect="1"/>
                     </p:cNvPicPr>
@@ -27070,7 +27070,7 @@
                 </p:pic>
                 <p:sp>
                   <p:nvSpPr>
-                    <p:cNvPr id="350" name="矩形 349"/>
+                    <p:cNvPr id="350" name="Rectangle 349"/>
                     <p:cNvSpPr/>
                     <p:nvPr/>
                   </p:nvSpPr>
@@ -27118,7 +27118,7 @@
                 </p:sp>
                 <p:pic>
                   <p:nvPicPr>
-                    <p:cNvPr id="351" name="图片 350" descr="勾-镂空"/>
+                    <p:cNvPr id="351" name="Picture 350" descr="Check Outline"/>
                     <p:cNvPicPr>
                       <a:picLocks noChangeAspect="1"/>
                     </p:cNvPicPr>
@@ -27152,7 +27152,7 @@
                 </p:pic>
                 <p:sp>
                   <p:nvSpPr>
-                    <p:cNvPr id="352" name="矩形 351"/>
+                    <p:cNvPr id="352" name="Rectangle 351"/>
                     <p:cNvSpPr/>
                     <p:nvPr/>
                   </p:nvSpPr>
@@ -27200,7 +27200,7 @@
                 </p:sp>
                 <p:pic>
                   <p:nvPicPr>
-                    <p:cNvPr id="353" name="图片 352" descr="勾-镂空"/>
+                    <p:cNvPr id="353" name="Picture 352" descr="Check Outline"/>
                     <p:cNvPicPr>
                       <a:picLocks noChangeAspect="1"/>
                     </p:cNvPicPr>
@@ -27234,7 +27234,7 @@
                 </p:pic>
                 <p:sp>
                   <p:nvSpPr>
-                    <p:cNvPr id="354" name="矩形 353"/>
+                    <p:cNvPr id="354" name="Rectangle 353"/>
                     <p:cNvSpPr/>
                     <p:nvPr/>
                   </p:nvSpPr>
@@ -27282,7 +27282,7 @@
                 </p:sp>
                 <p:pic>
                   <p:nvPicPr>
-                    <p:cNvPr id="355" name="图片 354" descr="勾-镂空"/>
+                    <p:cNvPr id="355" name="Picture 354" descr="Check Outline"/>
                     <p:cNvPicPr>
                       <a:picLocks noChangeAspect="1"/>
                     </p:cNvPicPr>
@@ -27316,7 +27316,7 @@
                 </p:pic>
                 <p:grpSp>
                   <p:nvGrpSpPr>
-                    <p:cNvPr id="369" name="组合 368"/>
+                    <p:cNvPr id="369" name="Group 368"/>
                     <p:cNvGrpSpPr/>
                     <p:nvPr/>
                   </p:nvGrpSpPr>
@@ -27330,7 +27330,7 @@
                   </p:grpSpPr>
                   <p:sp>
                     <p:nvSpPr>
-                      <p:cNvPr id="356" name="矩形 355"/>
+                      <p:cNvPr id="356" name="Rectangle 355"/>
                       <p:cNvSpPr/>
                       <p:nvPr/>
                     </p:nvSpPr>
@@ -27378,7 +27378,7 @@
                   </p:sp>
                   <p:pic>
                     <p:nvPicPr>
-                      <p:cNvPr id="362" name="图片 361" descr="叉-镂空"/>
+                      <p:cNvPr id="362" name="Picture 361" descr="Cross Outline"/>
                       <p:cNvPicPr>
                         <a:picLocks noChangeAspect="1"/>
                       </p:cNvPicPr>
@@ -27413,7 +27413,7 @@
                 </p:grpSp>
                 <p:pic>
                   <p:nvPicPr>
-                    <p:cNvPr id="384" name="图片 383" descr="叉-镂空"/>
+                    <p:cNvPr id="384" name="Picture 383" descr="Cross Outline"/>
                     <p:cNvPicPr>
                       <a:picLocks noChangeAspect="1"/>
                     </p:cNvPicPr>
@@ -27447,7 +27447,7 @@
                 </p:pic>
                 <p:grpSp>
                   <p:nvGrpSpPr>
-                    <p:cNvPr id="376" name="组合 375"/>
+                    <p:cNvPr id="376" name="Group 375"/>
                     <p:cNvGrpSpPr/>
                     <p:nvPr/>
                   </p:nvGrpSpPr>
@@ -27464,7 +27464,7 @@
                   </p:grpSpPr>
                   <p:sp>
                     <p:nvSpPr>
-                      <p:cNvPr id="377" name="矩形 376"/>
+                      <p:cNvPr id="377" name="Rectangle 376"/>
                       <p:cNvSpPr/>
                       <p:nvPr/>
                     </p:nvSpPr>
@@ -27510,7 +27510,7 @@
                   </p:sp>
                   <p:pic>
                     <p:nvPicPr>
-                      <p:cNvPr id="378" name="图片 377" descr="叉-镂空"/>
+                      <p:cNvPr id="378" name="Picture 377" descr="Cross Outline"/>
                       <p:cNvPicPr>
                         <a:picLocks noChangeAspect="1"/>
                       </p:cNvPicPr>
@@ -27540,7 +27540,7 @@
                 </p:grpSp>
                 <p:pic>
                   <p:nvPicPr>
-                    <p:cNvPr id="387" name="图片 386" descr="叉-镂空"/>
+                    <p:cNvPr id="387" name="Picture 386" descr="Cross Outline"/>
                     <p:cNvPicPr>
                       <a:picLocks noChangeAspect="1"/>
                     </p:cNvPicPr>
@@ -27575,7 +27575,7 @@
               </p:grpSp>
               <p:sp>
                 <p:nvSpPr>
-                  <p:cNvPr id="389" name="文本框 388"/>
+                  <p:cNvPr id="389" name="Text Box 388"/>
                   <p:cNvSpPr txBox="1"/>
                   <p:nvPr/>
                 </p:nvSpPr>
@@ -27604,7 +27604,7 @@
               </p:sp>
               <p:sp>
                 <p:nvSpPr>
-                  <p:cNvPr id="390" name="文本框 389"/>
+                  <p:cNvPr id="390" name="Text Box 389"/>
                   <p:cNvSpPr txBox="1"/>
                   <p:nvPr/>
                 </p:nvSpPr>
@@ -27633,7 +27633,7 @@
               </p:sp>
               <p:sp>
                 <p:nvSpPr>
-                  <p:cNvPr id="391" name="文本框 390"/>
+                  <p:cNvPr id="391" name="Text Box 390"/>
                   <p:cNvSpPr txBox="1"/>
                   <p:nvPr/>
                 </p:nvSpPr>
@@ -27663,7 +27663,7 @@
             </p:grpSp>
             <p:pic>
               <p:nvPicPr>
-                <p:cNvPr id="399" name="图片 398" descr="循环"/>
+                <p:cNvPr id="399" name="Picture 398" descr="Loop"/>
                 <p:cNvPicPr>
                   <a:picLocks noChangeAspect="1"/>
                 </p:cNvPicPr>
@@ -27698,7 +27698,7 @@
           </p:grpSp>
           <p:sp>
             <p:nvSpPr>
-              <p:cNvPr id="401" name="下箭头 400"/>
+              <p:cNvPr id="401" name="Down Arrow 400"/>
               <p:cNvSpPr/>
               <p:nvPr>
                 <p:custDataLst>
@@ -27750,15 +27750,15 @@
               <a:p>
                 <a:pPr algn="ctr"/>
                 <a:endParaRPr lang="zh-CN" altLang="en-US" b="1">
-                  <a:latin typeface="微软雅黑" panose="020B0503020204020204" charset="-122"/>
-                  <a:ea typeface="微软雅黑" panose="020B0503020204020204" charset="-122"/>
+                  <a:latin typeface="Microsoft YaHei" panose="020B0503020204020204" charset="-122"/>
+                  <a:ea typeface="Microsoft YaHei" panose="020B0503020204020204" charset="-122"/>
                 </a:endParaRPr>
               </a:p>
             </p:txBody>
           </p:sp>
           <p:sp>
             <p:nvSpPr>
-              <p:cNvPr id="402" name="圆角矩形 401"/>
+              <p:cNvPr id="402" name="Rounded Rectangle 401"/>
               <p:cNvSpPr/>
               <p:nvPr/>
             </p:nvSpPr>
@@ -27806,7 +27806,7 @@
           </p:sp>
           <p:sp>
             <p:nvSpPr>
-              <p:cNvPr id="404" name="文本框 403"/>
+              <p:cNvPr id="404" name="Text Box 403"/>
               <p:cNvSpPr txBox="1"/>
               <p:nvPr/>
             </p:nvSpPr>
@@ -27835,7 +27835,7 @@
           </p:sp>
           <p:grpSp>
             <p:nvGrpSpPr>
-              <p:cNvPr id="112" name="组合 111"/>
+              <p:cNvPr id="112" name="Group 111"/>
               <p:cNvGrpSpPr/>
               <p:nvPr/>
             </p:nvGrpSpPr>
@@ -27849,7 +27849,7 @@
             </p:grpSpPr>
             <p:sp>
               <p:nvSpPr>
-                <p:cNvPr id="2" name="圆角矩形 1"/>
+                <p:cNvPr id="2" name="Rounded Rectangle 1"/>
                 <p:cNvSpPr/>
                 <p:nvPr/>
               </p:nvSpPr>
@@ -27897,7 +27897,7 @@
             </p:sp>
             <p:sp>
               <p:nvSpPr>
-                <p:cNvPr id="27" name="文本框 26"/>
+                <p:cNvPr id="27" name="Text Box 26"/>
                 <p:cNvSpPr txBox="1"/>
                 <p:nvPr/>
               </p:nvSpPr>
@@ -27927,7 +27927,7 @@
           </p:grpSp>
           <p:grpSp>
             <p:nvGrpSpPr>
-              <p:cNvPr id="108" name="组合 107"/>
+              <p:cNvPr id="108" name="Group 107"/>
               <p:cNvGrpSpPr/>
               <p:nvPr/>
             </p:nvGrpSpPr>
@@ -27941,7 +27941,7 @@
             </p:grpSpPr>
             <p:sp>
               <p:nvSpPr>
-                <p:cNvPr id="102" name="圆角矩形 101"/>
+                <p:cNvPr id="102" name="Rounded Rectangle 101"/>
                 <p:cNvSpPr/>
                 <p:nvPr/>
               </p:nvSpPr>
@@ -27989,7 +27989,7 @@
             </p:sp>
             <p:sp>
               <p:nvSpPr>
-                <p:cNvPr id="103" name="文本框 102"/>
+                <p:cNvPr id="103" name="Text Box 102"/>
                 <p:cNvSpPr txBox="1"/>
                 <p:nvPr/>
               </p:nvSpPr>
@@ -28019,7 +28019,7 @@
           </p:grpSp>
           <p:pic>
             <p:nvPicPr>
-              <p:cNvPr id="116" name="图形 28" descr="箭头: 向右旋转 纯色填充"/>
+              <p:cNvPr id="116" name="Shape 28" descr="Arrow: Right Rotation Solid Fill"/>
               <p:cNvPicPr>
                 <a:picLocks noChangeAspect="1"/>
               </p:cNvPicPr>
@@ -28059,7 +28059,7 @@
           </p:pic>
           <p:pic>
             <p:nvPicPr>
-              <p:cNvPr id="117" name="图形 28" descr="箭头: 向右旋转 纯色填充"/>
+              <p:cNvPr id="117" name="Shape 28" descr="Arrow: Right Rotation Solid Fill"/>
               <p:cNvPicPr>
                 <a:picLocks noChangeAspect="1"/>
               </p:cNvPicPr>
@@ -28100,7 +28100,7 @@
         </p:grpSp>
         <p:sp>
           <p:nvSpPr>
-            <p:cNvPr id="182" name="文本框 181"/>
+            <p:cNvPr id="182" name="Text Box 181"/>
             <p:cNvSpPr txBox="1"/>
             <p:nvPr/>
           </p:nvSpPr>
@@ -28136,7 +28136,7 @@
         </p:sp>
         <p:sp>
           <p:nvSpPr>
-            <p:cNvPr id="183" name="文本框 182"/>
+            <p:cNvPr id="183" name="Text Box 182"/>
             <p:cNvSpPr txBox="1"/>
             <p:nvPr/>
           </p:nvSpPr>
@@ -28193,7 +28193,7 @@
         </p:sp>
         <p:sp>
           <p:nvSpPr>
-            <p:cNvPr id="185" name="文本框 184"/>
+            <p:cNvPr id="185" name="Text Box 184"/>
             <p:cNvSpPr txBox="1"/>
             <p:nvPr/>
           </p:nvSpPr>
@@ -28250,7 +28250,7 @@
         </p:sp>
         <p:sp>
           <p:nvSpPr>
-            <p:cNvPr id="186" name="文本框 185"/>
+            <p:cNvPr id="186" name="Text Box 185"/>
             <p:cNvSpPr txBox="1"/>
             <p:nvPr/>
           </p:nvSpPr>
@@ -28307,7 +28307,7 @@
         </p:sp>
         <p:sp>
           <p:nvSpPr>
-            <p:cNvPr id="190" name="矩形 189"/>
+            <p:cNvPr id="190" name="Rectangle 189"/>
             <p:cNvSpPr/>
             <p:nvPr/>
           </p:nvSpPr>
@@ -28355,7 +28355,7 @@
         </p:sp>
         <p:sp>
           <p:nvSpPr>
-            <p:cNvPr id="187" name="文本框 186"/>
+            <p:cNvPr id="187" name="Text Box 186"/>
             <p:cNvSpPr txBox="1"/>
             <p:nvPr/>
           </p:nvSpPr>
@@ -28388,7 +28388,7 @@
         </p:sp>
         <p:sp>
           <p:nvSpPr>
-            <p:cNvPr id="115" name="文本框 114"/>
+            <p:cNvPr id="115" name="Text Box 114"/>
             <p:cNvSpPr txBox="1"/>
             <p:nvPr/>
           </p:nvSpPr>
@@ -28417,7 +28417,7 @@
         </p:sp>
         <p:pic>
           <p:nvPicPr>
-            <p:cNvPr id="152" name="图片 151"/>
+            <p:cNvPr id="152" name="Picture 151"/>
             <p:cNvPicPr>
               <a:picLocks noChangeAspect="1"/>
             </p:cNvPicPr>
@@ -28442,7 +28442,7 @@
         </p:pic>
         <p:pic>
           <p:nvPicPr>
-            <p:cNvPr id="153" name="图片 152"/>
+            <p:cNvPr id="153" name="Picture 152"/>
             <p:cNvPicPr>
               <a:picLocks noChangeAspect="1"/>
             </p:cNvPicPr>
@@ -28467,7 +28467,7 @@
         </p:pic>
         <p:sp>
           <p:nvSpPr>
-            <p:cNvPr id="198" name="文本框 197"/>
+            <p:cNvPr id="198" name="Text Box 197"/>
             <p:cNvSpPr txBox="1"/>
             <p:nvPr/>
           </p:nvSpPr>
@@ -28496,7 +28496,7 @@
         </p:sp>
         <p:sp>
           <p:nvSpPr>
-            <p:cNvPr id="199" name="文本框 198"/>
+            <p:cNvPr id="199" name="Text Box 198"/>
             <p:cNvSpPr txBox="1"/>
             <p:nvPr/>
           </p:nvSpPr>
@@ -28531,7 +28531,7 @@
         </p:sp>
         <p:sp>
           <p:nvSpPr>
-            <p:cNvPr id="200" name="文本框 199"/>
+            <p:cNvPr id="200" name="Text Box 199"/>
             <p:cNvSpPr txBox="1"/>
             <p:nvPr/>
           </p:nvSpPr>
@@ -28560,7 +28560,7 @@
         </p:sp>
         <p:pic>
           <p:nvPicPr>
-            <p:cNvPr id="202" name="图片 201" descr="正态分布"/>
+            <p:cNvPr id="202" name="Picture 201" descr="Normal Distribution"/>
             <p:cNvPicPr>
               <a:picLocks noChangeAspect="1"/>
             </p:cNvPicPr>
@@ -28601,7 +28601,7 @@
         </p:pic>
         <p:pic>
           <p:nvPicPr>
-            <p:cNvPr id="204" name="图片 203" descr="点状图"/>
+            <p:cNvPr id="204" name="Picture 203" descr="Dot Plot"/>
             <p:cNvPicPr>
               <a:picLocks noChangeAspect="1"/>
             </p:cNvPicPr>
@@ -28642,7 +28642,7 @@
         </p:pic>
         <p:sp>
           <p:nvSpPr>
-            <p:cNvPr id="207" name="文本框 206"/>
+            <p:cNvPr id="207" name="Text Box 206"/>
             <p:cNvSpPr txBox="1"/>
             <p:nvPr/>
           </p:nvSpPr>
@@ -28693,7 +28693,7 @@
         </p:sp>
         <p:cxnSp>
           <p:nvCxnSpPr>
-            <p:cNvPr id="212" name="直接箭头连接符 211"/>
+            <p:cNvPr id="212" name="Straight Arrow Connector 211"/>
             <p:cNvCxnSpPr/>
             <p:nvPr/>
           </p:nvCxnSpPr>
@@ -28729,7 +28729,7 @@
         </p:cxnSp>
         <p:cxnSp>
           <p:nvCxnSpPr>
-            <p:cNvPr id="229" name="直接箭头连接符 228"/>
+            <p:cNvPr id="229" name="Straight Arrow Connector 228"/>
             <p:cNvCxnSpPr/>
             <p:nvPr/>
           </p:nvCxnSpPr>
@@ -28794,7 +28794,7 @@
       </p:grpSpPr>
       <p:grpSp>
         <p:nvGrpSpPr>
-          <p:cNvPr id="451" name="组合 450"/>
+          <p:cNvPr id="451" name="Group 450"/>
           <p:cNvGrpSpPr/>
           <p:nvPr/>
         </p:nvGrpSpPr>
@@ -28808,7 +28808,7 @@
         </p:grpSpPr>
         <p:sp>
           <p:nvSpPr>
-            <p:cNvPr id="243" name="圆角矩形 242"/>
+            <p:cNvPr id="243" name="Rounded Rectangle 242"/>
             <p:cNvSpPr/>
             <p:nvPr/>
           </p:nvSpPr>
@@ -28856,7 +28856,7 @@
         </p:sp>
         <p:sp>
           <p:nvSpPr>
-            <p:cNvPr id="104" name="圆角矩形 103"/>
+            <p:cNvPr id="104" name="Rounded Rectangle 103"/>
             <p:cNvSpPr/>
             <p:nvPr/>
           </p:nvSpPr>
@@ -28904,7 +28904,7 @@
         </p:sp>
         <p:sp>
           <p:nvSpPr>
-            <p:cNvPr id="109" name="圆角矩形 108"/>
+            <p:cNvPr id="109" name="Rounded Rectangle 108"/>
             <p:cNvSpPr/>
             <p:nvPr/>
           </p:nvSpPr>
@@ -28959,7 +28959,7 @@
         </p:sp>
         <p:sp>
           <p:nvSpPr>
-            <p:cNvPr id="110" name="文本框 109"/>
+            <p:cNvPr id="110" name="Text Box 109"/>
             <p:cNvSpPr txBox="1"/>
             <p:nvPr/>
           </p:nvSpPr>
@@ -28996,7 +28996,7 @@
         </p:sp>
         <p:sp>
           <p:nvSpPr>
-            <p:cNvPr id="113" name="文本框 112"/>
+            <p:cNvPr id="113" name="Text Box 112"/>
             <p:cNvSpPr txBox="1"/>
             <p:nvPr/>
           </p:nvSpPr>
@@ -29039,7 +29039,7 @@
         </p:sp>
         <p:sp>
           <p:nvSpPr>
-            <p:cNvPr id="121" name="文本框 120"/>
+            <p:cNvPr id="121" name="Text Box 120"/>
             <p:cNvSpPr txBox="1"/>
             <p:nvPr/>
           </p:nvSpPr>
@@ -29076,7 +29076,7 @@
         </p:sp>
         <p:sp>
           <p:nvSpPr>
-            <p:cNvPr id="122" name="文本框 121"/>
+            <p:cNvPr id="122" name="Text Box 121"/>
             <p:cNvSpPr txBox="1"/>
             <p:nvPr/>
           </p:nvSpPr>
@@ -29113,7 +29113,7 @@
         </p:sp>
         <p:grpSp>
           <p:nvGrpSpPr>
-            <p:cNvPr id="177" name="组合 176"/>
+            <p:cNvPr id="177" name="Group 176"/>
             <p:cNvGrpSpPr/>
             <p:nvPr/>
           </p:nvGrpSpPr>
@@ -29127,7 +29127,7 @@
           </p:grpSpPr>
           <p:sp>
             <p:nvSpPr>
-              <p:cNvPr id="124" name="矩形 123"/>
+              <p:cNvPr id="124" name="Rectangle 123"/>
               <p:cNvSpPr/>
               <p:nvPr/>
             </p:nvSpPr>
@@ -29270,7 +29270,7 @@
           </p:sp>
           <p:sp>
             <p:nvSpPr>
-              <p:cNvPr id="125" name="矩形 124"/>
+              <p:cNvPr id="125" name="Rectangle 124"/>
               <p:cNvSpPr/>
               <p:nvPr/>
             </p:nvSpPr>
@@ -29412,7 +29412,7 @@
           </p:sp>
           <p:sp>
             <p:nvSpPr>
-              <p:cNvPr id="126" name="文本框 125"/>
+              <p:cNvPr id="126" name="Text Box 125"/>
               <p:cNvSpPr txBox="1"/>
               <p:nvPr/>
             </p:nvSpPr>
@@ -29441,7 +29441,7 @@
           </p:sp>
           <p:sp>
             <p:nvSpPr>
-              <p:cNvPr id="127" name="文本框 126"/>
+              <p:cNvPr id="127" name="Text Box 126"/>
               <p:cNvSpPr txBox="1"/>
               <p:nvPr/>
             </p:nvSpPr>
@@ -29470,7 +29470,7 @@
           </p:sp>
           <p:cxnSp>
             <p:nvCxnSpPr>
-              <p:cNvPr id="156" name="肘形连接符 155"/>
+              <p:cNvPr id="156" name="Elbow Connector 155"/>
               <p:cNvCxnSpPr>
                 <a:stCxn id="124" idx="3"/>
                 <a:endCxn id="125" idx="3"/>
@@ -29510,7 +29510,7 @@
           </p:cxnSp>
           <p:sp>
             <p:nvSpPr>
-              <p:cNvPr id="165" name="文本框 164"/>
+              <p:cNvPr id="165" name="Text Box 164"/>
               <p:cNvSpPr txBox="1"/>
               <p:nvPr/>
             </p:nvSpPr>
@@ -29557,7 +29557,7 @@
           </p:sp>
           <p:cxnSp>
             <p:nvCxnSpPr>
-              <p:cNvPr id="167" name="直接连接符 166"/>
+              <p:cNvPr id="167" name="Straight Connector 166"/>
               <p:cNvCxnSpPr/>
               <p:nvPr/>
             </p:nvCxnSpPr>
@@ -29594,7 +29594,7 @@
         </p:grpSp>
         <p:pic>
           <p:nvPicPr>
-            <p:cNvPr id="180" name="图片 179"/>
+            <p:cNvPr id="180" name="Picture 179"/>
             <p:cNvPicPr>
               <a:picLocks noChangeAspect="1"/>
             </p:cNvPicPr>
@@ -29632,7 +29632,7 @@
         </p:pic>
         <p:pic>
           <p:nvPicPr>
-            <p:cNvPr id="181" name="图片 180"/>
+            <p:cNvPr id="181" name="Picture 180"/>
             <p:cNvPicPr>
               <a:picLocks noChangeAspect="1"/>
             </p:cNvPicPr>
@@ -29671,7 +29671,7 @@
         </p:pic>
         <p:sp>
           <p:nvSpPr>
-            <p:cNvPr id="184" name="文本框 183"/>
+            <p:cNvPr id="184" name="Text Box 183"/>
             <p:cNvSpPr txBox="1"/>
             <p:nvPr/>
           </p:nvSpPr>
@@ -29732,7 +29732,7 @@
         </p:sp>
         <p:sp>
           <p:nvSpPr>
-            <p:cNvPr id="189" name="文本框 188"/>
+            <p:cNvPr id="189" name="Text Box 188"/>
             <p:cNvSpPr txBox="1"/>
             <p:nvPr/>
           </p:nvSpPr>
@@ -29777,7 +29777,7 @@
         </p:sp>
         <p:sp>
           <p:nvSpPr>
-            <p:cNvPr id="201" name="圆角矩形 200"/>
+            <p:cNvPr id="201" name="Rounded Rectangle 200"/>
             <p:cNvSpPr/>
             <p:nvPr/>
           </p:nvSpPr>
@@ -29841,7 +29841,7 @@
         </p:sp>
         <p:sp>
           <p:nvSpPr>
-            <p:cNvPr id="244" name="圆角矩形 243"/>
+            <p:cNvPr id="244" name="Rounded Rectangle 243"/>
             <p:cNvSpPr/>
             <p:nvPr/>
           </p:nvSpPr>
@@ -29889,7 +29889,7 @@
         </p:sp>
         <p:sp>
           <p:nvSpPr>
-            <p:cNvPr id="245" name="圆角矩形 244"/>
+            <p:cNvPr id="245" name="Rounded Rectangle 244"/>
             <p:cNvSpPr/>
             <p:nvPr/>
           </p:nvSpPr>
@@ -29953,7 +29953,7 @@
         </p:sp>
         <p:sp>
           <p:nvSpPr>
-            <p:cNvPr id="246" name="圆角矩形 245"/>
+            <p:cNvPr id="246" name="Rounded Rectangle 245"/>
             <p:cNvSpPr/>
             <p:nvPr/>
           </p:nvSpPr>
@@ -30001,7 +30001,7 @@
         </p:sp>
         <p:sp>
           <p:nvSpPr>
-            <p:cNvPr id="247" name="圆角矩形 246"/>
+            <p:cNvPr id="247" name="Rounded Rectangle 246"/>
             <p:cNvSpPr/>
             <p:nvPr/>
           </p:nvSpPr>
@@ -30065,7 +30065,7 @@
         </p:sp>
         <p:sp>
           <p:nvSpPr>
-            <p:cNvPr id="248" name="圆角矩形 247"/>
+            <p:cNvPr id="248" name="Rounded Rectangle 247"/>
             <p:cNvSpPr/>
             <p:nvPr/>
           </p:nvSpPr>
@@ -30113,7 +30113,7 @@
         </p:sp>
         <p:sp>
           <p:nvSpPr>
-            <p:cNvPr id="249" name="圆角矩形 248"/>
+            <p:cNvPr id="249" name="Rounded Rectangle 248"/>
             <p:cNvSpPr/>
             <p:nvPr/>
           </p:nvSpPr>
@@ -30177,7 +30177,7 @@
         </p:sp>
         <p:sp>
           <p:nvSpPr>
-            <p:cNvPr id="250" name="下箭头 249"/>
+            <p:cNvPr id="250" name="Down Arrow 249"/>
             <p:cNvSpPr/>
             <p:nvPr>
               <p:custDataLst>
@@ -30229,15 +30229,15 @@
             <a:p>
               <a:pPr algn="ctr"/>
               <a:endParaRPr lang="zh-CN" altLang="en-US" b="1">
-                <a:latin typeface="微软雅黑" panose="020B0503020204020204" charset="-122"/>
-                <a:ea typeface="微软雅黑" panose="020B0503020204020204" charset="-122"/>
+                <a:latin typeface="Microsoft YaHei" panose="020B0503020204020204" charset="-122"/>
+                <a:ea typeface="Microsoft YaHei" panose="020B0503020204020204" charset="-122"/>
               </a:endParaRPr>
             </a:p>
           </p:txBody>
         </p:sp>
         <p:sp>
           <p:nvSpPr>
-            <p:cNvPr id="251" name="文本框 250"/>
+            <p:cNvPr id="251" name="Text Box 250"/>
             <p:cNvSpPr txBox="1"/>
             <p:nvPr/>
           </p:nvSpPr>
@@ -30286,7 +30286,7 @@
         </p:sp>
         <p:grpSp>
           <p:nvGrpSpPr>
-            <p:cNvPr id="267" name="组合 266"/>
+            <p:cNvPr id="267" name="Group 266"/>
             <p:cNvGrpSpPr/>
             <p:nvPr/>
           </p:nvGrpSpPr>
@@ -30300,7 +30300,7 @@
           </p:grpSpPr>
           <p:sp>
             <p:nvSpPr>
-              <p:cNvPr id="252" name="圆角矩形 251"/>
+              <p:cNvPr id="252" name="Rounded Rectangle 251"/>
               <p:cNvSpPr/>
               <p:nvPr/>
             </p:nvSpPr>
@@ -30350,7 +30350,7 @@
           </p:sp>
           <p:pic>
             <p:nvPicPr>
-              <p:cNvPr id="253" name="图片 252" descr="文件程序算法"/>
+              <p:cNvPr id="253" name="Picture 252" descr="Program Algorithm"/>
               <p:cNvPicPr>
                 <a:picLocks noChangeAspect="1"/>
               </p:cNvPicPr>
@@ -30384,7 +30384,7 @@
           </p:pic>
           <p:sp>
             <p:nvSpPr>
-              <p:cNvPr id="254" name="文本框 253"/>
+              <p:cNvPr id="254" name="Text Box 253"/>
               <p:cNvSpPr txBox="1"/>
               <p:nvPr/>
             </p:nvSpPr>
@@ -30413,7 +30413,7 @@
           </p:sp>
           <p:pic>
             <p:nvPicPr>
-              <p:cNvPr id="255" name="图片 254" descr="灯泡"/>
+              <p:cNvPr id="255" name="Picture 254" descr="Lightbulb"/>
               <p:cNvPicPr>
                 <a:picLocks noChangeAspect="1"/>
               </p:cNvPicPr>
@@ -30447,7 +30447,7 @@
           </p:pic>
           <p:sp>
             <p:nvSpPr>
-              <p:cNvPr id="256" name="文本框 255"/>
+              <p:cNvPr id="256" name="Text Box 255"/>
               <p:cNvSpPr txBox="1"/>
               <p:nvPr/>
             </p:nvSpPr>
@@ -30476,7 +30476,7 @@
           </p:sp>
           <p:sp>
             <p:nvSpPr>
-              <p:cNvPr id="259" name="文本框 258"/>
+              <p:cNvPr id="259" name="Text Box 258"/>
               <p:cNvSpPr txBox="1"/>
               <p:nvPr/>
             </p:nvSpPr>
@@ -30505,7 +30505,7 @@
           </p:sp>
           <p:pic>
             <p:nvPicPr>
-              <p:cNvPr id="262" name="图片 261" descr="正态分布"/>
+              <p:cNvPr id="262" name="Picture 261" descr="Normal Distribution"/>
               <p:cNvPicPr>
                 <a:picLocks noChangeAspect="1"/>
               </p:cNvPicPr>
@@ -30539,7 +30539,7 @@
           </p:pic>
           <p:pic>
             <p:nvPicPr>
-              <p:cNvPr id="263" name="图片 262" descr="禁止"/>
+              <p:cNvPr id="263" name="Picture 262" descr="Prohibition"/>
               <p:cNvPicPr>
                 <a:picLocks noChangeAspect="1"/>
               </p:cNvPicPr>
@@ -30573,7 +30573,7 @@
           </p:pic>
           <p:sp>
             <p:nvSpPr>
-              <p:cNvPr id="265" name="圆角矩形 264"/>
+              <p:cNvPr id="265" name="Rounded Rectangle 264"/>
               <p:cNvSpPr/>
               <p:nvPr/>
             </p:nvSpPr>
@@ -30625,7 +30625,7 @@
         </p:grpSp>
         <p:sp>
           <p:nvSpPr>
-            <p:cNvPr id="319" name="圆角矩形 318"/>
+            <p:cNvPr id="319" name="Rounded Rectangle 318"/>
             <p:cNvSpPr/>
             <p:nvPr/>
           </p:nvSpPr>
@@ -30675,7 +30675,7 @@
         </p:sp>
         <p:pic>
           <p:nvPicPr>
-            <p:cNvPr id="268" name="图片 267" descr="尺子"/>
+            <p:cNvPr id="268" name="Picture 267" descr="Ruler"/>
             <p:cNvPicPr>
               <a:picLocks noChangeAspect="1"/>
             </p:cNvPicPr>
@@ -30709,7 +30709,7 @@
         </p:pic>
         <p:pic>
           <p:nvPicPr>
-            <p:cNvPr id="269" name="图片 268" descr="大脑"/>
+            <p:cNvPr id="269" name="Picture 268" descr="Brain"/>
             <p:cNvPicPr>
               <a:picLocks noChangeAspect="1"/>
             </p:cNvPicPr>
@@ -30743,7 +30743,7 @@
         </p:pic>
         <p:pic>
           <p:nvPicPr>
-            <p:cNvPr id="270" name="图片 269" descr="浮尘"/>
+            <p:cNvPr id="270" name="Picture 269" descr="Dust"/>
             <p:cNvPicPr>
               <a:picLocks noChangeAspect="1"/>
             </p:cNvPicPr>
@@ -30777,7 +30777,7 @@
         </p:pic>
         <p:pic>
           <p:nvPicPr>
-            <p:cNvPr id="271" name="图片 270" descr="神经网络2"/>
+            <p:cNvPr id="271" name="Picture 270" descr="Neural Network 2"/>
             <p:cNvPicPr>
               <a:picLocks noChangeAspect="1"/>
             </p:cNvPicPr>
@@ -30811,7 +30811,7 @@
         </p:pic>
         <p:sp>
           <p:nvSpPr>
-            <p:cNvPr id="272" name="文本框 271"/>
+            <p:cNvPr id="272" name="Text Box 271"/>
             <p:cNvSpPr txBox="1"/>
             <p:nvPr/>
           </p:nvSpPr>
@@ -30840,7 +30840,7 @@
         </p:sp>
         <p:sp>
           <p:nvSpPr>
-            <p:cNvPr id="273" name="文本框 272"/>
+            <p:cNvPr id="273" name="Text Box 272"/>
             <p:cNvSpPr txBox="1"/>
             <p:nvPr/>
           </p:nvSpPr>
@@ -30881,7 +30881,7 @@
         </p:sp>
         <p:sp>
           <p:nvSpPr>
-            <p:cNvPr id="275" name="文本框 274"/>
+            <p:cNvPr id="275" name="Text Box 274"/>
             <p:cNvSpPr txBox="1"/>
             <p:nvPr/>
           </p:nvSpPr>
@@ -30910,7 +30910,7 @@
         </p:sp>
         <p:sp>
           <p:nvSpPr>
-            <p:cNvPr id="276" name="文本框 275"/>
+            <p:cNvPr id="276" name="Text Box 275"/>
             <p:cNvSpPr txBox="1"/>
             <p:nvPr/>
           </p:nvSpPr>
@@ -30939,7 +30939,7 @@
         </p:sp>
         <p:sp>
           <p:nvSpPr>
-            <p:cNvPr id="277" name="文本框 276"/>
+            <p:cNvPr id="277" name="Text Box 276"/>
             <p:cNvSpPr txBox="1"/>
             <p:nvPr/>
           </p:nvSpPr>
@@ -30986,7 +30986,7 @@
         </p:sp>
         <p:sp>
           <p:nvSpPr>
-            <p:cNvPr id="296" name="文本框 295"/>
+            <p:cNvPr id="296" name="Text Box 295"/>
             <p:cNvSpPr txBox="1"/>
             <p:nvPr/>
           </p:nvSpPr>
@@ -31015,7 +31015,7 @@
         </p:sp>
         <p:pic>
           <p:nvPicPr>
-            <p:cNvPr id="308" name="图片 307"/>
+            <p:cNvPr id="308" name="Picture 307"/>
             <p:cNvPicPr>
               <a:picLocks noChangeAspect="1"/>
             </p:cNvPicPr>
@@ -31053,7 +31053,7 @@
         </p:pic>
         <p:sp>
           <p:nvSpPr>
-            <p:cNvPr id="320" name="圆角矩形 319"/>
+            <p:cNvPr id="320" name="Rounded Rectangle 319"/>
             <p:cNvSpPr/>
             <p:nvPr/>
           </p:nvSpPr>
@@ -31112,7 +31112,7 @@
         </p:sp>
         <p:sp>
           <p:nvSpPr>
-            <p:cNvPr id="323" name="文本框 322"/>
+            <p:cNvPr id="323" name="Text Box 322"/>
             <p:cNvSpPr txBox="1"/>
             <p:nvPr/>
           </p:nvSpPr>
@@ -31141,7 +31141,7 @@
         </p:sp>
         <p:sp>
           <p:nvSpPr>
-            <p:cNvPr id="324" name="文本框 323"/>
+            <p:cNvPr id="324" name="Text Box 323"/>
             <p:cNvSpPr txBox="1"/>
             <p:nvPr/>
           </p:nvSpPr>
@@ -31179,7 +31179,7 @@
         </p:sp>
         <p:sp>
           <p:nvSpPr>
-            <p:cNvPr id="325" name="文本框 324"/>
+            <p:cNvPr id="325" name="Text Box 324"/>
             <p:cNvSpPr txBox="1"/>
             <p:nvPr/>
           </p:nvSpPr>
@@ -31211,7 +31211,7 @@
         </p:sp>
         <p:sp>
           <p:nvSpPr>
-            <p:cNvPr id="336" name="文本框 335"/>
+            <p:cNvPr id="336" name="Text Box 335"/>
             <p:cNvSpPr txBox="1"/>
             <p:nvPr/>
           </p:nvSpPr>
@@ -31243,7 +31243,7 @@
         </p:sp>
         <p:sp>
           <p:nvSpPr>
-            <p:cNvPr id="342" name="下箭头 341"/>
+            <p:cNvPr id="342" name="Down Arrow 341"/>
             <p:cNvSpPr/>
             <p:nvPr>
               <p:custDataLst>
@@ -31295,15 +31295,15 @@
             <a:p>
               <a:pPr algn="ctr"/>
               <a:endParaRPr lang="zh-CN" altLang="en-US" b="1">
-                <a:latin typeface="微软雅黑" panose="020B0503020204020204" charset="-122"/>
-                <a:ea typeface="微软雅黑" panose="020B0503020204020204" charset="-122"/>
+                <a:latin typeface="Microsoft YaHei" panose="020B0503020204020204" charset="-122"/>
+                <a:ea typeface="Microsoft YaHei" panose="020B0503020204020204" charset="-122"/>
               </a:endParaRPr>
             </a:p>
           </p:txBody>
         </p:sp>
         <p:cxnSp>
           <p:nvCxnSpPr>
-            <p:cNvPr id="357" name="直接箭头连接符 356"/>
+            <p:cNvPr id="357" name="Straight Arrow Connector 356"/>
             <p:cNvCxnSpPr/>
             <p:nvPr/>
           </p:nvCxnSpPr>
@@ -31339,7 +31339,7 @@
         </p:cxnSp>
         <p:cxnSp>
           <p:nvCxnSpPr>
-            <p:cNvPr id="358" name="直接箭头连接符 357"/>
+            <p:cNvPr id="358" name="Straight Arrow Connector 357"/>
             <p:cNvCxnSpPr/>
             <p:nvPr/>
           </p:nvCxnSpPr>
@@ -31375,7 +31375,7 @@
         </p:cxnSp>
         <p:cxnSp>
           <p:nvCxnSpPr>
-            <p:cNvPr id="360" name="肘形连接符 359"/>
+            <p:cNvPr id="360" name="Elbow Connector 359"/>
             <p:cNvCxnSpPr/>
             <p:nvPr/>
           </p:nvCxnSpPr>
@@ -31413,7 +31413,7 @@
         </p:cxnSp>
         <p:pic>
           <p:nvPicPr>
-            <p:cNvPr id="361" name="图片 360" descr="齿轮"/>
+            <p:cNvPr id="361" name="Picture 360" descr="Gear"/>
             <p:cNvPicPr>
               <a:picLocks noChangeAspect="1"/>
             </p:cNvPicPr>
@@ -31447,7 +31447,7 @@
         </p:pic>
         <p:sp>
           <p:nvSpPr>
-            <p:cNvPr id="417" name="文本框 416"/>
+            <p:cNvPr id="417" name="Text Box 416"/>
             <p:cNvSpPr txBox="1"/>
             <p:nvPr/>
           </p:nvSpPr>
@@ -31488,7 +31488,7 @@
         </p:sp>
         <p:grpSp>
           <p:nvGrpSpPr>
-            <p:cNvPr id="426" name="组合 425"/>
+            <p:cNvPr id="426" name="Group 425"/>
             <p:cNvGrpSpPr/>
             <p:nvPr/>
           </p:nvGrpSpPr>
@@ -31502,7 +31502,7 @@
           </p:grpSpPr>
           <p:grpSp>
             <p:nvGrpSpPr>
-              <p:cNvPr id="425" name="组合 424"/>
+              <p:cNvPr id="425" name="Group 424"/>
               <p:cNvGrpSpPr/>
               <p:nvPr/>
             </p:nvGrpSpPr>
@@ -31516,7 +31516,7 @@
             </p:grpSpPr>
             <p:sp>
               <p:nvSpPr>
-                <p:cNvPr id="418" name="文本框 417"/>
+                <p:cNvPr id="418" name="Text Box 417"/>
                 <p:cNvSpPr txBox="1"/>
                 <p:nvPr/>
               </p:nvSpPr>
@@ -31565,7 +31565,7 @@
             </p:sp>
             <p:sp>
               <p:nvSpPr>
-                <p:cNvPr id="419" name="左大括号 418"/>
+                <p:cNvPr id="419" name="Left Brace 418"/>
                 <p:cNvSpPr/>
                 <p:nvPr/>
               </p:nvSpPr>
@@ -31608,7 +31608,7 @@
             </p:sp>
             <p:sp>
               <p:nvSpPr>
-                <p:cNvPr id="420" name="文本框 419"/>
+                <p:cNvPr id="420" name="Text Box 419"/>
                 <p:cNvSpPr txBox="1"/>
                 <p:nvPr/>
               </p:nvSpPr>
@@ -31637,7 +31637,7 @@
             </p:sp>
             <p:pic>
               <p:nvPicPr>
-                <p:cNvPr id="421" name="图片 420" descr="统计表"/>
+                <p:cNvPr id="421" name="Picture 420" descr="Statistics Table"/>
                 <p:cNvPicPr>
                   <a:picLocks noChangeAspect="1"/>
                 </p:cNvPicPr>
@@ -31671,7 +31671,7 @@
             </p:pic>
             <p:pic>
               <p:nvPicPr>
-                <p:cNvPr id="422" name="图片 421" descr="勋章"/>
+                <p:cNvPr id="422" name="Picture 421" descr="Medal"/>
                 <p:cNvPicPr>
                   <a:picLocks noChangeAspect="1"/>
                 </p:cNvPicPr>
@@ -31705,7 +31705,7 @@
             </p:pic>
             <p:pic>
               <p:nvPicPr>
-                <p:cNvPr id="423" name="图片 422" descr="盾牌"/>
+                <p:cNvPr id="423" name="Picture 422" descr="Shield"/>
                 <p:cNvPicPr>
                   <a:picLocks noChangeAspect="1"/>
                 </p:cNvPicPr>
@@ -31740,7 +31740,7 @@
           </p:grpSp>
           <p:sp>
             <p:nvSpPr>
-              <p:cNvPr id="424" name="文本框 423"/>
+              <p:cNvPr id="424" name="Text Box 423"/>
               <p:cNvSpPr txBox="1"/>
               <p:nvPr/>
             </p:nvSpPr>
@@ -31778,7 +31778,7 @@
         </p:grpSp>
         <p:sp>
           <p:nvSpPr>
-            <p:cNvPr id="427" name="下箭头 426"/>
+            <p:cNvPr id="427" name="Down Arrow 426"/>
             <p:cNvSpPr/>
             <p:nvPr>
               <p:custDataLst>
@@ -31830,15 +31830,15 @@
             <a:p>
               <a:pPr algn="ctr"/>
               <a:endParaRPr lang="zh-CN" altLang="en-US" b="1">
-                <a:latin typeface="微软雅黑" panose="020B0503020204020204" charset="-122"/>
-                <a:ea typeface="微软雅黑" panose="020B0503020204020204" charset="-122"/>
+                <a:latin typeface="Microsoft YaHei" panose="020B0503020204020204" charset="-122"/>
+                <a:ea typeface="Microsoft YaHei" panose="020B0503020204020204" charset="-122"/>
               </a:endParaRPr>
             </a:p>
           </p:txBody>
         </p:sp>
         <p:sp>
           <p:nvSpPr>
-            <p:cNvPr id="428" name="文本框 427"/>
+            <p:cNvPr id="428" name="Text Box 427"/>
             <p:cNvSpPr txBox="1"/>
             <p:nvPr/>
           </p:nvSpPr>
@@ -31879,7 +31879,7 @@
         </p:sp>
         <p:sp>
           <p:nvSpPr>
-            <p:cNvPr id="429" name="文本框 428"/>
+            <p:cNvPr id="429" name="Text Box 428"/>
             <p:cNvSpPr txBox="1"/>
             <p:nvPr/>
           </p:nvSpPr>
@@ -31920,7 +31920,7 @@
         </p:sp>
         <p:sp>
           <p:nvSpPr>
-            <p:cNvPr id="431" name="文本框 430"/>
+            <p:cNvPr id="431" name="Text Box 430"/>
             <p:cNvSpPr txBox="1"/>
             <p:nvPr/>
           </p:nvSpPr>
@@ -31963,7 +31963,7 @@
         </p:sp>
         <p:sp>
           <p:nvSpPr>
-            <p:cNvPr id="432" name="文本框 431"/>
+            <p:cNvPr id="432" name="Text Box 431"/>
             <p:cNvSpPr txBox="1"/>
             <p:nvPr/>
           </p:nvSpPr>
@@ -32004,7 +32004,7 @@
         </p:sp>
         <p:sp>
           <p:nvSpPr>
-            <p:cNvPr id="433" name="文本框 432"/>
+            <p:cNvPr id="433" name="Text Box 432"/>
             <p:cNvSpPr txBox="1"/>
             <p:nvPr/>
           </p:nvSpPr>
@@ -32045,7 +32045,7 @@
         </p:sp>
         <p:sp>
           <p:nvSpPr>
-            <p:cNvPr id="434" name="文本框 433"/>
+            <p:cNvPr id="434" name="Text Box 433"/>
             <p:cNvSpPr txBox="1"/>
             <p:nvPr/>
           </p:nvSpPr>
@@ -32086,7 +32086,7 @@
         </p:sp>
         <p:sp>
           <p:nvSpPr>
-            <p:cNvPr id="436" name="下箭头 435"/>
+            <p:cNvPr id="436" name="Down Arrow 435"/>
             <p:cNvSpPr/>
             <p:nvPr>
               <p:custDataLst>
@@ -32138,15 +32138,15 @@
             <a:p>
               <a:pPr algn="ctr"/>
               <a:endParaRPr lang="zh-CN" altLang="en-US" b="1">
-                <a:latin typeface="微软雅黑" panose="020B0503020204020204" charset="-122"/>
-                <a:ea typeface="微软雅黑" panose="020B0503020204020204" charset="-122"/>
+                <a:latin typeface="Microsoft YaHei" panose="020B0503020204020204" charset="-122"/>
+                <a:ea typeface="Microsoft YaHei" panose="020B0503020204020204" charset="-122"/>
               </a:endParaRPr>
             </a:p>
           </p:txBody>
         </p:sp>
         <p:pic>
           <p:nvPicPr>
-            <p:cNvPr id="437" name="图片 436"/>
+            <p:cNvPr id="437" name="Picture 436"/>
             <p:cNvPicPr>
               <a:picLocks noChangeAspect="1"/>
             </p:cNvPicPr>
@@ -32192,7 +32192,7 @@
         </p:pic>
         <p:sp>
           <p:nvSpPr>
-            <p:cNvPr id="438" name="文本框 437"/>
+            <p:cNvPr id="438" name="Text Box 437"/>
             <p:cNvSpPr txBox="1"/>
             <p:nvPr/>
           </p:nvSpPr>
@@ -32229,7 +32229,7 @@
         </p:sp>
         <p:pic>
           <p:nvPicPr>
-            <p:cNvPr id="439" name="图片 438"/>
+            <p:cNvPr id="439" name="Picture 438"/>
             <p:cNvPicPr>
               <a:picLocks noChangeAspect="1"/>
             </p:cNvPicPr>
@@ -32274,7 +32274,7 @@
         </p:pic>
         <p:pic>
           <p:nvPicPr>
-            <p:cNvPr id="440" name="图片 439"/>
+            <p:cNvPr id="440" name="Picture 439"/>
             <p:cNvPicPr>
               <a:picLocks noChangeAspect="1"/>
             </p:cNvPicPr>
@@ -32319,7 +32319,7 @@
         </p:pic>
         <p:pic>
           <p:nvPicPr>
-            <p:cNvPr id="441" name="图片 440"/>
+            <p:cNvPr id="441" name="Picture 440"/>
             <p:cNvPicPr>
               <a:picLocks noChangeAspect="1"/>
             </p:cNvPicPr>
@@ -32364,7 +32364,7 @@
         </p:pic>
         <p:sp>
           <p:nvSpPr>
-            <p:cNvPr id="442" name="文本框 441"/>
+            <p:cNvPr id="442" name="Text Box 441"/>
             <p:cNvSpPr txBox="1"/>
             <p:nvPr/>
           </p:nvSpPr>
@@ -32393,7 +32393,7 @@
         </p:sp>
         <p:sp>
           <p:nvSpPr>
-            <p:cNvPr id="444" name="圆角矩形 443"/>
+            <p:cNvPr id="444" name="Rounded Rectangle 443"/>
             <p:cNvSpPr/>
             <p:nvPr/>
           </p:nvSpPr>
@@ -32451,7 +32451,7 @@
         </p:sp>
         <p:grpSp>
           <p:nvGrpSpPr>
-            <p:cNvPr id="416" name="组合 415"/>
+            <p:cNvPr id="416" name="Group 415"/>
             <p:cNvGrpSpPr/>
             <p:nvPr/>
           </p:nvGrpSpPr>
@@ -32465,7 +32465,7 @@
           </p:grpSpPr>
           <p:grpSp>
             <p:nvGrpSpPr>
-              <p:cNvPr id="408" name="组合 407"/>
+              <p:cNvPr id="408" name="Group 407"/>
               <p:cNvGrpSpPr/>
               <p:nvPr/>
             </p:nvGrpSpPr>
@@ -32479,7 +32479,7 @@
             </p:grpSpPr>
             <p:grpSp>
               <p:nvGrpSpPr>
-                <p:cNvPr id="382" name="组合 381"/>
+                <p:cNvPr id="382" name="Group 381"/>
                 <p:cNvGrpSpPr/>
                 <p:nvPr/>
               </p:nvGrpSpPr>
@@ -32493,7 +32493,7 @@
               </p:grpSpPr>
               <p:sp>
                 <p:nvSpPr>
-                  <p:cNvPr id="383" name="圆角矩形 382"/>
+                  <p:cNvPr id="383" name="Rounded Rectangle 382"/>
                   <p:cNvSpPr/>
                   <p:nvPr/>
                 </p:nvSpPr>
@@ -32541,7 +32541,7 @@
               </p:sp>
               <p:sp>
                 <p:nvSpPr>
-                  <p:cNvPr id="385" name="文本框 384"/>
+                  <p:cNvPr id="385" name="Text Box 384"/>
                   <p:cNvSpPr txBox="1"/>
                   <p:nvPr/>
                 </p:nvSpPr>
@@ -32571,7 +32571,7 @@
             </p:grpSp>
             <p:grpSp>
               <p:nvGrpSpPr>
-                <p:cNvPr id="386" name="组合 385"/>
+                <p:cNvPr id="386" name="Group 385"/>
                 <p:cNvGrpSpPr/>
                 <p:nvPr/>
               </p:nvGrpSpPr>
@@ -32585,7 +32585,7 @@
               </p:grpSpPr>
               <p:sp>
                 <p:nvSpPr>
-                  <p:cNvPr id="393" name="圆角矩形 392"/>
+                  <p:cNvPr id="393" name="Rounded Rectangle 392"/>
                   <p:cNvSpPr/>
                   <p:nvPr/>
                 </p:nvSpPr>
@@ -32633,7 +32633,7 @@
               </p:sp>
               <p:sp>
                 <p:nvSpPr>
-                  <p:cNvPr id="398" name="文本框 397"/>
+                  <p:cNvPr id="398" name="Text Box 397"/>
                   <p:cNvSpPr txBox="1"/>
                   <p:nvPr/>
                 </p:nvSpPr>
@@ -32664,7 +32664,7 @@
           </p:grpSp>
           <p:grpSp>
             <p:nvGrpSpPr>
-              <p:cNvPr id="365" name="组合 364"/>
+              <p:cNvPr id="365" name="Group 364"/>
               <p:cNvGrpSpPr/>
               <p:nvPr/>
             </p:nvGrpSpPr>
@@ -32678,7 +32678,7 @@
             </p:grpSpPr>
             <p:sp>
               <p:nvSpPr>
-                <p:cNvPr id="363" name="圆角矩形 362"/>
+                <p:cNvPr id="363" name="Rounded Rectangle 362"/>
                 <p:cNvSpPr/>
                 <p:nvPr/>
               </p:nvSpPr>
@@ -32726,7 +32726,7 @@
             </p:sp>
             <p:sp>
               <p:nvSpPr>
-                <p:cNvPr id="364" name="文本框 363"/>
+                <p:cNvPr id="364" name="Text Box 363"/>
                 <p:cNvSpPr txBox="1"/>
                 <p:nvPr/>
               </p:nvSpPr>
@@ -32756,7 +32756,7 @@
           </p:grpSp>
           <p:grpSp>
             <p:nvGrpSpPr>
-              <p:cNvPr id="366" name="组合 365"/>
+              <p:cNvPr id="366" name="Group 365"/>
               <p:cNvGrpSpPr/>
               <p:nvPr/>
             </p:nvGrpSpPr>
@@ -32770,7 +32770,7 @@
             </p:grpSpPr>
             <p:sp>
               <p:nvSpPr>
-                <p:cNvPr id="367" name="圆角矩形 366"/>
+                <p:cNvPr id="367" name="Rounded Rectangle 366"/>
                 <p:cNvSpPr/>
                 <p:nvPr/>
               </p:nvSpPr>
@@ -32818,7 +32818,7 @@
             </p:sp>
             <p:sp>
               <p:nvSpPr>
-                <p:cNvPr id="368" name="文本框 367"/>
+                <p:cNvPr id="368" name="Text Box 367"/>
                 <p:cNvSpPr txBox="1"/>
                 <p:nvPr/>
               </p:nvSpPr>
@@ -32848,7 +32848,7 @@
           </p:grpSp>
           <p:grpSp>
             <p:nvGrpSpPr>
-              <p:cNvPr id="370" name="组合 369"/>
+              <p:cNvPr id="370" name="Group 369"/>
               <p:cNvGrpSpPr/>
               <p:nvPr/>
             </p:nvGrpSpPr>
@@ -32862,7 +32862,7 @@
             </p:grpSpPr>
             <p:sp>
               <p:nvSpPr>
-                <p:cNvPr id="371" name="圆角矩形 370"/>
+                <p:cNvPr id="371" name="Rounded Rectangle 370"/>
                 <p:cNvSpPr/>
                 <p:nvPr/>
               </p:nvSpPr>
@@ -32910,7 +32910,7 @@
             </p:sp>
             <p:sp>
               <p:nvSpPr>
-                <p:cNvPr id="372" name="文本框 371"/>
+                <p:cNvPr id="372" name="Text Box 371"/>
                 <p:cNvSpPr txBox="1"/>
                 <p:nvPr/>
               </p:nvSpPr>
@@ -32940,7 +32940,7 @@
           </p:grpSp>
           <p:grpSp>
             <p:nvGrpSpPr>
-              <p:cNvPr id="379" name="组合 378"/>
+              <p:cNvPr id="379" name="Group 378"/>
               <p:cNvGrpSpPr/>
               <p:nvPr/>
             </p:nvGrpSpPr>
@@ -32954,7 +32954,7 @@
             </p:grpSpPr>
             <p:sp>
               <p:nvSpPr>
-                <p:cNvPr id="380" name="圆角矩形 379"/>
+                <p:cNvPr id="380" name="Rounded Rectangle 379"/>
                 <p:cNvSpPr/>
                 <p:nvPr/>
               </p:nvSpPr>
@@ -33002,7 +33002,7 @@
             </p:sp>
             <p:sp>
               <p:nvSpPr>
-                <p:cNvPr id="381" name="文本框 380"/>
+                <p:cNvPr id="381" name="Text Box 380"/>
                 <p:cNvSpPr txBox="1"/>
                 <p:nvPr/>
               </p:nvSpPr>
@@ -33032,7 +33032,7 @@
           </p:grpSp>
           <p:sp>
             <p:nvSpPr>
-              <p:cNvPr id="405" name="圆角矩形 404"/>
+              <p:cNvPr id="405" name="Rounded Rectangle 404"/>
               <p:cNvSpPr/>
               <p:nvPr/>
             </p:nvSpPr>
@@ -33080,7 +33080,7 @@
           </p:sp>
           <p:sp>
             <p:nvSpPr>
-              <p:cNvPr id="406" name="文本框 405"/>
+              <p:cNvPr id="406" name="Text Box 405"/>
               <p:cNvSpPr txBox="1"/>
               <p:nvPr/>
             </p:nvSpPr>
@@ -33113,7 +33113,7 @@
           </p:sp>
           <p:sp>
             <p:nvSpPr>
-              <p:cNvPr id="409" name="文本框 408"/>
+              <p:cNvPr id="409" name="Text Box 408"/>
               <p:cNvSpPr txBox="1"/>
               <p:nvPr/>
             </p:nvSpPr>
@@ -33162,7 +33162,7 @@
           </p:sp>
           <p:sp>
             <p:nvSpPr>
-              <p:cNvPr id="410" name="文本框 409"/>
+              <p:cNvPr id="410" name="Text Box 409"/>
               <p:cNvSpPr txBox="1"/>
               <p:nvPr/>
             </p:nvSpPr>
@@ -33195,7 +33195,7 @@
           </p:sp>
           <p:sp>
             <p:nvSpPr>
-              <p:cNvPr id="411" name="圆角矩形 410"/>
+              <p:cNvPr id="411" name="Rounded Rectangle 410"/>
               <p:cNvSpPr/>
               <p:nvPr/>
             </p:nvSpPr>
@@ -33243,7 +33243,7 @@
           </p:sp>
           <p:sp>
             <p:nvSpPr>
-              <p:cNvPr id="412" name="文本框 411"/>
+              <p:cNvPr id="412" name="Text Box 411"/>
               <p:cNvSpPr txBox="1"/>
               <p:nvPr/>
             </p:nvSpPr>
@@ -33273,7 +33273,7 @@
         </p:grpSp>
         <p:sp>
           <p:nvSpPr>
-            <p:cNvPr id="415" name="文本框 414"/>
+            <p:cNvPr id="415" name="Text Box 414"/>
             <p:cNvSpPr txBox="1"/>
             <p:nvPr/>
           </p:nvSpPr>
@@ -33314,7 +33314,7 @@
         </p:sp>
         <p:sp>
           <p:nvSpPr>
-            <p:cNvPr id="445" name="圆角矩形 444"/>
+            <p:cNvPr id="445" name="Rounded Rectangle 444"/>
             <p:cNvSpPr/>
             <p:nvPr/>
           </p:nvSpPr>
@@ -33372,7 +33372,7 @@
         </p:sp>
         <p:sp>
           <p:nvSpPr>
-            <p:cNvPr id="446" name="圆角矩形 445"/>
+            <p:cNvPr id="446" name="Rounded Rectangle 445"/>
             <p:cNvSpPr/>
             <p:nvPr/>
           </p:nvSpPr>
@@ -33430,7 +33430,7 @@
         </p:sp>
         <p:sp>
           <p:nvSpPr>
-            <p:cNvPr id="447" name="圆角矩形 446"/>
+            <p:cNvPr id="447" name="Rounded Rectangle 446"/>
             <p:cNvSpPr/>
             <p:nvPr/>
           </p:nvSpPr>
@@ -33488,7 +33488,7 @@
         </p:sp>
         <p:pic>
           <p:nvPicPr>
-            <p:cNvPr id="449" name="图片 448"/>
+            <p:cNvPr id="449" name="Picture 448"/>
             <p:cNvPicPr>
               <a:picLocks noChangeAspect="1"/>
             </p:cNvPicPr>
@@ -33533,7 +33533,7 @@
         </p:pic>
         <p:sp>
           <p:nvSpPr>
-            <p:cNvPr id="450" name="文本框 449"/>
+            <p:cNvPr id="450" name="Text Box 449"/>
             <p:cNvSpPr txBox="1"/>
             <p:nvPr/>
           </p:nvSpPr>
@@ -33591,7 +33591,7 @@
       </p:grpSpPr>
       <p:grpSp>
         <p:nvGrpSpPr>
-          <p:cNvPr id="451" name="组合 450"/>
+          <p:cNvPr id="451" name="Group 450"/>
           <p:cNvGrpSpPr/>
           <p:nvPr/>
         </p:nvGrpSpPr>
@@ -33605,7 +33605,7 @@
         </p:grpSpPr>
         <p:sp>
           <p:nvSpPr>
-            <p:cNvPr id="243" name="圆角矩形 242"/>
+            <p:cNvPr id="243" name="Rounded Rectangle 242"/>
             <p:cNvSpPr/>
             <p:nvPr/>
           </p:nvSpPr>
@@ -33653,7 +33653,7 @@
         </p:sp>
         <p:sp>
           <p:nvSpPr>
-            <p:cNvPr id="104" name="圆角矩形 103"/>
+            <p:cNvPr id="104" name="Rounded Rectangle 103"/>
             <p:cNvSpPr/>
             <p:nvPr/>
           </p:nvSpPr>
@@ -33701,7 +33701,7 @@
         </p:sp>
         <p:sp>
           <p:nvSpPr>
-            <p:cNvPr id="109" name="圆角矩形 108"/>
+            <p:cNvPr id="109" name="Rounded Rectangle 108"/>
             <p:cNvSpPr/>
             <p:nvPr/>
           </p:nvSpPr>
@@ -33756,7 +33756,7 @@
         </p:sp>
         <p:sp>
           <p:nvSpPr>
-            <p:cNvPr id="110" name="文本框 109"/>
+            <p:cNvPr id="110" name="Text Box 109"/>
             <p:cNvSpPr txBox="1"/>
             <p:nvPr/>
           </p:nvSpPr>
@@ -33793,7 +33793,7 @@
         </p:sp>
         <p:sp>
           <p:nvSpPr>
-            <p:cNvPr id="113" name="文本框 112"/>
+            <p:cNvPr id="113" name="Text Box 112"/>
             <p:cNvSpPr txBox="1"/>
             <p:nvPr/>
           </p:nvSpPr>
@@ -33836,7 +33836,7 @@
         </p:sp>
         <p:sp>
           <p:nvSpPr>
-            <p:cNvPr id="121" name="文本框 120"/>
+            <p:cNvPr id="121" name="Text Box 120"/>
             <p:cNvSpPr txBox="1"/>
             <p:nvPr/>
           </p:nvSpPr>
@@ -33873,7 +33873,7 @@
         </p:sp>
         <p:sp>
           <p:nvSpPr>
-            <p:cNvPr id="122" name="文本框 121"/>
+            <p:cNvPr id="122" name="Text Box 121"/>
             <p:cNvSpPr txBox="1"/>
             <p:nvPr/>
           </p:nvSpPr>
@@ -33910,7 +33910,7 @@
         </p:sp>
         <p:grpSp>
           <p:nvGrpSpPr>
-            <p:cNvPr id="177" name="组合 176"/>
+            <p:cNvPr id="177" name="Group 176"/>
             <p:cNvGrpSpPr/>
             <p:nvPr/>
           </p:nvGrpSpPr>
@@ -33924,7 +33924,7 @@
           </p:grpSpPr>
           <p:sp>
             <p:nvSpPr>
-              <p:cNvPr id="124" name="矩形 123"/>
+              <p:cNvPr id="124" name="Rectangle 123"/>
               <p:cNvSpPr/>
               <p:nvPr/>
             </p:nvSpPr>
@@ -34067,7 +34067,7 @@
           </p:sp>
           <p:sp>
             <p:nvSpPr>
-              <p:cNvPr id="125" name="矩形 124"/>
+              <p:cNvPr id="125" name="Rectangle 124"/>
               <p:cNvSpPr/>
               <p:nvPr/>
             </p:nvSpPr>
@@ -34209,7 +34209,7 @@
           </p:sp>
           <p:sp>
             <p:nvSpPr>
-              <p:cNvPr id="126" name="文本框 125"/>
+              <p:cNvPr id="126" name="Text Box 125"/>
               <p:cNvSpPr txBox="1"/>
               <p:nvPr/>
             </p:nvSpPr>
@@ -34238,7 +34238,7 @@
           </p:sp>
           <p:sp>
             <p:nvSpPr>
-              <p:cNvPr id="127" name="文本框 126"/>
+              <p:cNvPr id="127" name="Text Box 126"/>
               <p:cNvSpPr txBox="1"/>
               <p:nvPr/>
             </p:nvSpPr>
@@ -34267,7 +34267,7 @@
           </p:sp>
           <p:cxnSp>
             <p:nvCxnSpPr>
-              <p:cNvPr id="156" name="肘形连接符 155"/>
+              <p:cNvPr id="156" name="Elbow Connector 155"/>
               <p:cNvCxnSpPr>
                 <a:stCxn id="124" idx="3"/>
                 <a:endCxn id="125" idx="3"/>
@@ -34307,7 +34307,7 @@
           </p:cxnSp>
           <p:sp>
             <p:nvSpPr>
-              <p:cNvPr id="165" name="文本框 164"/>
+              <p:cNvPr id="165" name="Text Box 164"/>
               <p:cNvSpPr txBox="1"/>
               <p:nvPr/>
             </p:nvSpPr>
@@ -34354,7 +34354,7 @@
           </p:sp>
           <p:cxnSp>
             <p:nvCxnSpPr>
-              <p:cNvPr id="167" name="直接连接符 166"/>
+              <p:cNvPr id="167" name="Straight Connector 166"/>
               <p:cNvCxnSpPr/>
               <p:nvPr/>
             </p:nvCxnSpPr>
@@ -34391,7 +34391,7 @@
         </p:grpSp>
         <p:pic>
           <p:nvPicPr>
-            <p:cNvPr id="180" name="图片 179"/>
+            <p:cNvPr id="180" name="Picture 179"/>
             <p:cNvPicPr>
               <a:picLocks noChangeAspect="1"/>
             </p:cNvPicPr>
@@ -34429,7 +34429,7 @@
         </p:pic>
         <p:pic>
           <p:nvPicPr>
-            <p:cNvPr id="181" name="图片 180"/>
+            <p:cNvPr id="181" name="Picture 180"/>
             <p:cNvPicPr>
               <a:picLocks noChangeAspect="1"/>
             </p:cNvPicPr>
@@ -34468,7 +34468,7 @@
         </p:pic>
         <p:sp>
           <p:nvSpPr>
-            <p:cNvPr id="184" name="文本框 183"/>
+            <p:cNvPr id="184" name="Text Box 183"/>
             <p:cNvSpPr txBox="1"/>
             <p:nvPr/>
           </p:nvSpPr>
@@ -34529,7 +34529,7 @@
         </p:sp>
         <p:sp>
           <p:nvSpPr>
-            <p:cNvPr id="189" name="文本框 188"/>
+            <p:cNvPr id="189" name="Text Box 188"/>
             <p:cNvSpPr txBox="1"/>
             <p:nvPr/>
           </p:nvSpPr>
@@ -34574,7 +34574,7 @@
         </p:sp>
         <p:sp>
           <p:nvSpPr>
-            <p:cNvPr id="201" name="圆角矩形 200"/>
+            <p:cNvPr id="201" name="Rounded Rectangle 200"/>
             <p:cNvSpPr/>
             <p:nvPr/>
           </p:nvSpPr>
@@ -34638,7 +34638,7 @@
         </p:sp>
         <p:sp>
           <p:nvSpPr>
-            <p:cNvPr id="244" name="圆角矩形 243"/>
+            <p:cNvPr id="244" name="Rounded Rectangle 243"/>
             <p:cNvSpPr/>
             <p:nvPr/>
           </p:nvSpPr>
@@ -34686,7 +34686,7 @@
         </p:sp>
         <p:sp>
           <p:nvSpPr>
-            <p:cNvPr id="245" name="圆角矩形 244"/>
+            <p:cNvPr id="245" name="Rounded Rectangle 244"/>
             <p:cNvSpPr/>
             <p:nvPr/>
           </p:nvSpPr>
@@ -34750,7 +34750,7 @@
         </p:sp>
         <p:sp>
           <p:nvSpPr>
-            <p:cNvPr id="246" name="圆角矩形 245"/>
+            <p:cNvPr id="246" name="Rounded Rectangle 245"/>
             <p:cNvSpPr/>
             <p:nvPr/>
           </p:nvSpPr>
@@ -34798,7 +34798,7 @@
         </p:sp>
         <p:sp>
           <p:nvSpPr>
-            <p:cNvPr id="247" name="圆角矩形 246"/>
+            <p:cNvPr id="247" name="Rounded Rectangle 246"/>
             <p:cNvSpPr/>
             <p:nvPr/>
           </p:nvSpPr>
@@ -34862,7 +34862,7 @@
         </p:sp>
         <p:sp>
           <p:nvSpPr>
-            <p:cNvPr id="248" name="圆角矩形 247"/>
+            <p:cNvPr id="248" name="Rounded Rectangle 247"/>
             <p:cNvSpPr/>
             <p:nvPr/>
           </p:nvSpPr>
@@ -34910,7 +34910,7 @@
         </p:sp>
         <p:sp>
           <p:nvSpPr>
-            <p:cNvPr id="249" name="圆角矩形 248"/>
+            <p:cNvPr id="249" name="Rounded Rectangle 248"/>
             <p:cNvSpPr/>
             <p:nvPr/>
           </p:nvSpPr>
@@ -34974,7 +34974,7 @@
         </p:sp>
         <p:sp>
           <p:nvSpPr>
-            <p:cNvPr id="250" name="下箭头 249"/>
+            <p:cNvPr id="250" name="Down Arrow 249"/>
             <p:cNvSpPr/>
             <p:nvPr>
               <p:custDataLst>
@@ -35026,15 +35026,15 @@
             <a:p>
               <a:pPr algn="ctr"/>
               <a:endParaRPr lang="zh-CN" altLang="en-US" b="1">
-                <a:latin typeface="微软雅黑" panose="020B0503020204020204" charset="-122"/>
-                <a:ea typeface="微软雅黑" panose="020B0503020204020204" charset="-122"/>
+                <a:latin typeface="Microsoft YaHei" panose="020B0503020204020204" charset="-122"/>
+                <a:ea typeface="Microsoft YaHei" panose="020B0503020204020204" charset="-122"/>
               </a:endParaRPr>
             </a:p>
           </p:txBody>
         </p:sp>
         <p:sp>
           <p:nvSpPr>
-            <p:cNvPr id="251" name="文本框 250"/>
+            <p:cNvPr id="251" name="Text Box 250"/>
             <p:cNvSpPr txBox="1"/>
             <p:nvPr/>
           </p:nvSpPr>
@@ -35083,7 +35083,7 @@
         </p:sp>
         <p:grpSp>
           <p:nvGrpSpPr>
-            <p:cNvPr id="267" name="组合 266"/>
+            <p:cNvPr id="267" name="Group 266"/>
             <p:cNvGrpSpPr/>
             <p:nvPr/>
           </p:nvGrpSpPr>
@@ -35097,7 +35097,7 @@
           </p:grpSpPr>
           <p:sp>
             <p:nvSpPr>
-              <p:cNvPr id="252" name="圆角矩形 251"/>
+              <p:cNvPr id="252" name="Rounded Rectangle 251"/>
               <p:cNvSpPr/>
               <p:nvPr/>
             </p:nvSpPr>
@@ -35147,7 +35147,7 @@
           </p:sp>
           <p:pic>
             <p:nvPicPr>
-              <p:cNvPr id="253" name="图片 252" descr="文件程序算法"/>
+              <p:cNvPr id="253" name="Picture 252" descr="Program Algorithm"/>
               <p:cNvPicPr>
                 <a:picLocks noChangeAspect="1"/>
               </p:cNvPicPr>
@@ -35181,7 +35181,7 @@
           </p:pic>
           <p:sp>
             <p:nvSpPr>
-              <p:cNvPr id="254" name="文本框 253"/>
+              <p:cNvPr id="254" name="Text Box 253"/>
               <p:cNvSpPr txBox="1"/>
               <p:nvPr/>
             </p:nvSpPr>
@@ -35210,7 +35210,7 @@
           </p:sp>
           <p:pic>
             <p:nvPicPr>
-              <p:cNvPr id="255" name="图片 254" descr="灯泡"/>
+              <p:cNvPr id="255" name="Picture 254" descr="Lightbulb"/>
               <p:cNvPicPr>
                 <a:picLocks noChangeAspect="1"/>
               </p:cNvPicPr>
@@ -35244,7 +35244,7 @@
           </p:pic>
           <p:sp>
             <p:nvSpPr>
-              <p:cNvPr id="256" name="文本框 255"/>
+              <p:cNvPr id="256" name="Text Box 255"/>
               <p:cNvSpPr txBox="1"/>
               <p:nvPr/>
             </p:nvSpPr>
@@ -35273,7 +35273,7 @@
           </p:sp>
           <p:sp>
             <p:nvSpPr>
-              <p:cNvPr id="259" name="文本框 258"/>
+              <p:cNvPr id="259" name="Text Box 258"/>
               <p:cNvSpPr txBox="1"/>
               <p:nvPr/>
             </p:nvSpPr>
@@ -35302,7 +35302,7 @@
           </p:sp>
           <p:pic>
             <p:nvPicPr>
-              <p:cNvPr id="262" name="图片 261" descr="正态分布"/>
+              <p:cNvPr id="262" name="Picture 261" descr="Normal Distribution"/>
               <p:cNvPicPr>
                 <a:picLocks noChangeAspect="1"/>
               </p:cNvPicPr>
@@ -35336,7 +35336,7 @@
           </p:pic>
           <p:pic>
             <p:nvPicPr>
-              <p:cNvPr id="263" name="图片 262" descr="禁止"/>
+              <p:cNvPr id="263" name="Picture 262" descr="Prohibition"/>
               <p:cNvPicPr>
                 <a:picLocks noChangeAspect="1"/>
               </p:cNvPicPr>
@@ -35370,7 +35370,7 @@
           </p:pic>
           <p:sp>
             <p:nvSpPr>
-              <p:cNvPr id="265" name="圆角矩形 264"/>
+              <p:cNvPr id="265" name="Rounded Rectangle 264"/>
               <p:cNvSpPr/>
               <p:nvPr/>
             </p:nvSpPr>
@@ -35422,7 +35422,7 @@
         </p:grpSp>
         <p:sp>
           <p:nvSpPr>
-            <p:cNvPr id="319" name="圆角矩形 318"/>
+            <p:cNvPr id="319" name="Rounded Rectangle 318"/>
             <p:cNvSpPr/>
             <p:nvPr/>
           </p:nvSpPr>
@@ -35472,7 +35472,7 @@
         </p:sp>
         <p:pic>
           <p:nvPicPr>
-            <p:cNvPr id="268" name="图片 267" descr="尺子"/>
+            <p:cNvPr id="268" name="Picture 267" descr="Ruler"/>
             <p:cNvPicPr>
               <a:picLocks noChangeAspect="1"/>
             </p:cNvPicPr>
@@ -35506,7 +35506,7 @@
         </p:pic>
         <p:pic>
           <p:nvPicPr>
-            <p:cNvPr id="269" name="图片 268" descr="大脑"/>
+            <p:cNvPr id="269" name="Picture 268" descr="Brain"/>
             <p:cNvPicPr>
               <a:picLocks noChangeAspect="1"/>
             </p:cNvPicPr>
@@ -35540,7 +35540,7 @@
         </p:pic>
         <p:pic>
           <p:nvPicPr>
-            <p:cNvPr id="270" name="图片 269" descr="浮尘"/>
+            <p:cNvPr id="270" name="Picture 269" descr="Dust"/>
             <p:cNvPicPr>
               <a:picLocks noChangeAspect="1"/>
             </p:cNvPicPr>
@@ -35574,7 +35574,7 @@
         </p:pic>
         <p:pic>
           <p:nvPicPr>
-            <p:cNvPr id="271" name="图片 270" descr="神经网络2"/>
+            <p:cNvPr id="271" name="Picture 270" descr="Neural Network 2"/>
             <p:cNvPicPr>
               <a:picLocks noChangeAspect="1"/>
             </p:cNvPicPr>
@@ -35608,7 +35608,7 @@
         </p:pic>
         <p:sp>
           <p:nvSpPr>
-            <p:cNvPr id="272" name="文本框 271"/>
+            <p:cNvPr id="272" name="Text Box 271"/>
             <p:cNvSpPr txBox="1"/>
             <p:nvPr/>
           </p:nvSpPr>
@@ -35637,7 +35637,7 @@
         </p:sp>
         <p:sp>
           <p:nvSpPr>
-            <p:cNvPr id="273" name="文本框 272"/>
+            <p:cNvPr id="273" name="Text Box 272"/>
             <p:cNvSpPr txBox="1"/>
             <p:nvPr/>
           </p:nvSpPr>
@@ -35678,7 +35678,7 @@
         </p:sp>
         <p:sp>
           <p:nvSpPr>
-            <p:cNvPr id="275" name="文本框 274"/>
+            <p:cNvPr id="275" name="Text Box 274"/>
             <p:cNvSpPr txBox="1"/>
             <p:nvPr/>
           </p:nvSpPr>
@@ -35707,7 +35707,7 @@
         </p:sp>
         <p:sp>
           <p:nvSpPr>
-            <p:cNvPr id="276" name="文本框 275"/>
+            <p:cNvPr id="276" name="Text Box 275"/>
             <p:cNvSpPr txBox="1"/>
             <p:nvPr/>
           </p:nvSpPr>
@@ -35736,7 +35736,7 @@
         </p:sp>
         <p:sp>
           <p:nvSpPr>
-            <p:cNvPr id="277" name="文本框 276"/>
+            <p:cNvPr id="277" name="Text Box 276"/>
             <p:cNvSpPr txBox="1"/>
             <p:nvPr/>
           </p:nvSpPr>
@@ -35783,7 +35783,7 @@
         </p:sp>
         <p:sp>
           <p:nvSpPr>
-            <p:cNvPr id="296" name="文本框 295"/>
+            <p:cNvPr id="296" name="Text Box 295"/>
             <p:cNvSpPr txBox="1"/>
             <p:nvPr/>
           </p:nvSpPr>
@@ -35812,7 +35812,7 @@
         </p:sp>
         <p:pic>
           <p:nvPicPr>
-            <p:cNvPr id="308" name="图片 307"/>
+            <p:cNvPr id="308" name="Picture 307"/>
             <p:cNvPicPr>
               <a:picLocks noChangeAspect="1"/>
             </p:cNvPicPr>
@@ -35850,7 +35850,7 @@
         </p:pic>
         <p:sp>
           <p:nvSpPr>
-            <p:cNvPr id="320" name="圆角矩形 319"/>
+            <p:cNvPr id="320" name="Rounded Rectangle 319"/>
             <p:cNvSpPr/>
             <p:nvPr/>
           </p:nvSpPr>
@@ -35909,7 +35909,7 @@
         </p:sp>
         <p:sp>
           <p:nvSpPr>
-            <p:cNvPr id="323" name="文本框 322"/>
+            <p:cNvPr id="323" name="Text Box 322"/>
             <p:cNvSpPr txBox="1"/>
             <p:nvPr/>
           </p:nvSpPr>
@@ -35938,7 +35938,7 @@
         </p:sp>
         <p:sp>
           <p:nvSpPr>
-            <p:cNvPr id="324" name="文本框 323"/>
+            <p:cNvPr id="324" name="Text Box 323"/>
             <p:cNvSpPr txBox="1"/>
             <p:nvPr/>
           </p:nvSpPr>
@@ -35976,7 +35976,7 @@
         </p:sp>
         <p:sp>
           <p:nvSpPr>
-            <p:cNvPr id="325" name="文本框 324"/>
+            <p:cNvPr id="325" name="Text Box 324"/>
             <p:cNvSpPr txBox="1"/>
             <p:nvPr/>
           </p:nvSpPr>
@@ -36008,7 +36008,7 @@
         </p:sp>
         <p:sp>
           <p:nvSpPr>
-            <p:cNvPr id="336" name="文本框 335"/>
+            <p:cNvPr id="336" name="Text Box 335"/>
             <p:cNvSpPr txBox="1"/>
             <p:nvPr/>
           </p:nvSpPr>
@@ -36040,7 +36040,7 @@
         </p:sp>
         <p:sp>
           <p:nvSpPr>
-            <p:cNvPr id="342" name="下箭头 341"/>
+            <p:cNvPr id="342" name="Down Arrow 341"/>
             <p:cNvSpPr/>
             <p:nvPr>
               <p:custDataLst>
@@ -36092,15 +36092,15 @@
             <a:p>
               <a:pPr algn="ctr"/>
               <a:endParaRPr lang="zh-CN" altLang="en-US" b="1">
-                <a:latin typeface="微软雅黑" panose="020B0503020204020204" charset="-122"/>
-                <a:ea typeface="微软雅黑" panose="020B0503020204020204" charset="-122"/>
+                <a:latin typeface="Microsoft YaHei" panose="020B0503020204020204" charset="-122"/>
+                <a:ea typeface="Microsoft YaHei" panose="020B0503020204020204" charset="-122"/>
               </a:endParaRPr>
             </a:p>
           </p:txBody>
         </p:sp>
         <p:cxnSp>
           <p:nvCxnSpPr>
-            <p:cNvPr id="357" name="直接箭头连接符 356"/>
+            <p:cNvPr id="357" name="Straight Arrow Connector 356"/>
             <p:cNvCxnSpPr/>
             <p:nvPr/>
           </p:nvCxnSpPr>
@@ -36136,7 +36136,7 @@
         </p:cxnSp>
         <p:cxnSp>
           <p:nvCxnSpPr>
-            <p:cNvPr id="358" name="直接箭头连接符 357"/>
+            <p:cNvPr id="358" name="Straight Arrow Connector 357"/>
             <p:cNvCxnSpPr/>
             <p:nvPr/>
           </p:nvCxnSpPr>
@@ -36172,7 +36172,7 @@
         </p:cxnSp>
         <p:cxnSp>
           <p:nvCxnSpPr>
-            <p:cNvPr id="360" name="肘形连接符 359"/>
+            <p:cNvPr id="360" name="Elbow Connector 359"/>
             <p:cNvCxnSpPr/>
             <p:nvPr/>
           </p:nvCxnSpPr>
@@ -36210,7 +36210,7 @@
         </p:cxnSp>
         <p:pic>
           <p:nvPicPr>
-            <p:cNvPr id="361" name="图片 360" descr="齿轮"/>
+            <p:cNvPr id="361" name="Picture 360" descr="Gear"/>
             <p:cNvPicPr>
               <a:picLocks noChangeAspect="1"/>
             </p:cNvPicPr>
@@ -36244,7 +36244,7 @@
         </p:pic>
         <p:sp>
           <p:nvSpPr>
-            <p:cNvPr id="417" name="文本框 416"/>
+            <p:cNvPr id="417" name="Text Box 416"/>
             <p:cNvSpPr txBox="1"/>
             <p:nvPr/>
           </p:nvSpPr>
@@ -36285,7 +36285,7 @@
         </p:sp>
         <p:grpSp>
           <p:nvGrpSpPr>
-            <p:cNvPr id="426" name="组合 425"/>
+            <p:cNvPr id="426" name="Group 425"/>
             <p:cNvGrpSpPr/>
             <p:nvPr/>
           </p:nvGrpSpPr>
@@ -36299,7 +36299,7 @@
           </p:grpSpPr>
           <p:grpSp>
             <p:nvGrpSpPr>
-              <p:cNvPr id="425" name="组合 424"/>
+              <p:cNvPr id="425" name="Group 424"/>
               <p:cNvGrpSpPr/>
               <p:nvPr/>
             </p:nvGrpSpPr>
@@ -36313,7 +36313,7 @@
             </p:grpSpPr>
             <p:sp>
               <p:nvSpPr>
-                <p:cNvPr id="418" name="文本框 417"/>
+                <p:cNvPr id="418" name="Text Box 417"/>
                 <p:cNvSpPr txBox="1"/>
                 <p:nvPr/>
               </p:nvSpPr>
@@ -36362,7 +36362,7 @@
             </p:sp>
             <p:sp>
               <p:nvSpPr>
-                <p:cNvPr id="419" name="左大括号 418"/>
+                <p:cNvPr id="419" name="Left Brace 418"/>
                 <p:cNvSpPr/>
                 <p:nvPr/>
               </p:nvSpPr>
@@ -36405,7 +36405,7 @@
             </p:sp>
             <p:sp>
               <p:nvSpPr>
-                <p:cNvPr id="420" name="文本框 419"/>
+                <p:cNvPr id="420" name="Text Box 419"/>
                 <p:cNvSpPr txBox="1"/>
                 <p:nvPr/>
               </p:nvSpPr>
@@ -36434,7 +36434,7 @@
             </p:sp>
             <p:pic>
               <p:nvPicPr>
-                <p:cNvPr id="421" name="图片 420" descr="统计表"/>
+                <p:cNvPr id="421" name="Picture 420" descr="Statistics Table"/>
                 <p:cNvPicPr>
                   <a:picLocks noChangeAspect="1"/>
                 </p:cNvPicPr>
@@ -36468,7 +36468,7 @@
             </p:pic>
             <p:pic>
               <p:nvPicPr>
-                <p:cNvPr id="422" name="图片 421" descr="勋章"/>
+                <p:cNvPr id="422" name="Picture 421" descr="Medal"/>
                 <p:cNvPicPr>
                   <a:picLocks noChangeAspect="1"/>
                 </p:cNvPicPr>
@@ -36502,7 +36502,7 @@
             </p:pic>
             <p:pic>
               <p:nvPicPr>
-                <p:cNvPr id="423" name="图片 422" descr="盾牌"/>
+                <p:cNvPr id="423" name="Picture 422" descr="Shield"/>
                 <p:cNvPicPr>
                   <a:picLocks noChangeAspect="1"/>
                 </p:cNvPicPr>
@@ -36537,7 +36537,7 @@
           </p:grpSp>
           <p:sp>
             <p:nvSpPr>
-              <p:cNvPr id="424" name="文本框 423"/>
+              <p:cNvPr id="424" name="Text Box 423"/>
               <p:cNvSpPr txBox="1"/>
               <p:nvPr/>
             </p:nvSpPr>
@@ -36575,7 +36575,7 @@
         </p:grpSp>
         <p:sp>
           <p:nvSpPr>
-            <p:cNvPr id="427" name="下箭头 426"/>
+            <p:cNvPr id="427" name="Down Arrow 426"/>
             <p:cNvSpPr/>
             <p:nvPr>
               <p:custDataLst>
@@ -36627,15 +36627,15 @@
             <a:p>
               <a:pPr algn="ctr"/>
               <a:endParaRPr lang="zh-CN" altLang="en-US" b="1">
-                <a:latin typeface="微软雅黑" panose="020B0503020204020204" charset="-122"/>
-                <a:ea typeface="微软雅黑" panose="020B0503020204020204" charset="-122"/>
+                <a:latin typeface="Microsoft YaHei" panose="020B0503020204020204" charset="-122"/>
+                <a:ea typeface="Microsoft YaHei" panose="020B0503020204020204" charset="-122"/>
               </a:endParaRPr>
             </a:p>
           </p:txBody>
         </p:sp>
         <p:sp>
           <p:nvSpPr>
-            <p:cNvPr id="428" name="文本框 427"/>
+            <p:cNvPr id="428" name="Text Box 427"/>
             <p:cNvSpPr txBox="1"/>
             <p:nvPr/>
           </p:nvSpPr>
@@ -36676,7 +36676,7 @@
         </p:sp>
         <p:sp>
           <p:nvSpPr>
-            <p:cNvPr id="429" name="文本框 428"/>
+            <p:cNvPr id="429" name="Text Box 428"/>
             <p:cNvSpPr txBox="1"/>
             <p:nvPr/>
           </p:nvSpPr>
@@ -36717,7 +36717,7 @@
         </p:sp>
         <p:sp>
           <p:nvSpPr>
-            <p:cNvPr id="431" name="文本框 430"/>
+            <p:cNvPr id="431" name="Text Box 430"/>
             <p:cNvSpPr txBox="1"/>
             <p:nvPr/>
           </p:nvSpPr>
@@ -36760,7 +36760,7 @@
         </p:sp>
         <p:sp>
           <p:nvSpPr>
-            <p:cNvPr id="432" name="文本框 431"/>
+            <p:cNvPr id="432" name="Text Box 431"/>
             <p:cNvSpPr txBox="1"/>
             <p:nvPr/>
           </p:nvSpPr>
@@ -36801,7 +36801,7 @@
         </p:sp>
         <p:sp>
           <p:nvSpPr>
-            <p:cNvPr id="433" name="文本框 432"/>
+            <p:cNvPr id="433" name="Text Box 432"/>
             <p:cNvSpPr txBox="1"/>
             <p:nvPr/>
           </p:nvSpPr>
@@ -36842,7 +36842,7 @@
         </p:sp>
         <p:sp>
           <p:nvSpPr>
-            <p:cNvPr id="434" name="文本框 433"/>
+            <p:cNvPr id="434" name="Text Box 433"/>
             <p:cNvSpPr txBox="1"/>
             <p:nvPr/>
           </p:nvSpPr>
@@ -36883,7 +36883,7 @@
         </p:sp>
         <p:sp>
           <p:nvSpPr>
-            <p:cNvPr id="436" name="下箭头 435"/>
+            <p:cNvPr id="436" name="Down Arrow 435"/>
             <p:cNvSpPr/>
             <p:nvPr>
               <p:custDataLst>
@@ -36935,15 +36935,15 @@
             <a:p>
               <a:pPr algn="ctr"/>
               <a:endParaRPr lang="zh-CN" altLang="en-US" b="1">
-                <a:latin typeface="微软雅黑" panose="020B0503020204020204" charset="-122"/>
-                <a:ea typeface="微软雅黑" panose="020B0503020204020204" charset="-122"/>
+                <a:latin typeface="Microsoft YaHei" panose="020B0503020204020204" charset="-122"/>
+                <a:ea typeface="Microsoft YaHei" panose="020B0503020204020204" charset="-122"/>
               </a:endParaRPr>
             </a:p>
           </p:txBody>
         </p:sp>
         <p:pic>
           <p:nvPicPr>
-            <p:cNvPr id="437" name="图片 436"/>
+            <p:cNvPr id="437" name="Picture 436"/>
             <p:cNvPicPr>
               <a:picLocks noChangeAspect="1"/>
             </p:cNvPicPr>
@@ -36989,7 +36989,7 @@
         </p:pic>
         <p:sp>
           <p:nvSpPr>
-            <p:cNvPr id="438" name="文本框 437"/>
+            <p:cNvPr id="438" name="Text Box 437"/>
             <p:cNvSpPr txBox="1"/>
             <p:nvPr/>
           </p:nvSpPr>
@@ -37026,7 +37026,7 @@
         </p:sp>
         <p:pic>
           <p:nvPicPr>
-            <p:cNvPr id="439" name="图片 438"/>
+            <p:cNvPr id="439" name="Picture 438"/>
             <p:cNvPicPr>
               <a:picLocks noChangeAspect="1"/>
             </p:cNvPicPr>
@@ -37071,7 +37071,7 @@
         </p:pic>
         <p:pic>
           <p:nvPicPr>
-            <p:cNvPr id="440" name="图片 439"/>
+            <p:cNvPr id="440" name="Picture 439"/>
             <p:cNvPicPr>
               <a:picLocks noChangeAspect="1"/>
             </p:cNvPicPr>
@@ -37116,7 +37116,7 @@
         </p:pic>
         <p:pic>
           <p:nvPicPr>
-            <p:cNvPr id="441" name="图片 440"/>
+            <p:cNvPr id="441" name="Picture 440"/>
             <p:cNvPicPr>
               <a:picLocks noChangeAspect="1"/>
             </p:cNvPicPr>
@@ -37161,7 +37161,7 @@
         </p:pic>
         <p:sp>
           <p:nvSpPr>
-            <p:cNvPr id="442" name="文本框 441"/>
+            <p:cNvPr id="442" name="Text Box 441"/>
             <p:cNvSpPr txBox="1"/>
             <p:nvPr/>
           </p:nvSpPr>
@@ -37190,7 +37190,7 @@
         </p:sp>
         <p:sp>
           <p:nvSpPr>
-            <p:cNvPr id="444" name="圆角矩形 443"/>
+            <p:cNvPr id="444" name="Rounded Rectangle 443"/>
             <p:cNvSpPr/>
             <p:nvPr/>
           </p:nvSpPr>
@@ -37248,7 +37248,7 @@
         </p:sp>
         <p:grpSp>
           <p:nvGrpSpPr>
-            <p:cNvPr id="416" name="组合 415"/>
+            <p:cNvPr id="416" name="Group 415"/>
             <p:cNvGrpSpPr/>
             <p:nvPr/>
           </p:nvGrpSpPr>
@@ -37262,7 +37262,7 @@
           </p:grpSpPr>
           <p:grpSp>
             <p:nvGrpSpPr>
-              <p:cNvPr id="408" name="组合 407"/>
+              <p:cNvPr id="408" name="Group 407"/>
               <p:cNvGrpSpPr/>
               <p:nvPr/>
             </p:nvGrpSpPr>
@@ -37276,7 +37276,7 @@
             </p:grpSpPr>
             <p:grpSp>
               <p:nvGrpSpPr>
-                <p:cNvPr id="382" name="组合 381"/>
+                <p:cNvPr id="382" name="Group 381"/>
                 <p:cNvGrpSpPr/>
                 <p:nvPr/>
               </p:nvGrpSpPr>
@@ -37290,7 +37290,7 @@
               </p:grpSpPr>
               <p:sp>
                 <p:nvSpPr>
-                  <p:cNvPr id="383" name="圆角矩形 382"/>
+                  <p:cNvPr id="383" name="Rounded Rectangle 382"/>
                   <p:cNvSpPr/>
                   <p:nvPr/>
                 </p:nvSpPr>
@@ -37338,7 +37338,7 @@
               </p:sp>
               <p:sp>
                 <p:nvSpPr>
-                  <p:cNvPr id="385" name="文本框 384"/>
+                  <p:cNvPr id="385" name="Text Box 384"/>
                   <p:cNvSpPr txBox="1"/>
                   <p:nvPr/>
                 </p:nvSpPr>
@@ -37368,7 +37368,7 @@
             </p:grpSp>
             <p:grpSp>
               <p:nvGrpSpPr>
-                <p:cNvPr id="386" name="组合 385"/>
+                <p:cNvPr id="386" name="Group 385"/>
                 <p:cNvGrpSpPr/>
                 <p:nvPr/>
               </p:nvGrpSpPr>
@@ -37382,7 +37382,7 @@
               </p:grpSpPr>
               <p:sp>
                 <p:nvSpPr>
-                  <p:cNvPr id="393" name="圆角矩形 392"/>
+                  <p:cNvPr id="393" name="Rounded Rectangle 392"/>
                   <p:cNvSpPr/>
                   <p:nvPr/>
                 </p:nvSpPr>
@@ -37430,7 +37430,7 @@
               </p:sp>
               <p:sp>
                 <p:nvSpPr>
-                  <p:cNvPr id="398" name="文本框 397"/>
+                  <p:cNvPr id="398" name="Text Box 397"/>
                   <p:cNvSpPr txBox="1"/>
                   <p:nvPr/>
                 </p:nvSpPr>
@@ -37461,7 +37461,7 @@
           </p:grpSp>
           <p:grpSp>
             <p:nvGrpSpPr>
-              <p:cNvPr id="365" name="组合 364"/>
+              <p:cNvPr id="365" name="Group 364"/>
               <p:cNvGrpSpPr/>
               <p:nvPr/>
             </p:nvGrpSpPr>
@@ -37475,7 +37475,7 @@
             </p:grpSpPr>
             <p:sp>
               <p:nvSpPr>
-                <p:cNvPr id="363" name="圆角矩形 362"/>
+                <p:cNvPr id="363" name="Rounded Rectangle 362"/>
                 <p:cNvSpPr/>
                 <p:nvPr/>
               </p:nvSpPr>
@@ -37523,7 +37523,7 @@
             </p:sp>
             <p:sp>
               <p:nvSpPr>
-                <p:cNvPr id="364" name="文本框 363"/>
+                <p:cNvPr id="364" name="Text Box 363"/>
                 <p:cNvSpPr txBox="1"/>
                 <p:nvPr/>
               </p:nvSpPr>
@@ -37553,7 +37553,7 @@
           </p:grpSp>
           <p:grpSp>
             <p:nvGrpSpPr>
-              <p:cNvPr id="366" name="组合 365"/>
+              <p:cNvPr id="366" name="Group 365"/>
               <p:cNvGrpSpPr/>
               <p:nvPr/>
             </p:nvGrpSpPr>
@@ -37567,7 +37567,7 @@
             </p:grpSpPr>
             <p:sp>
               <p:nvSpPr>
-                <p:cNvPr id="367" name="圆角矩形 366"/>
+                <p:cNvPr id="367" name="Rounded Rectangle 366"/>
                 <p:cNvSpPr/>
                 <p:nvPr/>
               </p:nvSpPr>
@@ -37615,7 +37615,7 @@
             </p:sp>
             <p:sp>
               <p:nvSpPr>
-                <p:cNvPr id="368" name="文本框 367"/>
+                <p:cNvPr id="368" name="Text Box 367"/>
                 <p:cNvSpPr txBox="1"/>
                 <p:nvPr/>
               </p:nvSpPr>
@@ -37645,7 +37645,7 @@
           </p:grpSp>
           <p:grpSp>
             <p:nvGrpSpPr>
-              <p:cNvPr id="370" name="组合 369"/>
+              <p:cNvPr id="370" name="Group 369"/>
               <p:cNvGrpSpPr/>
               <p:nvPr/>
             </p:nvGrpSpPr>
@@ -37659,7 +37659,7 @@
             </p:grpSpPr>
             <p:sp>
               <p:nvSpPr>
-                <p:cNvPr id="371" name="圆角矩形 370"/>
+                <p:cNvPr id="371" name="Rounded Rectangle 370"/>
                 <p:cNvSpPr/>
                 <p:nvPr/>
               </p:nvSpPr>
@@ -37707,7 +37707,7 @@
             </p:sp>
             <p:sp>
               <p:nvSpPr>
-                <p:cNvPr id="372" name="文本框 371"/>
+                <p:cNvPr id="372" name="Text Box 371"/>
                 <p:cNvSpPr txBox="1"/>
                 <p:nvPr/>
               </p:nvSpPr>
@@ -37737,7 +37737,7 @@
           </p:grpSp>
           <p:grpSp>
             <p:nvGrpSpPr>
-              <p:cNvPr id="379" name="组合 378"/>
+              <p:cNvPr id="379" name="Group 378"/>
               <p:cNvGrpSpPr/>
               <p:nvPr/>
             </p:nvGrpSpPr>
@@ -37751,7 +37751,7 @@
             </p:grpSpPr>
             <p:sp>
               <p:nvSpPr>
-                <p:cNvPr id="380" name="圆角矩形 379"/>
+                <p:cNvPr id="380" name="Rounded Rectangle 379"/>
                 <p:cNvSpPr/>
                 <p:nvPr/>
               </p:nvSpPr>
@@ -37799,7 +37799,7 @@
             </p:sp>
             <p:sp>
               <p:nvSpPr>
-                <p:cNvPr id="381" name="文本框 380"/>
+                <p:cNvPr id="381" name="Text Box 380"/>
                 <p:cNvSpPr txBox="1"/>
                 <p:nvPr/>
               </p:nvSpPr>
@@ -37829,7 +37829,7 @@
           </p:grpSp>
           <p:sp>
             <p:nvSpPr>
-              <p:cNvPr id="405" name="圆角矩形 404"/>
+              <p:cNvPr id="405" name="Rounded Rectangle 404"/>
               <p:cNvSpPr/>
               <p:nvPr/>
             </p:nvSpPr>
@@ -37877,7 +37877,7 @@
           </p:sp>
           <p:sp>
             <p:nvSpPr>
-              <p:cNvPr id="406" name="文本框 405"/>
+              <p:cNvPr id="406" name="Text Box 405"/>
               <p:cNvSpPr txBox="1"/>
               <p:nvPr/>
             </p:nvSpPr>
@@ -37910,7 +37910,7 @@
           </p:sp>
           <p:sp>
             <p:nvSpPr>
-              <p:cNvPr id="409" name="文本框 408"/>
+              <p:cNvPr id="409" name="Text Box 408"/>
               <p:cNvSpPr txBox="1"/>
               <p:nvPr/>
             </p:nvSpPr>
@@ -37959,7 +37959,7 @@
           </p:sp>
           <p:sp>
             <p:nvSpPr>
-              <p:cNvPr id="410" name="文本框 409"/>
+              <p:cNvPr id="410" name="Text Box 409"/>
               <p:cNvSpPr txBox="1"/>
               <p:nvPr/>
             </p:nvSpPr>
@@ -37992,7 +37992,7 @@
           </p:sp>
           <p:sp>
             <p:nvSpPr>
-              <p:cNvPr id="411" name="圆角矩形 410"/>
+              <p:cNvPr id="411" name="Rounded Rectangle 410"/>
               <p:cNvSpPr/>
               <p:nvPr/>
             </p:nvSpPr>
@@ -38040,7 +38040,7 @@
           </p:sp>
           <p:sp>
             <p:nvSpPr>
-              <p:cNvPr id="412" name="文本框 411"/>
+              <p:cNvPr id="412" name="Text Box 411"/>
               <p:cNvSpPr txBox="1"/>
               <p:nvPr/>
             </p:nvSpPr>
@@ -38070,7 +38070,7 @@
         </p:grpSp>
         <p:sp>
           <p:nvSpPr>
-            <p:cNvPr id="415" name="文本框 414"/>
+            <p:cNvPr id="415" name="Text Box 414"/>
             <p:cNvSpPr txBox="1"/>
             <p:nvPr/>
           </p:nvSpPr>
@@ -38111,7 +38111,7 @@
         </p:sp>
         <p:sp>
           <p:nvSpPr>
-            <p:cNvPr id="445" name="圆角矩形 444"/>
+            <p:cNvPr id="445" name="Rounded Rectangle 444"/>
             <p:cNvSpPr/>
             <p:nvPr/>
           </p:nvSpPr>
@@ -38169,7 +38169,7 @@
         </p:sp>
         <p:sp>
           <p:nvSpPr>
-            <p:cNvPr id="446" name="圆角矩形 445"/>
+            <p:cNvPr id="446" name="Rounded Rectangle 445"/>
             <p:cNvSpPr/>
             <p:nvPr/>
           </p:nvSpPr>
@@ -38227,7 +38227,7 @@
         </p:sp>
         <p:sp>
           <p:nvSpPr>
-            <p:cNvPr id="447" name="圆角矩形 446"/>
+            <p:cNvPr id="447" name="Rounded Rectangle 446"/>
             <p:cNvSpPr/>
             <p:nvPr/>
           </p:nvSpPr>
@@ -38285,7 +38285,7 @@
         </p:sp>
         <p:pic>
           <p:nvPicPr>
-            <p:cNvPr id="449" name="图片 448"/>
+            <p:cNvPr id="449" name="Picture 448"/>
             <p:cNvPicPr>
               <a:picLocks noChangeAspect="1"/>
             </p:cNvPicPr>
@@ -38330,7 +38330,7 @@
         </p:pic>
         <p:sp>
           <p:nvSpPr>
-            <p:cNvPr id="450" name="文本框 449"/>
+            <p:cNvPr id="450" name="Text Box 449"/>
             <p:cNvSpPr txBox="1"/>
             <p:nvPr/>
           </p:nvSpPr>
@@ -38388,7 +38388,7 @@
       </p:grpSpPr>
       <p:sp>
         <p:nvSpPr>
-          <p:cNvPr id="199" name="矩形 198"/>
+          <p:cNvPr id="199" name="Rectangle 198"/>
           <p:cNvSpPr/>
           <p:nvPr/>
         </p:nvSpPr>
@@ -38434,7 +38434,7 @@
       </p:sp>
       <p:cxnSp>
         <p:nvCxnSpPr>
-          <p:cNvPr id="219" name="直接连接符 218"/>
+          <p:cNvPr id="219" name="Straight Connector 218"/>
           <p:cNvCxnSpPr/>
           <p:nvPr/>
         </p:nvCxnSpPr>
@@ -38472,7 +38472,7 @@
       </p:cxnSp>
       <p:cxnSp>
         <p:nvCxnSpPr>
-          <p:cNvPr id="218" name="直接连接符 217"/>
+          <p:cNvPr id="218" name="Straight Connector 217"/>
           <p:cNvCxnSpPr/>
           <p:nvPr/>
         </p:nvCxnSpPr>
@@ -38510,7 +38510,7 @@
       </p:cxnSp>
       <p:sp>
         <p:nvSpPr>
-          <p:cNvPr id="215" name="圆角矩形 214"/>
+          <p:cNvPr id="215" name="Rounded Rectangle 214"/>
           <p:cNvSpPr/>
           <p:nvPr/>
         </p:nvSpPr>
@@ -38558,7 +38558,7 @@
       </p:sp>
       <p:sp>
         <p:nvSpPr>
-          <p:cNvPr id="213" name="圆角矩形 212"/>
+          <p:cNvPr id="213" name="Rounded Rectangle 212"/>
           <p:cNvSpPr/>
           <p:nvPr/>
         </p:nvSpPr>
@@ -38606,7 +38606,7 @@
       </p:sp>
       <p:sp>
         <p:nvSpPr>
-          <p:cNvPr id="212" name="圆角矩形 211"/>
+          <p:cNvPr id="212" name="Rounded Rectangle 211"/>
           <p:cNvSpPr/>
           <p:nvPr/>
         </p:nvSpPr>
@@ -38654,7 +38654,7 @@
       </p:sp>
       <p:sp>
         <p:nvSpPr>
-          <p:cNvPr id="211" name="圆角矩形 210"/>
+          <p:cNvPr id="211" name="Rounded Rectangle 210"/>
           <p:cNvSpPr/>
           <p:nvPr/>
         </p:nvSpPr>
@@ -38702,7 +38702,7 @@
       </p:sp>
       <p:pic>
         <p:nvPicPr>
-          <p:cNvPr id="191" name="图片 190"/>
+          <p:cNvPr id="191" name="Picture 190"/>
           <p:cNvPicPr>
             <a:picLocks noChangeAspect="1"/>
           </p:cNvPicPr>
@@ -38740,7 +38740,7 @@
       </p:pic>
       <p:pic>
         <p:nvPicPr>
-          <p:cNvPr id="190" name="图片 189"/>
+          <p:cNvPr id="190" name="Picture 189"/>
           <p:cNvPicPr>
             <a:picLocks noChangeAspect="1"/>
           </p:cNvPicPr>
@@ -38778,7 +38778,7 @@
       </p:pic>
       <p:grpSp>
         <p:nvGrpSpPr>
-          <p:cNvPr id="87" name="组合 86"/>
+          <p:cNvPr id="87" name="Group 86"/>
           <p:cNvGrpSpPr/>
           <p:nvPr/>
         </p:nvGrpSpPr>
@@ -38792,7 +38792,7 @@
         </p:grpSpPr>
         <p:pic>
           <p:nvPicPr>
-            <p:cNvPr id="3" name="图片 2"/>
+            <p:cNvPr id="3" name="Picture 2"/>
             <p:cNvPicPr>
               <a:picLocks noChangeAspect="1"/>
             </p:cNvPicPr>
@@ -38816,7 +38816,7 @@
         </p:pic>
         <p:sp>
           <p:nvSpPr>
-            <p:cNvPr id="4" name="矩形 3"/>
+            <p:cNvPr id="4" name="Rectangle 3"/>
             <p:cNvSpPr/>
             <p:nvPr/>
           </p:nvSpPr>
@@ -38862,7 +38862,7 @@
         </p:sp>
         <p:sp>
           <p:nvSpPr>
-            <p:cNvPr id="5" name="矩形 4"/>
+            <p:cNvPr id="5" name="Rectangle 4"/>
             <p:cNvSpPr/>
             <p:nvPr/>
           </p:nvSpPr>
@@ -38908,7 +38908,7 @@
         </p:sp>
         <p:sp>
           <p:nvSpPr>
-            <p:cNvPr id="6" name="矩形 5"/>
+            <p:cNvPr id="6" name="Rectangle 5"/>
             <p:cNvSpPr/>
             <p:nvPr/>
           </p:nvSpPr>
@@ -38955,7 +38955,7 @@
       </p:grpSp>
       <p:grpSp>
         <p:nvGrpSpPr>
-          <p:cNvPr id="149" name="组合 148"/>
+          <p:cNvPr id="149" name="Group 148"/>
           <p:cNvGrpSpPr/>
           <p:nvPr/>
         </p:nvGrpSpPr>
@@ -38969,7 +38969,7 @@
         </p:grpSpPr>
         <p:grpSp>
           <p:nvGrpSpPr>
-            <p:cNvPr id="102" name="组合 101"/>
+            <p:cNvPr id="102" name="Group 101"/>
             <p:cNvGrpSpPr/>
             <p:nvPr/>
           </p:nvGrpSpPr>
@@ -38983,7 +38983,7 @@
           </p:grpSpPr>
           <p:pic>
             <p:nvPicPr>
-              <p:cNvPr id="82" name="图片 81"/>
+              <p:cNvPr id="82" name="Picture 81"/>
               <p:cNvPicPr>
                 <a:picLocks noChangeAspect="1"/>
               </p:cNvPicPr>
@@ -39007,7 +39007,7 @@
           </p:pic>
           <p:sp>
             <p:nvSpPr>
-              <p:cNvPr id="83" name="文本框 82"/>
+              <p:cNvPr id="83" name="Text Box 82"/>
               <p:cNvSpPr txBox="1"/>
               <p:nvPr/>
             </p:nvSpPr>
@@ -39041,7 +39041,7 @@
         </p:grpSp>
         <p:grpSp>
           <p:nvGrpSpPr>
-            <p:cNvPr id="99" name="组合 98"/>
+            <p:cNvPr id="99" name="Group 98"/>
             <p:cNvGrpSpPr/>
             <p:nvPr/>
           </p:nvGrpSpPr>
@@ -39055,7 +39055,7 @@
           </p:grpSpPr>
           <p:sp>
             <p:nvSpPr>
-              <p:cNvPr id="94" name="圆角矩形 93"/>
+              <p:cNvPr id="94" name="Rounded Rectangle 93"/>
               <p:cNvSpPr/>
               <p:nvPr/>
             </p:nvSpPr>
@@ -39103,7 +39103,7 @@
           </p:sp>
           <p:sp>
             <p:nvSpPr>
-              <p:cNvPr id="89" name="圆角矩形 88"/>
+              <p:cNvPr id="89" name="Rounded Rectangle 88"/>
               <p:cNvSpPr/>
               <p:nvPr/>
             </p:nvSpPr>
@@ -39154,7 +39154,7 @@
           </p:sp>
           <p:sp>
             <p:nvSpPr>
-              <p:cNvPr id="90" name="圆角矩形 89"/>
+              <p:cNvPr id="90" name="Rounded Rectangle 89"/>
               <p:cNvSpPr/>
               <p:nvPr/>
             </p:nvSpPr>
@@ -39205,7 +39205,7 @@
           </p:sp>
           <p:sp>
             <p:nvSpPr>
-              <p:cNvPr id="91" name="圆角矩形 90"/>
+              <p:cNvPr id="91" name="Rounded Rectangle 90"/>
               <p:cNvSpPr/>
               <p:nvPr/>
             </p:nvSpPr>
@@ -39256,7 +39256,7 @@
           </p:sp>
           <p:sp>
             <p:nvSpPr>
-              <p:cNvPr id="92" name="圆角矩形 91"/>
+              <p:cNvPr id="92" name="Rounded Rectangle 91"/>
               <p:cNvSpPr/>
               <p:nvPr/>
             </p:nvSpPr>
@@ -39307,7 +39307,7 @@
           </p:sp>
           <p:cxnSp>
             <p:nvCxnSpPr>
-              <p:cNvPr id="96" name="直接箭头连接符 95"/>
+              <p:cNvPr id="96" name="Straight Arrow Connector 95"/>
               <p:cNvCxnSpPr>
                 <a:stCxn id="89" idx="2"/>
                 <a:endCxn id="90" idx="0"/>
@@ -39346,7 +39346,7 @@
           </p:cxnSp>
           <p:cxnSp>
             <p:nvCxnSpPr>
-              <p:cNvPr id="97" name="直接箭头连接符 96"/>
+              <p:cNvPr id="97" name="Straight Arrow Connector 96"/>
               <p:cNvCxnSpPr>
                 <a:stCxn id="90" idx="2"/>
               </p:cNvCxnSpPr>
@@ -39384,7 +39384,7 @@
           </p:cxnSp>
           <p:cxnSp>
             <p:nvCxnSpPr>
-              <p:cNvPr id="98" name="直接箭头连接符 97"/>
+              <p:cNvPr id="98" name="Straight Arrow Connector 97"/>
               <p:cNvCxnSpPr>
                 <a:stCxn id="91" idx="2"/>
               </p:cNvCxnSpPr>
@@ -39423,7 +39423,7 @@
         </p:grpSp>
         <p:cxnSp>
           <p:nvCxnSpPr>
-            <p:cNvPr id="101" name="直接箭头连接符 100"/>
+            <p:cNvPr id="101" name="Straight Arrow Connector 100"/>
             <p:cNvCxnSpPr/>
             <p:nvPr/>
           </p:nvCxnSpPr>
@@ -39460,7 +39460,7 @@
       </p:grpSp>
       <p:grpSp>
         <p:nvGrpSpPr>
-          <p:cNvPr id="111" name="组合 110"/>
+          <p:cNvPr id="111" name="Group 110"/>
           <p:cNvGrpSpPr/>
           <p:nvPr/>
         </p:nvGrpSpPr>
@@ -39474,7 +39474,7 @@
         </p:grpSpPr>
         <p:sp>
           <p:nvSpPr>
-            <p:cNvPr id="72" name="文本框 71"/>
+            <p:cNvPr id="72" name="Text Box 71"/>
             <p:cNvSpPr txBox="1"/>
             <p:nvPr/>
           </p:nvSpPr>
@@ -39504,7 +39504,7 @@
         </p:sp>
         <p:sp>
           <p:nvSpPr>
-            <p:cNvPr id="105" name="圆角矩形 104"/>
+            <p:cNvPr id="105" name="Rounded Rectangle 104"/>
             <p:cNvSpPr/>
             <p:nvPr/>
           </p:nvSpPr>
@@ -39562,7 +39562,7 @@
       </p:grpSp>
       <p:grpSp>
         <p:nvGrpSpPr>
-          <p:cNvPr id="114" name="组合 113"/>
+          <p:cNvPr id="114" name="Group 113"/>
           <p:cNvGrpSpPr/>
           <p:nvPr/>
         </p:nvGrpSpPr>
@@ -39576,7 +39576,7 @@
         </p:grpSpPr>
         <p:sp>
           <p:nvSpPr>
-            <p:cNvPr id="77" name="文本框 76"/>
+            <p:cNvPr id="77" name="Text Box 76"/>
             <p:cNvSpPr txBox="1"/>
             <p:nvPr/>
           </p:nvSpPr>
@@ -39605,7 +39605,7 @@
         </p:sp>
         <p:sp>
           <p:nvSpPr>
-            <p:cNvPr id="107" name="圆角矩形 106"/>
+            <p:cNvPr id="107" name="Rounded Rectangle 106"/>
             <p:cNvSpPr/>
             <p:nvPr/>
           </p:nvSpPr>
@@ -39663,7 +39663,7 @@
       </p:grpSp>
       <p:grpSp>
         <p:nvGrpSpPr>
-          <p:cNvPr id="112" name="组合 111"/>
+          <p:cNvPr id="112" name="Group 111"/>
           <p:cNvGrpSpPr/>
           <p:nvPr/>
         </p:nvGrpSpPr>
@@ -39677,7 +39677,7 @@
         </p:grpSpPr>
         <p:sp>
           <p:nvSpPr>
-            <p:cNvPr id="78" name="文本框 77"/>
+            <p:cNvPr id="78" name="Text Box 77"/>
             <p:cNvSpPr txBox="1"/>
             <p:nvPr/>
           </p:nvSpPr>
@@ -39712,7 +39712,7 @@
         </p:sp>
         <p:sp>
           <p:nvSpPr>
-            <p:cNvPr id="108" name="圆角矩形 107"/>
+            <p:cNvPr id="108" name="Rounded Rectangle 107"/>
             <p:cNvSpPr/>
             <p:nvPr/>
           </p:nvSpPr>
@@ -39770,7 +39770,7 @@
       </p:grpSp>
       <p:sp>
         <p:nvSpPr>
-          <p:cNvPr id="143" name="文本框 142"/>
+          <p:cNvPr id="143" name="Text Box 142"/>
           <p:cNvSpPr txBox="1"/>
           <p:nvPr/>
         </p:nvSpPr>
@@ -39802,7 +39802,7 @@
       </p:sp>
       <p:grpSp>
         <p:nvGrpSpPr>
-          <p:cNvPr id="151" name="组合 150"/>
+          <p:cNvPr id="151" name="Group 150"/>
           <p:cNvGrpSpPr/>
           <p:nvPr/>
         </p:nvGrpSpPr>
@@ -39816,7 +39816,7 @@
         </p:grpSpPr>
         <p:pic>
           <p:nvPicPr>
-            <p:cNvPr id="145" name="图片 144" descr="齿轮"/>
+            <p:cNvPr id="145" name="Picture 144" descr="Gear"/>
             <p:cNvPicPr>
               <a:picLocks noChangeAspect="1"/>
             </p:cNvPicPr>
@@ -39850,7 +39850,7 @@
         </p:pic>
         <p:sp>
           <p:nvSpPr>
-            <p:cNvPr id="146" name="文本框 145"/>
+            <p:cNvPr id="146" name="Text Box 145"/>
             <p:cNvSpPr txBox="1"/>
             <p:nvPr/>
           </p:nvSpPr>
@@ -39882,7 +39882,7 @@
       </p:grpSp>
       <p:pic>
         <p:nvPicPr>
-          <p:cNvPr id="150" name="图片 149"/>
+          <p:cNvPr id="150" name="Picture 149"/>
           <p:cNvPicPr>
             <a:picLocks noChangeAspect="1"/>
           </p:cNvPicPr>
@@ -39920,7 +39920,7 @@
       </p:pic>
       <p:sp>
         <p:nvSpPr>
-          <p:cNvPr id="152" name="文本框 151"/>
+          <p:cNvPr id="152" name="Text Box 151"/>
           <p:cNvSpPr txBox="1"/>
           <p:nvPr/>
         </p:nvSpPr>
@@ -39953,7 +39953,7 @@
       </p:sp>
       <p:sp>
         <p:nvSpPr>
-          <p:cNvPr id="153" name="文本框 152"/>
+          <p:cNvPr id="153" name="Text Box 152"/>
           <p:cNvSpPr txBox="1"/>
           <p:nvPr/>
         </p:nvSpPr>
@@ -39985,7 +39985,7 @@
       </p:sp>
       <p:sp>
         <p:nvSpPr>
-          <p:cNvPr id="157" name="文本框 156"/>
+          <p:cNvPr id="157" name="Text Box 156"/>
           <p:cNvSpPr txBox="1"/>
           <p:nvPr/>
         </p:nvSpPr>
@@ -40017,7 +40017,7 @@
       </p:sp>
       <p:sp>
         <p:nvSpPr>
-          <p:cNvPr id="158" name="文本框 157"/>
+          <p:cNvPr id="158" name="Text Box 157"/>
           <p:cNvSpPr txBox="1"/>
           <p:nvPr/>
         </p:nvSpPr>
@@ -40064,7 +40064,7 @@
       </p:sp>
       <p:cxnSp>
         <p:nvCxnSpPr>
-          <p:cNvPr id="159" name="直接箭头连接符 158"/>
+          <p:cNvPr id="159" name="Straight Arrow Connector 158"/>
           <p:cNvCxnSpPr/>
           <p:nvPr/>
         </p:nvCxnSpPr>
@@ -40100,7 +40100,7 @@
       </p:cxnSp>
       <p:sp>
         <p:nvSpPr>
-          <p:cNvPr id="160" name="椭圆 159"/>
+          <p:cNvPr id="160" name="Oval 159"/>
           <p:cNvSpPr/>
           <p:nvPr/>
         </p:nvSpPr>
@@ -40146,7 +40146,7 @@
       </p:sp>
       <p:grpSp>
         <p:nvGrpSpPr>
-          <p:cNvPr id="166" name="组合 165"/>
+          <p:cNvPr id="166" name="Group 165"/>
           <p:cNvGrpSpPr/>
           <p:nvPr/>
         </p:nvGrpSpPr>
@@ -40160,7 +40160,7 @@
         </p:grpSpPr>
         <p:pic>
           <p:nvPicPr>
-            <p:cNvPr id="148" name="图片 147"/>
+            <p:cNvPr id="148" name="Picture 147"/>
             <p:cNvPicPr>
               <a:picLocks noChangeAspect="1"/>
             </p:cNvPicPr>
@@ -40199,7 +40199,7 @@
         </p:pic>
         <p:sp>
           <p:nvSpPr>
-            <p:cNvPr id="161" name="下箭头 160"/>
+            <p:cNvPr id="161" name="Down Arrow 160"/>
             <p:cNvSpPr/>
             <p:nvPr>
               <p:custDataLst>
@@ -40251,15 +40251,15 @@
             <a:p>
               <a:pPr algn="ctr"/>
               <a:endParaRPr lang="zh-CN" altLang="en-US" b="1">
-                <a:latin typeface="微软雅黑" panose="020B0503020204020204" charset="-122"/>
-                <a:ea typeface="微软雅黑" panose="020B0503020204020204" charset="-122"/>
+                <a:latin typeface="Microsoft YaHei" panose="020B0503020204020204" charset="-122"/>
+                <a:ea typeface="Microsoft YaHei" panose="020B0503020204020204" charset="-122"/>
               </a:endParaRPr>
             </a:p>
           </p:txBody>
         </p:sp>
         <p:sp>
           <p:nvSpPr>
-            <p:cNvPr id="162" name="文本框 161"/>
+            <p:cNvPr id="162" name="Text Box 161"/>
             <p:cNvSpPr txBox="1"/>
             <p:nvPr/>
           </p:nvSpPr>
@@ -40393,7 +40393,7 @@
         </p:sp>
         <p:sp>
           <p:nvSpPr>
-            <p:cNvPr id="163" name="文本框 162"/>
+            <p:cNvPr id="163" name="Text Box 162"/>
             <p:cNvSpPr txBox="1"/>
             <p:nvPr/>
           </p:nvSpPr>
@@ -40437,7 +40437,7 @@
         </p:sp>
         <p:sp>
           <p:nvSpPr>
-            <p:cNvPr id="164" name="文本框 163"/>
+            <p:cNvPr id="164" name="Text Box 163"/>
             <p:cNvSpPr txBox="1"/>
             <p:nvPr/>
           </p:nvSpPr>
@@ -40482,7 +40482,7 @@
       </p:grpSp>
       <p:sp>
         <p:nvSpPr>
-          <p:cNvPr id="175" name="文本框 174"/>
+          <p:cNvPr id="175" name="Text Box 174"/>
           <p:cNvSpPr txBox="1"/>
           <p:nvPr/>
         </p:nvSpPr>
@@ -40524,7 +40524,7 @@
       </p:sp>
       <p:sp>
         <p:nvSpPr>
-          <p:cNvPr id="176" name="文本框 175"/>
+          <p:cNvPr id="176" name="Text Box 175"/>
           <p:cNvSpPr txBox="1"/>
           <p:nvPr/>
         </p:nvSpPr>
@@ -40558,7 +40558,7 @@
       </p:sp>
       <p:sp>
         <p:nvSpPr>
-          <p:cNvPr id="178" name="文本框 177"/>
+          <p:cNvPr id="178" name="Text Box 177"/>
           <p:cNvSpPr txBox="1"/>
           <p:nvPr/>
         </p:nvSpPr>
@@ -40592,7 +40592,7 @@
       </p:sp>
       <p:cxnSp>
         <p:nvCxnSpPr>
-          <p:cNvPr id="179" name="直接连接符 178"/>
+          <p:cNvPr id="179" name="Straight Connector 178"/>
           <p:cNvCxnSpPr/>
           <p:nvPr/>
         </p:nvCxnSpPr>
@@ -40629,7 +40629,7 @@
       </p:cxnSp>
       <p:cxnSp>
         <p:nvCxnSpPr>
-          <p:cNvPr id="182" name="直接连接符 181"/>
+          <p:cNvPr id="182" name="Straight Connector 181"/>
           <p:cNvCxnSpPr/>
           <p:nvPr/>
         </p:nvCxnSpPr>
@@ -40666,7 +40666,7 @@
       </p:cxnSp>
       <p:pic>
         <p:nvPicPr>
-          <p:cNvPr id="183" name="图片 182"/>
+          <p:cNvPr id="183" name="Picture 182"/>
           <p:cNvPicPr>
             <a:picLocks noChangeAspect="1"/>
           </p:cNvPicPr>
@@ -40704,7 +40704,7 @@
       </p:pic>
       <p:pic>
         <p:nvPicPr>
-          <p:cNvPr id="185" name="图片 184"/>
+          <p:cNvPr id="185" name="Picture 184"/>
           <p:cNvPicPr>
             <a:picLocks noChangeAspect="1"/>
           </p:cNvPicPr>
@@ -40749,7 +40749,7 @@
       </p:pic>
       <p:sp>
         <p:nvSpPr>
-          <p:cNvPr id="187" name="文本框 186"/>
+          <p:cNvPr id="187" name="Text Box 186"/>
           <p:cNvSpPr txBox="1"/>
           <p:nvPr/>
         </p:nvSpPr>
@@ -40799,7 +40799,7 @@
       </p:sp>
       <p:grpSp>
         <p:nvGrpSpPr>
-          <p:cNvPr id="195" name="组合 194"/>
+          <p:cNvPr id="195" name="Group 194"/>
           <p:cNvGrpSpPr/>
           <p:nvPr/>
         </p:nvGrpSpPr>
@@ -40813,7 +40813,7 @@
         </p:grpSpPr>
         <p:pic>
           <p:nvPicPr>
-            <p:cNvPr id="192" name="图片 191" descr="箭头"/>
+            <p:cNvPr id="192" name="Picture 191" descr="Arrow"/>
             <p:cNvPicPr>
               <a:picLocks noChangeAspect="1"/>
             </p:cNvPicPr>
@@ -40847,7 +40847,7 @@
         </p:pic>
         <p:sp>
           <p:nvSpPr>
-            <p:cNvPr id="194" name="文本框 193"/>
+            <p:cNvPr id="194" name="Text Box 193"/>
             <p:cNvSpPr txBox="1"/>
             <p:nvPr/>
           </p:nvSpPr>
@@ -40895,7 +40895,7 @@
       </p:grpSp>
       <p:grpSp>
         <p:nvGrpSpPr>
-          <p:cNvPr id="196" name="组合 195"/>
+          <p:cNvPr id="196" name="Group 195"/>
           <p:cNvGrpSpPr/>
           <p:nvPr/>
         </p:nvGrpSpPr>
@@ -40909,7 +40909,7 @@
         </p:grpSpPr>
         <p:pic>
           <p:nvPicPr>
-            <p:cNvPr id="197" name="图片 196" descr="箭头"/>
+            <p:cNvPr id="197" name="Picture 196" descr="Arrow"/>
             <p:cNvPicPr>
               <a:picLocks noChangeAspect="1"/>
             </p:cNvPicPr>
@@ -40943,7 +40943,7 @@
         </p:pic>
         <p:sp>
           <p:nvSpPr>
-            <p:cNvPr id="198" name="文本框 197"/>
+            <p:cNvPr id="198" name="Text Box 197"/>
             <p:cNvSpPr txBox="1"/>
             <p:nvPr/>
           </p:nvSpPr>
@@ -40977,7 +40977,7 @@
       </p:grpSp>
       <p:pic>
         <p:nvPicPr>
-          <p:cNvPr id="200" name="图片 199" descr="箭头"/>
+          <p:cNvPr id="200" name="Picture 199" descr="Arrow"/>
           <p:cNvPicPr>
             <a:picLocks noChangeAspect="1"/>
           </p:cNvPicPr>
@@ -41018,7 +41018,7 @@
       </p:pic>
       <p:sp>
         <p:nvSpPr>
-          <p:cNvPr id="202" name="文本框 201"/>
+          <p:cNvPr id="202" name="Text Box 201"/>
           <p:cNvSpPr txBox="1"/>
           <p:nvPr/>
         </p:nvSpPr>
@@ -41068,7 +41068,7 @@
       </p:sp>
       <p:sp>
         <p:nvSpPr>
-          <p:cNvPr id="203" name="文本框 202"/>
+          <p:cNvPr id="203" name="Text Box 202"/>
           <p:cNvSpPr txBox="1"/>
           <p:nvPr/>
         </p:nvSpPr>
@@ -41197,7 +41197,7 @@
       </p:sp>
       <p:sp>
         <p:nvSpPr>
-          <p:cNvPr id="204" name="文本框 203"/>
+          <p:cNvPr id="204" name="Text Box 203"/>
           <p:cNvSpPr txBox="1"/>
           <p:nvPr/>
         </p:nvSpPr>
@@ -41247,7 +41247,7 @@
       </p:sp>
       <p:sp>
         <p:nvSpPr>
-          <p:cNvPr id="216" name="文本框 215"/>
+          <p:cNvPr id="216" name="Text Box 215"/>
           <p:cNvSpPr txBox="1"/>
           <p:nvPr/>
         </p:nvSpPr>
@@ -42923,12 +42923,12 @@
     <a:fontScheme name="WPS">
       <a:majorFont>
         <a:latin typeface="Arial"/>
-        <a:ea typeface="微软雅黑"/>
+        <a:ea typeface="Microsoft YaHei"/>
         <a:cs typeface=""/>
       </a:majorFont>
       <a:minorFont>
         <a:latin typeface="Arial"/>
-        <a:ea typeface="微软雅黑"/>
+        <a:ea typeface="Microsoft YaHei"/>
         <a:cs typeface=""/>
       </a:minorFont>
     </a:fontScheme>
@@ -43073,7 +43073,7 @@
 </file>
 
 <file path=ppt/theme/theme2.xml><?xml version="1.0" encoding="utf-8"?>
-<a:theme xmlns:a="http://schemas.openxmlformats.org/drawingml/2006/main" name="Office 主题">
+<a:theme xmlns:a="http://schemas.openxmlformats.org/drawingml/2006/main" name="Office Theme">
   <a:themeElements>
     <a:clrScheme name="Office">
       <a:dk1>
@@ -43120,8 +43120,8 @@
         <a:cs typeface=""/>
         <a:font script="Jpan" typeface="ＭＳ Ｐゴシック"/>
         <a:font script="Hang" typeface="맑은 고딕"/>
-        <a:font script="Hans" typeface="宋体"/>
-        <a:font script="Hant" typeface="新細明體"/>
+        <a:font script="Hans" typeface="SimSun"/>
+        <a:font script="Hant" typeface="PMingLiU"/>
         <a:font script="Arab" typeface="Times New Roman"/>
         <a:font script="Hebr" typeface="Times New Roman"/>
         <a:font script="Thai" typeface="Angsana New"/>
@@ -43155,8 +43155,8 @@
         <a:cs typeface=""/>
         <a:font script="Jpan" typeface="ＭＳ Ｐゴシック"/>
         <a:font script="Hang" typeface="맑은 고딕"/>
-        <a:font script="Hans" typeface="宋体"/>
-        <a:font script="Hant" typeface="新細明體"/>
+        <a:font script="Hans" typeface="SimSun"/>
+        <a:font script="Hant" typeface="PMingLiU"/>
         <a:font script="Arab" typeface="Arial"/>
         <a:font script="Hebr" typeface="Arial"/>
         <a:font script="Thai" typeface="Cordia New"/>
@@ -43334,7 +43334,7 @@
 </file>
 
 <file path=ppt/theme/theme3.xml><?xml version="1.0" encoding="utf-8"?>
-<a:theme xmlns:a="http://schemas.openxmlformats.org/drawingml/2006/main" name="Office 主题">
+<a:theme xmlns:a="http://schemas.openxmlformats.org/drawingml/2006/main" name="Office Theme">
   <a:themeElements>
     <a:clrScheme name="Office">
       <a:dk1>
@@ -43381,8 +43381,8 @@
         <a:cs typeface=""/>
         <a:font script="Jpan" typeface="ＭＳ Ｐゴシック"/>
         <a:font script="Hang" typeface="맑은 고딕"/>
-        <a:font script="Hans" typeface="宋体"/>
-        <a:font script="Hant" typeface="新細明體"/>
+        <a:font script="Hans" typeface="SimSun"/>
+        <a:font script="Hant" typeface="PMingLiU"/>
         <a:font script="Arab" typeface="Times New Roman"/>
         <a:font script="Hebr" typeface="Times New Roman"/>
         <a:font script="Thai" typeface="Angsana New"/>
@@ -43416,8 +43416,8 @@
         <a:cs typeface=""/>
         <a:font script="Jpan" typeface="ＭＳ Ｐゴシック"/>
         <a:font script="Hang" typeface="맑은 고딕"/>
-        <a:font script="Hans" typeface="宋体"/>
-        <a:font script="Hant" typeface="新細明體"/>
+        <a:font script="Hans" typeface="SimSun"/>
+        <a:font script="Hant" typeface="PMingLiU"/>
         <a:font script="Arab" typeface="Arial"/>
         <a:font script="Hebr" typeface="Arial"/>
         <a:font script="Thai" typeface="Cordia New"/>
